--- a/docs/notes-feature-tutorial.pptx
+++ b/docs/notes-feature-tutorial.pptx
@@ -5,24 +5,24 @@
     <p:sldMasterId id="2147483648" r:id="rId1"/>
   </p:sldMasterIdLst>
   <p:sldIdLst>
-    <p:sldId id="256" r:id="rId7"/>
-    <p:sldId id="257" r:id="rId8"/>
-    <p:sldId id="258" r:id="rId9"/>
-    <p:sldId id="259" r:id="rId10"/>
-    <p:sldId id="260" r:id="rId11"/>
-    <p:sldId id="261" r:id="rId12"/>
-    <p:sldId id="262" r:id="rId13"/>
-    <p:sldId id="271" r:id="rId22"/>
-    <p:sldId id="263" r:id="rId14"/>
-    <p:sldId id="264" r:id="rId15"/>
-    <p:sldId id="265" r:id="rId16"/>
-    <p:sldId id="266" r:id="rId17"/>
-    <p:sldId id="267" r:id="rId18"/>
-    <p:sldId id="268" r:id="rId19"/>
-    <p:sldId id="269" r:id="rId20"/>
-    <p:sldId id="270" r:id="rId21"/>
+    <p:sldId id="256" r:id="rId2"/>
+    <p:sldId id="257" r:id="rId3"/>
+    <p:sldId id="258" r:id="rId4"/>
+    <p:sldId id="259" r:id="rId5"/>
+    <p:sldId id="260" r:id="rId6"/>
+    <p:sldId id="261" r:id="rId7"/>
+    <p:sldId id="262" r:id="rId8"/>
+    <p:sldId id="271" r:id="rId9"/>
+    <p:sldId id="263" r:id="rId10"/>
+    <p:sldId id="264" r:id="rId11"/>
+    <p:sldId id="265" r:id="rId12"/>
+    <p:sldId id="266" r:id="rId13"/>
+    <p:sldId id="267" r:id="rId14"/>
+    <p:sldId id="268" r:id="rId15"/>
+    <p:sldId id="269" r:id="rId16"/>
+    <p:sldId id="270" r:id="rId17"/>
   </p:sldIdLst>
-  <p:sldSz cx="12191695" cy="6858000" type="screen4x3"/>
+  <p:sldSz cx="12192000" cy="6858000"/>
   <p:notesSz cx="6858000" cy="9144000"/>
   <p:defaultTextStyle>
     <a:defPPr>
@@ -119,6 +119,22 @@
       </a:defRPr>
     </a:lvl9pPr>
   </p:defaultTextStyle>
+  <p:extLst>
+    <p:ext uri="{EFAFB233-063F-42B5-8137-9DF3F51BA10A}">
+      <p15:sldGuideLst xmlns:p15="http://schemas.microsoft.com/office/powerpoint/2012/main">
+        <p15:guide id="1" orient="horz" pos="2160">
+          <p15:clr>
+            <a:srgbClr val="A4A3A4"/>
+          </p15:clr>
+        </p15:guide>
+        <p15:guide id="2" pos="2880">
+          <p15:clr>
+            <a:srgbClr val="A4A3A4"/>
+          </p15:clr>
+        </p15:guide>
+      </p15:sldGuideLst>
+    </p:ext>
+  </p:extLst>
 </p:presentation>
 </file>
 
@@ -160,10 +176,9 @@
           <a:lstStyle/>
           <a:p>
             <a:r>
-              <a:rPr lang="en-US" smtClean="0"/>
+              <a:rPr lang="en-US"/>
               <a:t>Click to edit Master title style</a:t>
             </a:r>
-            <a:endParaRPr lang="en-US"/>
           </a:p>
         </p:txBody>
       </p:sp>
@@ -279,10 +294,9 @@
           </a:lstStyle>
           <a:p>
             <a:r>
-              <a:rPr lang="en-US" smtClean="0"/>
+              <a:rPr lang="en-US"/>
               <a:t>Click to edit Master subtitle style</a:t>
             </a:r>
-            <a:endParaRPr lang="en-US"/>
           </a:p>
         </p:txBody>
       </p:sp>
@@ -303,7 +317,7 @@
           <a:p>
             <a:fld id="{5BCAD085-E8A6-8845-BD4E-CB4CCA059FC4}" type="datetimeFigureOut">
               <a:rPr lang="en-US" smtClean="0"/>
-              <a:t>1/27/13</a:t>
+              <a:t>8/2/26</a:t>
             </a:fld>
             <a:endParaRPr lang="en-US"/>
           </a:p>
@@ -397,10 +411,9 @@
           <a:lstStyle/>
           <a:p>
             <a:r>
-              <a:rPr lang="en-US" smtClean="0"/>
+              <a:rPr lang="en-US"/>
               <a:t>Click to edit Master title style</a:t>
             </a:r>
-            <a:endParaRPr lang="en-US"/>
           </a:p>
         </p:txBody>
       </p:sp>
@@ -421,38 +434,37 @@
           <a:p>
             <a:pPr lvl="0"/>
             <a:r>
-              <a:rPr lang="en-US" smtClean="0"/>
+              <a:rPr lang="en-US"/>
               <a:t>Click to edit Master text styles</a:t>
             </a:r>
           </a:p>
           <a:p>
             <a:pPr lvl="1"/>
             <a:r>
-              <a:rPr lang="en-US" smtClean="0"/>
+              <a:rPr lang="en-US"/>
               <a:t>Second level</a:t>
             </a:r>
           </a:p>
           <a:p>
             <a:pPr lvl="2"/>
             <a:r>
-              <a:rPr lang="en-US" smtClean="0"/>
+              <a:rPr lang="en-US"/>
               <a:t>Third level</a:t>
             </a:r>
           </a:p>
           <a:p>
             <a:pPr lvl="3"/>
             <a:r>
-              <a:rPr lang="en-US" smtClean="0"/>
+              <a:rPr lang="en-US"/>
               <a:t>Fourth level</a:t>
             </a:r>
           </a:p>
           <a:p>
             <a:pPr lvl="4"/>
             <a:r>
-              <a:rPr lang="en-US" smtClean="0"/>
+              <a:rPr lang="en-US"/>
               <a:t>Fifth level</a:t>
             </a:r>
-            <a:endParaRPr lang="en-US"/>
           </a:p>
         </p:txBody>
       </p:sp>
@@ -473,7 +485,7 @@
           <a:p>
             <a:fld id="{5BCAD085-E8A6-8845-BD4E-CB4CCA059FC4}" type="datetimeFigureOut">
               <a:rPr lang="en-US" smtClean="0"/>
-              <a:t>1/27/13</a:t>
+              <a:t>8/2/26</a:t>
             </a:fld>
             <a:endParaRPr lang="en-US"/>
           </a:p>
@@ -572,10 +584,9 @@
           <a:lstStyle/>
           <a:p>
             <a:r>
-              <a:rPr lang="en-US" smtClean="0"/>
+              <a:rPr lang="en-US"/>
               <a:t>Click to edit Master title style</a:t>
             </a:r>
-            <a:endParaRPr lang="en-US"/>
           </a:p>
         </p:txBody>
       </p:sp>
@@ -601,38 +612,37 @@
           <a:p>
             <a:pPr lvl="0"/>
             <a:r>
-              <a:rPr lang="en-US" smtClean="0"/>
+              <a:rPr lang="en-US"/>
               <a:t>Click to edit Master text styles</a:t>
             </a:r>
           </a:p>
           <a:p>
             <a:pPr lvl="1"/>
             <a:r>
-              <a:rPr lang="en-US" smtClean="0"/>
+              <a:rPr lang="en-US"/>
               <a:t>Second level</a:t>
             </a:r>
           </a:p>
           <a:p>
             <a:pPr lvl="2"/>
             <a:r>
-              <a:rPr lang="en-US" smtClean="0"/>
+              <a:rPr lang="en-US"/>
               <a:t>Third level</a:t>
             </a:r>
           </a:p>
           <a:p>
             <a:pPr lvl="3"/>
             <a:r>
-              <a:rPr lang="en-US" smtClean="0"/>
+              <a:rPr lang="en-US"/>
               <a:t>Fourth level</a:t>
             </a:r>
           </a:p>
           <a:p>
             <a:pPr lvl="4"/>
             <a:r>
-              <a:rPr lang="en-US" smtClean="0"/>
+              <a:rPr lang="en-US"/>
               <a:t>Fifth level</a:t>
             </a:r>
-            <a:endParaRPr lang="en-US"/>
           </a:p>
         </p:txBody>
       </p:sp>
@@ -653,7 +663,7 @@
           <a:p>
             <a:fld id="{5BCAD085-E8A6-8845-BD4E-CB4CCA059FC4}" type="datetimeFigureOut">
               <a:rPr lang="en-US" smtClean="0"/>
-              <a:t>1/27/13</a:t>
+              <a:t>8/2/26</a:t>
             </a:fld>
             <a:endParaRPr lang="en-US"/>
           </a:p>
@@ -747,10 +757,9 @@
           <a:lstStyle/>
           <a:p>
             <a:r>
-              <a:rPr lang="en-US" smtClean="0"/>
+              <a:rPr lang="en-US"/>
               <a:t>Click to edit Master title style</a:t>
             </a:r>
-            <a:endParaRPr lang="en-US"/>
           </a:p>
         </p:txBody>
       </p:sp>
@@ -771,38 +780,37 @@
           <a:p>
             <a:pPr lvl="0"/>
             <a:r>
-              <a:rPr lang="en-US" smtClean="0"/>
+              <a:rPr lang="en-US"/>
               <a:t>Click to edit Master text styles</a:t>
             </a:r>
           </a:p>
           <a:p>
             <a:pPr lvl="1"/>
             <a:r>
-              <a:rPr lang="en-US" smtClean="0"/>
+              <a:rPr lang="en-US"/>
               <a:t>Second level</a:t>
             </a:r>
           </a:p>
           <a:p>
             <a:pPr lvl="2"/>
             <a:r>
-              <a:rPr lang="en-US" smtClean="0"/>
+              <a:rPr lang="en-US"/>
               <a:t>Third level</a:t>
             </a:r>
           </a:p>
           <a:p>
             <a:pPr lvl="3"/>
             <a:r>
-              <a:rPr lang="en-US" smtClean="0"/>
+              <a:rPr lang="en-US"/>
               <a:t>Fourth level</a:t>
             </a:r>
           </a:p>
           <a:p>
             <a:pPr lvl="4"/>
             <a:r>
-              <a:rPr lang="en-US" smtClean="0"/>
+              <a:rPr lang="en-US"/>
               <a:t>Fifth level</a:t>
             </a:r>
-            <a:endParaRPr lang="en-US"/>
           </a:p>
         </p:txBody>
       </p:sp>
@@ -823,7 +831,7 @@
           <a:p>
             <a:fld id="{5BCAD085-E8A6-8845-BD4E-CB4CCA059FC4}" type="datetimeFigureOut">
               <a:rPr lang="en-US" smtClean="0"/>
-              <a:t>1/27/13</a:t>
+              <a:t>8/2/26</a:t>
             </a:fld>
             <a:endParaRPr lang="en-US"/>
           </a:p>
@@ -926,10 +934,9 @@
           </a:lstStyle>
           <a:p>
             <a:r>
-              <a:rPr lang="en-US" smtClean="0"/>
+              <a:rPr lang="en-US"/>
               <a:t>Click to edit Master title style</a:t>
             </a:r>
-            <a:endParaRPr lang="en-US"/>
           </a:p>
         </p:txBody>
       </p:sp>
@@ -1046,7 +1053,7 @@
           <a:p>
             <a:pPr lvl="0"/>
             <a:r>
-              <a:rPr lang="en-US" smtClean="0"/>
+              <a:rPr lang="en-US"/>
               <a:t>Click to edit Master text styles</a:t>
             </a:r>
           </a:p>
@@ -1069,7 +1076,7 @@
           <a:p>
             <a:fld id="{5BCAD085-E8A6-8845-BD4E-CB4CCA059FC4}" type="datetimeFigureOut">
               <a:rPr lang="en-US" smtClean="0"/>
-              <a:t>1/27/13</a:t>
+              <a:t>8/2/26</a:t>
             </a:fld>
             <a:endParaRPr lang="en-US"/>
           </a:p>
@@ -1163,10 +1170,9 @@
           <a:lstStyle/>
           <a:p>
             <a:r>
-              <a:rPr lang="en-US" smtClean="0"/>
+              <a:rPr lang="en-US"/>
               <a:t>Click to edit Master title style</a:t>
             </a:r>
-            <a:endParaRPr lang="en-US"/>
           </a:p>
         </p:txBody>
       </p:sp>
@@ -1220,38 +1226,37 @@
           <a:p>
             <a:pPr lvl="0"/>
             <a:r>
-              <a:rPr lang="en-US" smtClean="0"/>
+              <a:rPr lang="en-US"/>
               <a:t>Click to edit Master text styles</a:t>
             </a:r>
           </a:p>
           <a:p>
             <a:pPr lvl="1"/>
             <a:r>
-              <a:rPr lang="en-US" smtClean="0"/>
+              <a:rPr lang="en-US"/>
               <a:t>Second level</a:t>
             </a:r>
           </a:p>
           <a:p>
             <a:pPr lvl="2"/>
             <a:r>
-              <a:rPr lang="en-US" smtClean="0"/>
+              <a:rPr lang="en-US"/>
               <a:t>Third level</a:t>
             </a:r>
           </a:p>
           <a:p>
             <a:pPr lvl="3"/>
             <a:r>
-              <a:rPr lang="en-US" smtClean="0"/>
+              <a:rPr lang="en-US"/>
               <a:t>Fourth level</a:t>
             </a:r>
           </a:p>
           <a:p>
             <a:pPr lvl="4"/>
             <a:r>
-              <a:rPr lang="en-US" smtClean="0"/>
+              <a:rPr lang="en-US"/>
               <a:t>Fifth level</a:t>
             </a:r>
-            <a:endParaRPr lang="en-US"/>
           </a:p>
         </p:txBody>
       </p:sp>
@@ -1305,38 +1310,37 @@
           <a:p>
             <a:pPr lvl="0"/>
             <a:r>
-              <a:rPr lang="en-US" smtClean="0"/>
+              <a:rPr lang="en-US"/>
               <a:t>Click to edit Master text styles</a:t>
             </a:r>
           </a:p>
           <a:p>
             <a:pPr lvl="1"/>
             <a:r>
-              <a:rPr lang="en-US" smtClean="0"/>
+              <a:rPr lang="en-US"/>
               <a:t>Second level</a:t>
             </a:r>
           </a:p>
           <a:p>
             <a:pPr lvl="2"/>
             <a:r>
-              <a:rPr lang="en-US" smtClean="0"/>
+              <a:rPr lang="en-US"/>
               <a:t>Third level</a:t>
             </a:r>
           </a:p>
           <a:p>
             <a:pPr lvl="3"/>
             <a:r>
-              <a:rPr lang="en-US" smtClean="0"/>
+              <a:rPr lang="en-US"/>
               <a:t>Fourth level</a:t>
             </a:r>
           </a:p>
           <a:p>
             <a:pPr lvl="4"/>
             <a:r>
-              <a:rPr lang="en-US" smtClean="0"/>
+              <a:rPr lang="en-US"/>
               <a:t>Fifth level</a:t>
             </a:r>
-            <a:endParaRPr lang="en-US"/>
           </a:p>
         </p:txBody>
       </p:sp>
@@ -1357,7 +1361,7 @@
           <a:p>
             <a:fld id="{5BCAD085-E8A6-8845-BD4E-CB4CCA059FC4}" type="datetimeFigureOut">
               <a:rPr lang="en-US" smtClean="0"/>
-              <a:t>1/27/13</a:t>
+              <a:t>8/2/26</a:t>
             </a:fld>
             <a:endParaRPr lang="en-US"/>
           </a:p>
@@ -1455,10 +1459,9 @@
           </a:lstStyle>
           <a:p>
             <a:r>
-              <a:rPr lang="en-US" smtClean="0"/>
+              <a:rPr lang="en-US"/>
               <a:t>Click to edit Master title style</a:t>
             </a:r>
-            <a:endParaRPr lang="en-US"/>
           </a:p>
         </p:txBody>
       </p:sp>
@@ -1521,7 +1524,7 @@
           <a:p>
             <a:pPr lvl="0"/>
             <a:r>
-              <a:rPr lang="en-US" smtClean="0"/>
+              <a:rPr lang="en-US"/>
               <a:t>Click to edit Master text styles</a:t>
             </a:r>
           </a:p>
@@ -1577,38 +1580,37 @@
           <a:p>
             <a:pPr lvl="0"/>
             <a:r>
-              <a:rPr lang="en-US" smtClean="0"/>
+              <a:rPr lang="en-US"/>
               <a:t>Click to edit Master text styles</a:t>
             </a:r>
           </a:p>
           <a:p>
             <a:pPr lvl="1"/>
             <a:r>
-              <a:rPr lang="en-US" smtClean="0"/>
+              <a:rPr lang="en-US"/>
               <a:t>Second level</a:t>
             </a:r>
           </a:p>
           <a:p>
             <a:pPr lvl="2"/>
             <a:r>
-              <a:rPr lang="en-US" smtClean="0"/>
+              <a:rPr lang="en-US"/>
               <a:t>Third level</a:t>
             </a:r>
           </a:p>
           <a:p>
             <a:pPr lvl="3"/>
             <a:r>
-              <a:rPr lang="en-US" smtClean="0"/>
+              <a:rPr lang="en-US"/>
               <a:t>Fourth level</a:t>
             </a:r>
           </a:p>
           <a:p>
             <a:pPr lvl="4"/>
             <a:r>
-              <a:rPr lang="en-US" smtClean="0"/>
+              <a:rPr lang="en-US"/>
               <a:t>Fifth level</a:t>
             </a:r>
-            <a:endParaRPr lang="en-US"/>
           </a:p>
         </p:txBody>
       </p:sp>
@@ -1671,7 +1673,7 @@
           <a:p>
             <a:pPr lvl="0"/>
             <a:r>
-              <a:rPr lang="en-US" smtClean="0"/>
+              <a:rPr lang="en-US"/>
               <a:t>Click to edit Master text styles</a:t>
             </a:r>
           </a:p>
@@ -1727,38 +1729,37 @@
           <a:p>
             <a:pPr lvl="0"/>
             <a:r>
-              <a:rPr lang="en-US" smtClean="0"/>
+              <a:rPr lang="en-US"/>
               <a:t>Click to edit Master text styles</a:t>
             </a:r>
           </a:p>
           <a:p>
             <a:pPr lvl="1"/>
             <a:r>
-              <a:rPr lang="en-US" smtClean="0"/>
+              <a:rPr lang="en-US"/>
               <a:t>Second level</a:t>
             </a:r>
           </a:p>
           <a:p>
             <a:pPr lvl="2"/>
             <a:r>
-              <a:rPr lang="en-US" smtClean="0"/>
+              <a:rPr lang="en-US"/>
               <a:t>Third level</a:t>
             </a:r>
           </a:p>
           <a:p>
             <a:pPr lvl="3"/>
             <a:r>
-              <a:rPr lang="en-US" smtClean="0"/>
+              <a:rPr lang="en-US"/>
               <a:t>Fourth level</a:t>
             </a:r>
           </a:p>
           <a:p>
             <a:pPr lvl="4"/>
             <a:r>
-              <a:rPr lang="en-US" smtClean="0"/>
+              <a:rPr lang="en-US"/>
               <a:t>Fifth level</a:t>
             </a:r>
-            <a:endParaRPr lang="en-US"/>
           </a:p>
         </p:txBody>
       </p:sp>
@@ -1779,7 +1780,7 @@
           <a:p>
             <a:fld id="{5BCAD085-E8A6-8845-BD4E-CB4CCA059FC4}" type="datetimeFigureOut">
               <a:rPr lang="en-US" smtClean="0"/>
-              <a:t>1/27/13</a:t>
+              <a:t>8/2/26</a:t>
             </a:fld>
             <a:endParaRPr lang="en-US"/>
           </a:p>
@@ -1873,10 +1874,9 @@
           <a:lstStyle/>
           <a:p>
             <a:r>
-              <a:rPr lang="en-US" smtClean="0"/>
+              <a:rPr lang="en-US"/>
               <a:t>Click to edit Master title style</a:t>
             </a:r>
-            <a:endParaRPr lang="en-US"/>
           </a:p>
         </p:txBody>
       </p:sp>
@@ -1897,7 +1897,7 @@
           <a:p>
             <a:fld id="{5BCAD085-E8A6-8845-BD4E-CB4CCA059FC4}" type="datetimeFigureOut">
               <a:rPr lang="en-US" smtClean="0"/>
-              <a:t>1/27/13</a:t>
+              <a:t>8/2/26</a:t>
             </a:fld>
             <a:endParaRPr lang="en-US"/>
           </a:p>
@@ -1992,7 +1992,7 @@
           <a:p>
             <a:fld id="{5BCAD085-E8A6-8845-BD4E-CB4CCA059FC4}" type="datetimeFigureOut">
               <a:rPr lang="en-US" smtClean="0"/>
-              <a:t>1/27/13</a:t>
+              <a:t>8/2/26</a:t>
             </a:fld>
             <a:endParaRPr lang="en-US"/>
           </a:p>
@@ -2095,10 +2095,9 @@
           </a:lstStyle>
           <a:p>
             <a:r>
-              <a:rPr lang="en-US" smtClean="0"/>
+              <a:rPr lang="en-US"/>
               <a:t>Click to edit Master title style</a:t>
             </a:r>
-            <a:endParaRPr lang="en-US"/>
           </a:p>
         </p:txBody>
       </p:sp>
@@ -2152,38 +2151,37 @@
           <a:p>
             <a:pPr lvl="0"/>
             <a:r>
-              <a:rPr lang="en-US" smtClean="0"/>
+              <a:rPr lang="en-US"/>
               <a:t>Click to edit Master text styles</a:t>
             </a:r>
           </a:p>
           <a:p>
             <a:pPr lvl="1"/>
             <a:r>
-              <a:rPr lang="en-US" smtClean="0"/>
+              <a:rPr lang="en-US"/>
               <a:t>Second level</a:t>
             </a:r>
           </a:p>
           <a:p>
             <a:pPr lvl="2"/>
             <a:r>
-              <a:rPr lang="en-US" smtClean="0"/>
+              <a:rPr lang="en-US"/>
               <a:t>Third level</a:t>
             </a:r>
           </a:p>
           <a:p>
             <a:pPr lvl="3"/>
             <a:r>
-              <a:rPr lang="en-US" smtClean="0"/>
+              <a:rPr lang="en-US"/>
               <a:t>Fourth level</a:t>
             </a:r>
           </a:p>
           <a:p>
             <a:pPr lvl="4"/>
             <a:r>
-              <a:rPr lang="en-US" smtClean="0"/>
+              <a:rPr lang="en-US"/>
               <a:t>Fifth level</a:t>
             </a:r>
-            <a:endParaRPr lang="en-US"/>
           </a:p>
         </p:txBody>
       </p:sp>
@@ -2246,7 +2244,7 @@
           <a:p>
             <a:pPr lvl="0"/>
             <a:r>
-              <a:rPr lang="en-US" smtClean="0"/>
+              <a:rPr lang="en-US"/>
               <a:t>Click to edit Master text styles</a:t>
             </a:r>
           </a:p>
@@ -2269,7 +2267,7 @@
           <a:p>
             <a:fld id="{5BCAD085-E8A6-8845-BD4E-CB4CCA059FC4}" type="datetimeFigureOut">
               <a:rPr lang="en-US" smtClean="0"/>
-              <a:t>1/27/13</a:t>
+              <a:t>8/2/26</a:t>
             </a:fld>
             <a:endParaRPr lang="en-US"/>
           </a:p>
@@ -2372,10 +2370,9 @@
           </a:lstStyle>
           <a:p>
             <a:r>
-              <a:rPr lang="en-US" smtClean="0"/>
+              <a:rPr lang="en-US"/>
               <a:t>Click to edit Master title style</a:t>
             </a:r>
-            <a:endParaRPr lang="en-US"/>
           </a:p>
         </p:txBody>
       </p:sp>
@@ -2499,7 +2496,7 @@
           <a:p>
             <a:pPr lvl="0"/>
             <a:r>
-              <a:rPr lang="en-US" smtClean="0"/>
+              <a:rPr lang="en-US"/>
               <a:t>Click to edit Master text styles</a:t>
             </a:r>
           </a:p>
@@ -2522,7 +2519,7 @@
           <a:p>
             <a:fld id="{5BCAD085-E8A6-8845-BD4E-CB4CCA059FC4}" type="datetimeFigureOut">
               <a:rPr lang="en-US" smtClean="0"/>
-              <a:t>1/27/13</a:t>
+              <a:t>8/2/26</a:t>
             </a:fld>
             <a:endParaRPr lang="en-US"/>
           </a:p>
@@ -2631,10 +2628,9 @@
           <a:lstStyle/>
           <a:p>
             <a:r>
-              <a:rPr lang="en-US" smtClean="0"/>
+              <a:rPr lang="en-US"/>
               <a:t>Click to edit Master title style</a:t>
             </a:r>
-            <a:endParaRPr lang="en-US"/>
           </a:p>
         </p:txBody>
       </p:sp>
@@ -2665,38 +2661,37 @@
           <a:p>
             <a:pPr lvl="0"/>
             <a:r>
-              <a:rPr lang="en-US" smtClean="0"/>
+              <a:rPr lang="en-US"/>
               <a:t>Click to edit Master text styles</a:t>
             </a:r>
           </a:p>
           <a:p>
             <a:pPr lvl="1"/>
             <a:r>
-              <a:rPr lang="en-US" smtClean="0"/>
+              <a:rPr lang="en-US"/>
               <a:t>Second level</a:t>
             </a:r>
           </a:p>
           <a:p>
             <a:pPr lvl="2"/>
             <a:r>
-              <a:rPr lang="en-US" smtClean="0"/>
+              <a:rPr lang="en-US"/>
               <a:t>Third level</a:t>
             </a:r>
           </a:p>
           <a:p>
             <a:pPr lvl="3"/>
             <a:r>
-              <a:rPr lang="en-US" smtClean="0"/>
+              <a:rPr lang="en-US"/>
               <a:t>Fourth level</a:t>
             </a:r>
           </a:p>
           <a:p>
             <a:pPr lvl="4"/>
             <a:r>
-              <a:rPr lang="en-US" smtClean="0"/>
+              <a:rPr lang="en-US"/>
               <a:t>Fifth level</a:t>
             </a:r>
-            <a:endParaRPr lang="en-US"/>
           </a:p>
         </p:txBody>
       </p:sp>
@@ -2735,7 +2730,7 @@
           <a:p>
             <a:fld id="{5BCAD085-E8A6-8845-BD4E-CB4CCA059FC4}" type="datetimeFigureOut">
               <a:rPr lang="en-US" smtClean="0"/>
-              <a:t>1/27/13</a:t>
+              <a:t>8/2/26</a:t>
             </a:fld>
             <a:endParaRPr lang="en-US"/>
           </a:p>
@@ -3094,7 +3089,7 @@
 </file>
 
 <file path=ppt/slides/slide1.xml><?xml version="1.0" encoding="utf-8"?>
-<p:sld xmlns:a="http://schemas.openxmlformats.org/drawingml/2006/main" xmlns:p="http://schemas.openxmlformats.org/presentationml/2006/main" xmlns:r="http://schemas.openxmlformats.org/officeDocument/2006/relationships">
+<p:sld xmlns:a="http://schemas.openxmlformats.org/drawingml/2006/main" xmlns:r="http://schemas.openxmlformats.org/officeDocument/2006/relationships" xmlns:p="http://schemas.openxmlformats.org/presentationml/2006/main">
   <p:cSld>
     <p:bg>
       <p:bgPr>
@@ -3110,7 +3105,14 @@
         <p:cNvGrpSpPr/>
         <p:nvPr/>
       </p:nvGrpSpPr>
-      <p:grpSpPr/>
+      <p:grpSpPr>
+        <a:xfrm>
+          <a:off x="0" y="0"/>
+          <a:ext cx="0" cy="0"/>
+          <a:chOff x="0" y="0"/>
+          <a:chExt cx="0" cy="0"/>
+        </a:xfrm>
+      </p:grpSpPr>
       <p:sp>
         <p:nvSpPr>
           <p:cNvPr id="2" name="TextBox 1"/>
@@ -3190,6 +3192,7 @@
           <a:lstStyle/>
           <a:p>
             <a:pPr algn="ctr"/>
+            <a:endParaRPr/>
           </a:p>
         </p:txBody>
       </p:sp>
@@ -3293,7 +3296,7 @@
 </file>
 
 <file path=ppt/slides/slide10.xml><?xml version="1.0" encoding="utf-8"?>
-<p:sld xmlns:a="http://schemas.openxmlformats.org/drawingml/2006/main" xmlns:p="http://schemas.openxmlformats.org/presentationml/2006/main" xmlns:r="http://schemas.openxmlformats.org/officeDocument/2006/relationships">
+<p:sld xmlns:a="http://schemas.openxmlformats.org/drawingml/2006/main" xmlns:r="http://schemas.openxmlformats.org/officeDocument/2006/relationships" xmlns:p="http://schemas.openxmlformats.org/presentationml/2006/main">
   <p:cSld>
     <p:bg>
       <p:bgPr>
@@ -3309,7 +3312,14 @@
         <p:cNvGrpSpPr/>
         <p:nvPr/>
       </p:nvGrpSpPr>
-      <p:grpSpPr/>
+      <p:grpSpPr>
+        <a:xfrm>
+          <a:off x="0" y="0"/>
+          <a:ext cx="0" cy="0"/>
+          <a:chOff x="0" y="0"/>
+          <a:chExt cx="0" cy="0"/>
+        </a:xfrm>
+      </p:grpSpPr>
       <p:sp>
         <p:nvSpPr>
           <p:cNvPr id="2" name="Rounded Rectangle 1"/>
@@ -3475,7 +3485,7 @@
           </a:fontRef>
         </p:style>
         <p:txBody>
-          <a:bodyPr rtlCol="0" anchor="t" wrap="none" lIns="228600" rIns="182880" tIns="128016"/>
+          <a:bodyPr wrap="none" lIns="228600" tIns="128016" rIns="182880" rtlCol="0" anchor="t"/>
           <a:lstStyle/>
           <a:p>
             <a:pPr algn="ctr">
@@ -3484,23 +3494,59 @@
               </a:spcAft>
             </a:pPr>
             <a:r>
-              <a:rPr sz="1000" b="1">
+              <a:rPr sz="1000" b="1" dirty="0">
                 <a:solidFill>
                   <a:srgbClr val="F59E0B"/>
                 </a:solidFill>
                 <a:latin typeface="Courier New"/>
               </a:rPr>
-              <a:t>frontend/src/features/notes/components/NotesList.tsx  (new)</a:t>
-            </a:r>
-          </a:p>
-          <a:p>
-            <a:pPr>
-              <a:spcAft>
-                <a:spcPts val="100"/>
-              </a:spcAft>
-            </a:pPr>
-            <a:r>
-              <a:rPr sz="1100">
+              <a:t>frontend/</a:t>
+            </a:r>
+            <a:r>
+              <a:rPr sz="1000" b="1" dirty="0" err="1">
+                <a:solidFill>
+                  <a:srgbClr val="F59E0B"/>
+                </a:solidFill>
+                <a:latin typeface="Courier New"/>
+              </a:rPr>
+              <a:t>src</a:t>
+            </a:r>
+            <a:r>
+              <a:rPr sz="1000" b="1" dirty="0">
+                <a:solidFill>
+                  <a:srgbClr val="F59E0B"/>
+                </a:solidFill>
+                <a:latin typeface="Courier New"/>
+              </a:rPr>
+              <a:t>/features/notes/components/</a:t>
+            </a:r>
+            <a:r>
+              <a:rPr sz="1000" b="1" dirty="0" err="1">
+                <a:solidFill>
+                  <a:srgbClr val="F59E0B"/>
+                </a:solidFill>
+                <a:latin typeface="Courier New"/>
+              </a:rPr>
+              <a:t>NotesList.tsx</a:t>
+            </a:r>
+            <a:r>
+              <a:rPr sz="1000" b="1" dirty="0">
+                <a:solidFill>
+                  <a:srgbClr val="F59E0B"/>
+                </a:solidFill>
+                <a:latin typeface="Courier New"/>
+              </a:rPr>
+              <a:t>  (new)</a:t>
+            </a:r>
+          </a:p>
+          <a:p>
+            <a:pPr>
+              <a:spcAft>
+                <a:spcPts val="100"/>
+              </a:spcAft>
+            </a:pPr>
+            <a:r>
+              <a:rPr sz="1100" dirty="0">
                 <a:solidFill>
                   <a:srgbClr val="E2E8F0"/>
                 </a:solidFill>
@@ -3516,7 +3562,7 @@
               </a:spcAft>
             </a:pPr>
             <a:r>
-              <a:rPr sz="1100">
+              <a:rPr sz="1100" dirty="0">
                 <a:solidFill>
                   <a:srgbClr val="E2E8F0"/>
                 </a:solidFill>
@@ -3532,87 +3578,195 @@
               </a:spcAft>
             </a:pPr>
             <a:r>
-              <a:rPr sz="1100">
-                <a:solidFill>
-                  <a:srgbClr val="E2E8F0"/>
-                </a:solidFill>
-                <a:latin typeface="Courier New"/>
-              </a:rPr>
-              <a:t>export function NotesList() {</a:t>
-            </a:r>
-          </a:p>
-          <a:p>
-            <a:pPr>
-              <a:spcAft>
-                <a:spcPts val="100"/>
-              </a:spcAft>
-            </a:pPr>
-            <a:r>
-              <a:rPr sz="1100">
-                <a:solidFill>
-                  <a:srgbClr val="E2E8F0"/>
-                </a:solidFill>
-                <a:latin typeface="Courier New"/>
-              </a:rPr>
-              <a:t>  const { user } = useAuth()</a:t>
-            </a:r>
-          </a:p>
-          <a:p>
-            <a:pPr>
-              <a:spcAft>
-                <a:spcPts val="100"/>
-              </a:spcAft>
-            </a:pPr>
-            <a:r>
-              <a:rPr sz="1100">
-                <a:solidFill>
-                  <a:srgbClr val="E2E8F0"/>
-                </a:solidFill>
-                <a:latin typeface="Courier New"/>
-              </a:rPr>
-              <a:t>  const { data: notes, loading } = useCollection(</a:t>
-            </a:r>
-          </a:p>
-          <a:p>
-            <a:pPr>
-              <a:spcAft>
-                <a:spcPts val="100"/>
-              </a:spcAft>
-            </a:pPr>
-            <a:r>
-              <a:rPr sz="1100">
-                <a:solidFill>
-                  <a:srgbClr val="E2E8F0"/>
-                </a:solidFill>
-                <a:latin typeface="Courier New"/>
-              </a:rPr>
-              <a:t>    getNotesCollection(),</a:t>
-            </a:r>
-          </a:p>
-          <a:p>
-            <a:pPr>
-              <a:spcAft>
-                <a:spcPts val="100"/>
-              </a:spcAft>
-            </a:pPr>
-            <a:r>
-              <a:rPr sz="1100">
-                <a:solidFill>
-                  <a:srgbClr val="E2E8F0"/>
-                </a:solidFill>
-                <a:latin typeface="Courier New"/>
-              </a:rPr>
-              <a:t>    where('uid', '==', user?.uid ?? ''),</a:t>
-            </a:r>
-          </a:p>
-          <a:p>
-            <a:pPr>
-              <a:spcAft>
-                <a:spcPts val="100"/>
-              </a:spcAft>
-            </a:pPr>
-            <a:r>
-              <a:rPr sz="1100">
+              <a:rPr sz="1100" dirty="0">
+                <a:solidFill>
+                  <a:srgbClr val="E2E8F0"/>
+                </a:solidFill>
+                <a:latin typeface="Courier New"/>
+              </a:rPr>
+              <a:t>export function </a:t>
+            </a:r>
+            <a:r>
+              <a:rPr sz="1100" dirty="0" err="1">
+                <a:solidFill>
+                  <a:srgbClr val="E2E8F0"/>
+                </a:solidFill>
+                <a:latin typeface="Courier New"/>
+              </a:rPr>
+              <a:t>NotesList</a:t>
+            </a:r>
+            <a:r>
+              <a:rPr sz="1100" dirty="0">
+                <a:solidFill>
+                  <a:srgbClr val="E2E8F0"/>
+                </a:solidFill>
+                <a:latin typeface="Courier New"/>
+              </a:rPr>
+              <a:t>() {</a:t>
+            </a:r>
+          </a:p>
+          <a:p>
+            <a:pPr>
+              <a:spcAft>
+                <a:spcPts val="100"/>
+              </a:spcAft>
+            </a:pPr>
+            <a:r>
+              <a:rPr sz="1100" dirty="0">
+                <a:solidFill>
+                  <a:srgbClr val="E2E8F0"/>
+                </a:solidFill>
+                <a:latin typeface="Courier New"/>
+              </a:rPr>
+              <a:t>  const { user } = </a:t>
+            </a:r>
+            <a:r>
+              <a:rPr sz="1100" dirty="0" err="1">
+                <a:solidFill>
+                  <a:srgbClr val="E2E8F0"/>
+                </a:solidFill>
+                <a:latin typeface="Courier New"/>
+              </a:rPr>
+              <a:t>useAuth</a:t>
+            </a:r>
+            <a:r>
+              <a:rPr sz="1100" dirty="0">
+                <a:solidFill>
+                  <a:srgbClr val="E2E8F0"/>
+                </a:solidFill>
+                <a:latin typeface="Courier New"/>
+              </a:rPr>
+              <a:t>()</a:t>
+            </a:r>
+          </a:p>
+          <a:p>
+            <a:pPr>
+              <a:spcAft>
+                <a:spcPts val="100"/>
+              </a:spcAft>
+            </a:pPr>
+            <a:r>
+              <a:rPr sz="1100" dirty="0">
+                <a:solidFill>
+                  <a:srgbClr val="E2E8F0"/>
+                </a:solidFill>
+                <a:latin typeface="Courier New"/>
+              </a:rPr>
+              <a:t>  const { data: notes, loading } = </a:t>
+            </a:r>
+            <a:r>
+              <a:rPr sz="1100" dirty="0" err="1">
+                <a:solidFill>
+                  <a:srgbClr val="E2E8F0"/>
+                </a:solidFill>
+                <a:latin typeface="Courier New"/>
+              </a:rPr>
+              <a:t>useCollection</a:t>
+            </a:r>
+            <a:r>
+              <a:rPr sz="1100" dirty="0">
+                <a:solidFill>
+                  <a:srgbClr val="E2E8F0"/>
+                </a:solidFill>
+                <a:latin typeface="Courier New"/>
+              </a:rPr>
+              <a:t>(</a:t>
+            </a:r>
+          </a:p>
+          <a:p>
+            <a:pPr>
+              <a:spcAft>
+                <a:spcPts val="100"/>
+              </a:spcAft>
+            </a:pPr>
+            <a:r>
+              <a:rPr sz="1100" dirty="0">
+                <a:solidFill>
+                  <a:srgbClr val="E2E8F0"/>
+                </a:solidFill>
+                <a:latin typeface="Courier New"/>
+              </a:rPr>
+              <a:t>    </a:t>
+            </a:r>
+            <a:r>
+              <a:rPr sz="1100" dirty="0" err="1">
+                <a:solidFill>
+                  <a:srgbClr val="E2E8F0"/>
+                </a:solidFill>
+                <a:latin typeface="Courier New"/>
+              </a:rPr>
+              <a:t>getNotesCollection</a:t>
+            </a:r>
+            <a:r>
+              <a:rPr sz="1100" dirty="0">
+                <a:solidFill>
+                  <a:srgbClr val="E2E8F0"/>
+                </a:solidFill>
+                <a:latin typeface="Courier New"/>
+              </a:rPr>
+              <a:t>(),</a:t>
+            </a:r>
+          </a:p>
+          <a:p>
+            <a:pPr>
+              <a:spcAft>
+                <a:spcPts val="100"/>
+              </a:spcAft>
+            </a:pPr>
+            <a:r>
+              <a:rPr sz="1100" dirty="0">
+                <a:solidFill>
+                  <a:srgbClr val="E2E8F0"/>
+                </a:solidFill>
+                <a:latin typeface="Courier New"/>
+              </a:rPr>
+              <a:t>    where('</a:t>
+            </a:r>
+            <a:r>
+              <a:rPr sz="1100" dirty="0" err="1">
+                <a:solidFill>
+                  <a:srgbClr val="E2E8F0"/>
+                </a:solidFill>
+                <a:latin typeface="Courier New"/>
+              </a:rPr>
+              <a:t>uid</a:t>
+            </a:r>
+            <a:r>
+              <a:rPr sz="1100" dirty="0">
+                <a:solidFill>
+                  <a:srgbClr val="E2E8F0"/>
+                </a:solidFill>
+                <a:latin typeface="Courier New"/>
+              </a:rPr>
+              <a:t>', '==', user?.</a:t>
+            </a:r>
+            <a:r>
+              <a:rPr sz="1100" dirty="0" err="1">
+                <a:solidFill>
+                  <a:srgbClr val="E2E8F0"/>
+                </a:solidFill>
+                <a:latin typeface="Courier New"/>
+              </a:rPr>
+              <a:t>uid</a:t>
+            </a:r>
+            <a:r>
+              <a:rPr sz="1100" dirty="0">
+                <a:solidFill>
+                  <a:srgbClr val="E2E8F0"/>
+                </a:solidFill>
+                <a:latin typeface="Courier New"/>
+              </a:rPr>
+              <a:t> ?? ''),</a:t>
+            </a:r>
+          </a:p>
+          <a:p>
+            <a:pPr>
+              <a:spcAft>
+                <a:spcPts val="100"/>
+              </a:spcAft>
+            </a:pPr>
+            <a:r>
+              <a:rPr sz="1100" dirty="0">
                 <a:solidFill>
                   <a:srgbClr val="E2E8F0"/>
                 </a:solidFill>
@@ -3628,7 +3782,7 @@
               </a:spcAft>
             </a:pPr>
             <a:r>
-              <a:rPr sz="1100">
+              <a:rPr sz="1100" dirty="0">
                 <a:solidFill>
                   <a:srgbClr val="E2E8F0"/>
                 </a:solidFill>
@@ -3644,39 +3798,93 @@
               </a:spcAft>
             </a:pPr>
             <a:r>
-              <a:rPr sz="1100">
-                <a:solidFill>
-                  <a:srgbClr val="E2E8F0"/>
-                </a:solidFill>
-                <a:latin typeface="Courier New"/>
-              </a:rPr>
-              <a:t>  if (loading) return &lt;LoadingSpinner /&gt;</a:t>
-            </a:r>
-          </a:p>
-          <a:p>
-            <a:pPr>
-              <a:spcAft>
-                <a:spcPts val="100"/>
-              </a:spcAft>
-            </a:pPr>
-            <a:r>
-              <a:rPr sz="1100">
-                <a:solidFill>
-                  <a:srgbClr val="E2E8F0"/>
-                </a:solidFill>
-                <a:latin typeface="Courier New"/>
-              </a:rPr>
-              <a:t>  if (notes.length === 0) return &lt;EmptyState title="No notes yet" /&gt;</a:t>
-            </a:r>
-          </a:p>
-          <a:p>
-            <a:pPr>
-              <a:spcAft>
-                <a:spcPts val="100"/>
-              </a:spcAft>
-            </a:pPr>
-            <a:r>
-              <a:rPr sz="1100">
+              <a:rPr sz="1100" dirty="0">
+                <a:solidFill>
+                  <a:srgbClr val="E2E8F0"/>
+                </a:solidFill>
+                <a:latin typeface="Courier New"/>
+              </a:rPr>
+              <a:t>  if (loading) return &lt;</a:t>
+            </a:r>
+            <a:r>
+              <a:rPr sz="1100" dirty="0" err="1">
+                <a:solidFill>
+                  <a:srgbClr val="E2E8F0"/>
+                </a:solidFill>
+                <a:latin typeface="Courier New"/>
+              </a:rPr>
+              <a:t>LoadingSpinner</a:t>
+            </a:r>
+            <a:r>
+              <a:rPr sz="1100" dirty="0">
+                <a:solidFill>
+                  <a:srgbClr val="E2E8F0"/>
+                </a:solidFill>
+                <a:latin typeface="Courier New"/>
+              </a:rPr>
+              <a:t> /&gt;</a:t>
+            </a:r>
+          </a:p>
+          <a:p>
+            <a:pPr>
+              <a:spcAft>
+                <a:spcPts val="100"/>
+              </a:spcAft>
+            </a:pPr>
+            <a:r>
+              <a:rPr sz="1100" dirty="0">
+                <a:solidFill>
+                  <a:srgbClr val="E2E8F0"/>
+                </a:solidFill>
+                <a:latin typeface="Courier New"/>
+              </a:rPr>
+              <a:t>  if (</a:t>
+            </a:r>
+            <a:r>
+              <a:rPr sz="1100" dirty="0" err="1">
+                <a:solidFill>
+                  <a:srgbClr val="E2E8F0"/>
+                </a:solidFill>
+                <a:latin typeface="Courier New"/>
+              </a:rPr>
+              <a:t>notes.length</a:t>
+            </a:r>
+            <a:r>
+              <a:rPr sz="1100" dirty="0">
+                <a:solidFill>
+                  <a:srgbClr val="E2E8F0"/>
+                </a:solidFill>
+                <a:latin typeface="Courier New"/>
+              </a:rPr>
+              <a:t> === 0) return &lt;</a:t>
+            </a:r>
+            <a:r>
+              <a:rPr sz="1100" dirty="0" err="1">
+                <a:solidFill>
+                  <a:srgbClr val="E2E8F0"/>
+                </a:solidFill>
+                <a:latin typeface="Courier New"/>
+              </a:rPr>
+              <a:t>EmptyState</a:t>
+            </a:r>
+            <a:r>
+              <a:rPr sz="1100" dirty="0">
+                <a:solidFill>
+                  <a:srgbClr val="E2E8F0"/>
+                </a:solidFill>
+                <a:latin typeface="Courier New"/>
+              </a:rPr>
+              <a:t> title="No notes yet" /&gt;</a:t>
+            </a:r>
+          </a:p>
+          <a:p>
+            <a:pPr>
+              <a:spcAft>
+                <a:spcPts val="100"/>
+              </a:spcAft>
+            </a:pPr>
+            <a:r>
+              <a:rPr sz="1100" dirty="0">
                 <a:solidFill>
                   <a:srgbClr val="E2E8F0"/>
                 </a:solidFill>
@@ -3692,7 +3900,7 @@
               </a:spcAft>
             </a:pPr>
             <a:r>
-              <a:rPr sz="1100">
+              <a:rPr sz="1100" dirty="0">
                 <a:solidFill>
                   <a:srgbClr val="E2E8F0"/>
                 </a:solidFill>
@@ -3708,87 +3916,249 @@
               </a:spcAft>
             </a:pPr>
             <a:r>
-              <a:rPr sz="1100">
-                <a:solidFill>
-                  <a:srgbClr val="E2E8F0"/>
-                </a:solidFill>
-                <a:latin typeface="Courier New"/>
-              </a:rPr>
-              <a:t>    &lt;ul className="space-y-2"&gt;</a:t>
-            </a:r>
-          </a:p>
-          <a:p>
-            <a:pPr>
-              <a:spcAft>
-                <a:spcPts val="100"/>
-              </a:spcAft>
-            </a:pPr>
-            <a:r>
-              <a:rPr sz="1100">
-                <a:solidFill>
-                  <a:srgbClr val="E2E8F0"/>
-                </a:solidFill>
-                <a:latin typeface="Courier New"/>
-              </a:rPr>
-              <a:t>      {notes.map((note) =&gt; (</a:t>
-            </a:r>
-          </a:p>
-          <a:p>
-            <a:pPr>
-              <a:spcAft>
-                <a:spcPts val="100"/>
-              </a:spcAft>
-            </a:pPr>
-            <a:r>
-              <a:rPr sz="1100">
-                <a:solidFill>
-                  <a:srgbClr val="E2E8F0"/>
-                </a:solidFill>
-                <a:latin typeface="Courier New"/>
-              </a:rPr>
-              <a:t>        &lt;li key={note.id} className="rounded-lg border p-4"&gt;</a:t>
-            </a:r>
-          </a:p>
-          <a:p>
-            <a:pPr>
-              <a:spcAft>
-                <a:spcPts val="100"/>
-              </a:spcAft>
-            </a:pPr>
-            <a:r>
-              <a:rPr sz="1100">
-                <a:solidFill>
-                  <a:srgbClr val="E2E8F0"/>
-                </a:solidFill>
-                <a:latin typeface="Courier New"/>
-              </a:rPr>
-              <a:t>          &lt;h3 className="font-medium"&gt;{note.title}&lt;/h3&gt;</a:t>
-            </a:r>
-          </a:p>
-          <a:p>
-            <a:pPr>
-              <a:spcAft>
-                <a:spcPts val="100"/>
-              </a:spcAft>
-            </a:pPr>
-            <a:r>
-              <a:rPr sz="1100">
-                <a:solidFill>
-                  <a:srgbClr val="E2E8F0"/>
-                </a:solidFill>
-                <a:latin typeface="Courier New"/>
-              </a:rPr>
-              <a:t>          &lt;p className="text-sm text-zinc-500"&gt;{note.body}&lt;/p&gt;</a:t>
-            </a:r>
-          </a:p>
-          <a:p>
-            <a:pPr>
-              <a:spcAft>
-                <a:spcPts val="100"/>
-              </a:spcAft>
-            </a:pPr>
-            <a:r>
-              <a:rPr sz="1100">
+              <a:rPr sz="1100" dirty="0">
+                <a:solidFill>
+                  <a:srgbClr val="E2E8F0"/>
+                </a:solidFill>
+                <a:latin typeface="Courier New"/>
+              </a:rPr>
+              <a:t>    &lt;ul </a:t>
+            </a:r>
+            <a:r>
+              <a:rPr sz="1100" dirty="0" err="1">
+                <a:solidFill>
+                  <a:srgbClr val="E2E8F0"/>
+                </a:solidFill>
+                <a:latin typeface="Courier New"/>
+              </a:rPr>
+              <a:t>className</a:t>
+            </a:r>
+            <a:r>
+              <a:rPr sz="1100" dirty="0">
+                <a:solidFill>
+                  <a:srgbClr val="E2E8F0"/>
+                </a:solidFill>
+                <a:latin typeface="Courier New"/>
+              </a:rPr>
+              <a:t>="space-y-2"&gt;</a:t>
+            </a:r>
+          </a:p>
+          <a:p>
+            <a:pPr>
+              <a:spcAft>
+                <a:spcPts val="100"/>
+              </a:spcAft>
+            </a:pPr>
+            <a:r>
+              <a:rPr sz="1100" dirty="0">
+                <a:solidFill>
+                  <a:srgbClr val="E2E8F0"/>
+                </a:solidFill>
+                <a:latin typeface="Courier New"/>
+              </a:rPr>
+              <a:t>      {</a:t>
+            </a:r>
+            <a:r>
+              <a:rPr sz="1100" dirty="0" err="1">
+                <a:solidFill>
+                  <a:srgbClr val="E2E8F0"/>
+                </a:solidFill>
+                <a:latin typeface="Courier New"/>
+              </a:rPr>
+              <a:t>notes.map</a:t>
+            </a:r>
+            <a:r>
+              <a:rPr sz="1100" dirty="0">
+                <a:solidFill>
+                  <a:srgbClr val="E2E8F0"/>
+                </a:solidFill>
+                <a:latin typeface="Courier New"/>
+              </a:rPr>
+              <a:t>((note) =&gt; (</a:t>
+            </a:r>
+          </a:p>
+          <a:p>
+            <a:pPr>
+              <a:spcAft>
+                <a:spcPts val="100"/>
+              </a:spcAft>
+            </a:pPr>
+            <a:r>
+              <a:rPr sz="1100" dirty="0">
+                <a:solidFill>
+                  <a:srgbClr val="E2E8F0"/>
+                </a:solidFill>
+                <a:latin typeface="Courier New"/>
+              </a:rPr>
+              <a:t>        &lt;li key={</a:t>
+            </a:r>
+            <a:r>
+              <a:rPr sz="1100" dirty="0" err="1">
+                <a:solidFill>
+                  <a:srgbClr val="E2E8F0"/>
+                </a:solidFill>
+                <a:latin typeface="Courier New"/>
+              </a:rPr>
+              <a:t>note.id</a:t>
+            </a:r>
+            <a:r>
+              <a:rPr sz="1100" dirty="0">
+                <a:solidFill>
+                  <a:srgbClr val="E2E8F0"/>
+                </a:solidFill>
+                <a:latin typeface="Courier New"/>
+              </a:rPr>
+              <a:t>} </a:t>
+            </a:r>
+            <a:r>
+              <a:rPr sz="1100" dirty="0" err="1">
+                <a:solidFill>
+                  <a:srgbClr val="E2E8F0"/>
+                </a:solidFill>
+                <a:latin typeface="Courier New"/>
+              </a:rPr>
+              <a:t>className</a:t>
+            </a:r>
+            <a:r>
+              <a:rPr sz="1100" dirty="0">
+                <a:solidFill>
+                  <a:srgbClr val="E2E8F0"/>
+                </a:solidFill>
+                <a:latin typeface="Courier New"/>
+              </a:rPr>
+              <a:t>="rounded-lg border p-4"&gt;</a:t>
+            </a:r>
+          </a:p>
+          <a:p>
+            <a:pPr>
+              <a:spcAft>
+                <a:spcPts val="100"/>
+              </a:spcAft>
+            </a:pPr>
+            <a:r>
+              <a:rPr sz="1100" dirty="0">
+                <a:solidFill>
+                  <a:srgbClr val="E2E8F0"/>
+                </a:solidFill>
+                <a:latin typeface="Courier New"/>
+              </a:rPr>
+              <a:t>          &lt;h3 </a:t>
+            </a:r>
+            <a:r>
+              <a:rPr sz="1100" dirty="0" err="1">
+                <a:solidFill>
+                  <a:srgbClr val="E2E8F0"/>
+                </a:solidFill>
+                <a:latin typeface="Courier New"/>
+              </a:rPr>
+              <a:t>className</a:t>
+            </a:r>
+            <a:r>
+              <a:rPr sz="1100" dirty="0">
+                <a:solidFill>
+                  <a:srgbClr val="E2E8F0"/>
+                </a:solidFill>
+                <a:latin typeface="Courier New"/>
+              </a:rPr>
+              <a:t>="font-medium"&gt;{</a:t>
+            </a:r>
+            <a:r>
+              <a:rPr sz="1100" dirty="0" err="1">
+                <a:solidFill>
+                  <a:srgbClr val="E2E8F0"/>
+                </a:solidFill>
+                <a:latin typeface="Courier New"/>
+              </a:rPr>
+              <a:t>note.title</a:t>
+            </a:r>
+            <a:r>
+              <a:rPr sz="1100" dirty="0">
+                <a:solidFill>
+                  <a:srgbClr val="E2E8F0"/>
+                </a:solidFill>
+                <a:latin typeface="Courier New"/>
+              </a:rPr>
+              <a:t>}&lt;/h3&gt;</a:t>
+            </a:r>
+          </a:p>
+          <a:p>
+            <a:pPr>
+              <a:spcAft>
+                <a:spcPts val="100"/>
+              </a:spcAft>
+            </a:pPr>
+            <a:r>
+              <a:rPr sz="1100" dirty="0">
+                <a:solidFill>
+                  <a:srgbClr val="E2E8F0"/>
+                </a:solidFill>
+                <a:latin typeface="Courier New"/>
+              </a:rPr>
+              <a:t>          &lt;p </a:t>
+            </a:r>
+            <a:r>
+              <a:rPr sz="1100" dirty="0" err="1">
+                <a:solidFill>
+                  <a:srgbClr val="E2E8F0"/>
+                </a:solidFill>
+                <a:latin typeface="Courier New"/>
+              </a:rPr>
+              <a:t>className</a:t>
+            </a:r>
+            <a:r>
+              <a:rPr sz="1100" dirty="0">
+                <a:solidFill>
+                  <a:srgbClr val="E2E8F0"/>
+                </a:solidFill>
+                <a:latin typeface="Courier New"/>
+              </a:rPr>
+              <a:t>="text-</a:t>
+            </a:r>
+            <a:r>
+              <a:rPr sz="1100" dirty="0" err="1">
+                <a:solidFill>
+                  <a:srgbClr val="E2E8F0"/>
+                </a:solidFill>
+                <a:latin typeface="Courier New"/>
+              </a:rPr>
+              <a:t>sm</a:t>
+            </a:r>
+            <a:r>
+              <a:rPr sz="1100" dirty="0">
+                <a:solidFill>
+                  <a:srgbClr val="E2E8F0"/>
+                </a:solidFill>
+                <a:latin typeface="Courier New"/>
+              </a:rPr>
+              <a:t> text-zinc-500"&gt;{</a:t>
+            </a:r>
+            <a:r>
+              <a:rPr sz="1100" dirty="0" err="1">
+                <a:solidFill>
+                  <a:srgbClr val="E2E8F0"/>
+                </a:solidFill>
+                <a:latin typeface="Courier New"/>
+              </a:rPr>
+              <a:t>note.body</a:t>
+            </a:r>
+            <a:r>
+              <a:rPr sz="1100" dirty="0">
+                <a:solidFill>
+                  <a:srgbClr val="E2E8F0"/>
+                </a:solidFill>
+                <a:latin typeface="Courier New"/>
+              </a:rPr>
+              <a:t>}&lt;/p&gt;</a:t>
+            </a:r>
+          </a:p>
+          <a:p>
+            <a:pPr>
+              <a:spcAft>
+                <a:spcPts val="100"/>
+              </a:spcAft>
+            </a:pPr>
+            <a:r>
+              <a:rPr sz="1100" dirty="0">
                 <a:solidFill>
                   <a:srgbClr val="E2E8F0"/>
                 </a:solidFill>
@@ -3804,7 +4174,7 @@
               </a:spcAft>
             </a:pPr>
             <a:r>
-              <a:rPr sz="1100">
+              <a:rPr sz="1100" dirty="0">
                 <a:solidFill>
                   <a:srgbClr val="E2E8F0"/>
                 </a:solidFill>
@@ -3820,7 +4190,7 @@
               </a:spcAft>
             </a:pPr>
             <a:r>
-              <a:rPr sz="1100">
+              <a:rPr sz="1100" dirty="0">
                 <a:solidFill>
                   <a:srgbClr val="E2E8F0"/>
                 </a:solidFill>
@@ -3836,7 +4206,7 @@
               </a:spcAft>
             </a:pPr>
             <a:r>
-              <a:rPr sz="1100">
+              <a:rPr sz="1100" dirty="0">
                 <a:solidFill>
                   <a:srgbClr val="E2E8F0"/>
                 </a:solidFill>
@@ -3852,7 +4222,7 @@
               </a:spcAft>
             </a:pPr>
             <a:r>
-              <a:rPr sz="1100">
+              <a:rPr sz="1100" dirty="0">
                 <a:solidFill>
                   <a:srgbClr val="E2E8F0"/>
                 </a:solidFill>
@@ -3964,7 +4334,7 @@
 </file>
 
 <file path=ppt/slides/slide11.xml><?xml version="1.0" encoding="utf-8"?>
-<p:sld xmlns:a="http://schemas.openxmlformats.org/drawingml/2006/main" xmlns:p="http://schemas.openxmlformats.org/presentationml/2006/main" xmlns:r="http://schemas.openxmlformats.org/officeDocument/2006/relationships">
+<p:sld xmlns:a="http://schemas.openxmlformats.org/drawingml/2006/main" xmlns:r="http://schemas.openxmlformats.org/officeDocument/2006/relationships" xmlns:p="http://schemas.openxmlformats.org/presentationml/2006/main">
   <p:cSld>
     <p:bg>
       <p:bgPr>
@@ -3980,7 +4350,14 @@
         <p:cNvGrpSpPr/>
         <p:nvPr/>
       </p:nvGrpSpPr>
-      <p:grpSpPr/>
+      <p:grpSpPr>
+        <a:xfrm>
+          <a:off x="0" y="0"/>
+          <a:ext cx="0" cy="0"/>
+          <a:chOff x="0" y="0"/>
+          <a:chExt cx="0" cy="0"/>
+        </a:xfrm>
+      </p:grpSpPr>
       <p:sp>
         <p:nvSpPr>
           <p:cNvPr id="2" name="Rounded Rectangle 1"/>
@@ -4146,7 +4523,7 @@
           </a:fontRef>
         </p:style>
         <p:txBody>
-          <a:bodyPr rtlCol="0" anchor="t" wrap="none" lIns="228600" rIns="182880" tIns="128016"/>
+          <a:bodyPr wrap="none" lIns="228600" tIns="128016" rIns="182880" rtlCol="0" anchor="t"/>
           <a:lstStyle/>
           <a:p>
             <a:pPr algn="ctr">
@@ -4155,55 +4532,181 @@
               </a:spcAft>
             </a:pPr>
             <a:r>
-              <a:rPr sz="1100" b="1">
+              <a:rPr sz="1100" b="1" dirty="0">
                 <a:solidFill>
                   <a:srgbClr val="F59E0B"/>
                 </a:solidFill>
                 <a:latin typeface="Courier New"/>
               </a:rPr>
-              <a:t>frontend/src/components/layout/Sidebar.tsx  (diff)</a:t>
-            </a:r>
-          </a:p>
-          <a:p>
-            <a:pPr>
-              <a:spcAft>
-                <a:spcPts val="100"/>
-              </a:spcAft>
-            </a:pPr>
-            <a:r>
-              <a:rPr sz="1200">
-                <a:solidFill>
-                  <a:srgbClr val="E2E8F0"/>
-                </a:solidFill>
-                <a:latin typeface="Courier New"/>
-              </a:rPr>
-              <a:t>- import { LayoutDashboard, User, Settings } from 'lucide-react'</a:t>
-            </a:r>
-          </a:p>
-          <a:p>
-            <a:pPr>
-              <a:spcAft>
-                <a:spcPts val="100"/>
-              </a:spcAft>
-            </a:pPr>
-            <a:r>
-              <a:rPr sz="1200">
-                <a:solidFill>
-                  <a:srgbClr val="E2E8F0"/>
-                </a:solidFill>
-                <a:latin typeface="Courier New"/>
-              </a:rPr>
-              <a:t>+ import { LayoutDashboard, StickyNote, User, Settings } from 'lucide-react'</a:t>
-            </a:r>
-          </a:p>
-          <a:p>
-            <a:pPr>
-              <a:spcAft>
-                <a:spcPts val="100"/>
-              </a:spcAft>
-            </a:pPr>
-            <a:r>
-              <a:rPr sz="1200">
+              <a:t>frontend/</a:t>
+            </a:r>
+            <a:r>
+              <a:rPr sz="1100" b="1" dirty="0" err="1">
+                <a:solidFill>
+                  <a:srgbClr val="F59E0B"/>
+                </a:solidFill>
+                <a:latin typeface="Courier New"/>
+              </a:rPr>
+              <a:t>src</a:t>
+            </a:r>
+            <a:r>
+              <a:rPr sz="1100" b="1" dirty="0">
+                <a:solidFill>
+                  <a:srgbClr val="F59E0B"/>
+                </a:solidFill>
+                <a:latin typeface="Courier New"/>
+              </a:rPr>
+              <a:t>/components/layout/</a:t>
+            </a:r>
+            <a:r>
+              <a:rPr sz="1100" b="1" dirty="0" err="1">
+                <a:solidFill>
+                  <a:srgbClr val="F59E0B"/>
+                </a:solidFill>
+                <a:latin typeface="Courier New"/>
+              </a:rPr>
+              <a:t>Sidebar.tsx</a:t>
+            </a:r>
+            <a:r>
+              <a:rPr sz="1100" b="1" dirty="0">
+                <a:solidFill>
+                  <a:srgbClr val="F59E0B"/>
+                </a:solidFill>
+                <a:latin typeface="Courier New"/>
+              </a:rPr>
+              <a:t>  (diff)</a:t>
+            </a:r>
+          </a:p>
+          <a:p>
+            <a:pPr>
+              <a:spcAft>
+                <a:spcPts val="100"/>
+              </a:spcAft>
+            </a:pPr>
+            <a:r>
+              <a:rPr sz="1200" dirty="0">
+                <a:solidFill>
+                  <a:srgbClr val="E2E8F0"/>
+                </a:solidFill>
+                <a:latin typeface="Courier New"/>
+              </a:rPr>
+              <a:t>- import { </a:t>
+            </a:r>
+            <a:r>
+              <a:rPr sz="1200" dirty="0" err="1">
+                <a:solidFill>
+                  <a:srgbClr val="E2E8F0"/>
+                </a:solidFill>
+                <a:latin typeface="Courier New"/>
+              </a:rPr>
+              <a:t>LayoutDashboard</a:t>
+            </a:r>
+            <a:r>
+              <a:rPr sz="1200" dirty="0">
+                <a:solidFill>
+                  <a:srgbClr val="E2E8F0"/>
+                </a:solidFill>
+                <a:latin typeface="Courier New"/>
+              </a:rPr>
+              <a:t>, User, Settings } from '</a:t>
+            </a:r>
+            <a:r>
+              <a:rPr sz="1200" dirty="0" err="1">
+                <a:solidFill>
+                  <a:srgbClr val="E2E8F0"/>
+                </a:solidFill>
+                <a:latin typeface="Courier New"/>
+              </a:rPr>
+              <a:t>lucide</a:t>
+            </a:r>
+            <a:r>
+              <a:rPr sz="1200" dirty="0">
+                <a:solidFill>
+                  <a:srgbClr val="E2E8F0"/>
+                </a:solidFill>
+                <a:latin typeface="Courier New"/>
+              </a:rPr>
+              <a:t>-react'</a:t>
+            </a:r>
+          </a:p>
+          <a:p>
+            <a:pPr>
+              <a:spcAft>
+                <a:spcPts val="100"/>
+              </a:spcAft>
+            </a:pPr>
+            <a:r>
+              <a:rPr sz="1200" dirty="0">
+                <a:solidFill>
+                  <a:srgbClr val="E2E8F0"/>
+                </a:solidFill>
+                <a:latin typeface="Courier New"/>
+              </a:rPr>
+              <a:t>+ import { </a:t>
+            </a:r>
+            <a:r>
+              <a:rPr sz="1200" dirty="0" err="1">
+                <a:solidFill>
+                  <a:srgbClr val="E2E8F0"/>
+                </a:solidFill>
+                <a:latin typeface="Courier New"/>
+              </a:rPr>
+              <a:t>LayoutDashboard</a:t>
+            </a:r>
+            <a:r>
+              <a:rPr sz="1200" dirty="0">
+                <a:solidFill>
+                  <a:srgbClr val="E2E8F0"/>
+                </a:solidFill>
+                <a:latin typeface="Courier New"/>
+              </a:rPr>
+              <a:t>, </a:t>
+            </a:r>
+            <a:r>
+              <a:rPr sz="1200" dirty="0" err="1">
+                <a:solidFill>
+                  <a:srgbClr val="E2E8F0"/>
+                </a:solidFill>
+                <a:latin typeface="Courier New"/>
+              </a:rPr>
+              <a:t>StickyNote</a:t>
+            </a:r>
+            <a:r>
+              <a:rPr sz="1200" dirty="0">
+                <a:solidFill>
+                  <a:srgbClr val="E2E8F0"/>
+                </a:solidFill>
+                <a:latin typeface="Courier New"/>
+              </a:rPr>
+              <a:t>, User, Settings } from '</a:t>
+            </a:r>
+            <a:r>
+              <a:rPr sz="1200" dirty="0" err="1">
+                <a:solidFill>
+                  <a:srgbClr val="E2E8F0"/>
+                </a:solidFill>
+                <a:latin typeface="Courier New"/>
+              </a:rPr>
+              <a:t>lucide</a:t>
+            </a:r>
+            <a:r>
+              <a:rPr sz="1200" dirty="0">
+                <a:solidFill>
+                  <a:srgbClr val="E2E8F0"/>
+                </a:solidFill>
+                <a:latin typeface="Courier New"/>
+              </a:rPr>
+              <a:t>-react'</a:t>
+            </a:r>
+          </a:p>
+          <a:p>
+            <a:pPr>
+              <a:spcAft>
+                <a:spcPts val="100"/>
+              </a:spcAft>
+            </a:pPr>
+            <a:r>
+              <a:rPr sz="1200" dirty="0">
                 <a:solidFill>
                   <a:srgbClr val="E2E8F0"/>
                 </a:solidFill>
@@ -4219,61 +4722,169 @@
               </a:spcAft>
             </a:pPr>
             <a:r>
-              <a:rPr sz="1200">
-                <a:solidFill>
-                  <a:srgbClr val="E2E8F0"/>
-                </a:solidFill>
-                <a:latin typeface="Courier New"/>
-              </a:rPr>
-              <a:t>  const navItems = [</a:t>
-            </a:r>
-          </a:p>
-          <a:p>
-            <a:pPr>
-              <a:spcAft>
-                <a:spcPts val="100"/>
-              </a:spcAft>
-            </a:pPr>
-            <a:r>
-              <a:rPr sz="1200">
-                <a:solidFill>
-                  <a:srgbClr val="E2E8F0"/>
-                </a:solidFill>
-                <a:latin typeface="Courier New"/>
-              </a:rPr>
-              <a:t>    { href: '/dashboard', label: 'Dashboard', icon: LayoutDashboard },</a:t>
-            </a:r>
-          </a:p>
-          <a:p>
-            <a:pPr>
-              <a:spcAft>
-                <a:spcPts val="100"/>
-              </a:spcAft>
-            </a:pPr>
-            <a:r>
-              <a:rPr sz="1200">
-                <a:solidFill>
-                  <a:srgbClr val="E2E8F0"/>
-                </a:solidFill>
-                <a:latin typeface="Courier New"/>
-              </a:rPr>
-              <a:t>+   { href: '/notes',     label: 'Notes',     icon: StickyNote },</a:t>
-            </a:r>
-          </a:p>
-          <a:p>
-            <a:pPr>
-              <a:spcAft>
-                <a:spcPts val="100"/>
-              </a:spcAft>
-            </a:pPr>
-            <a:r>
-              <a:rPr sz="1200">
-                <a:solidFill>
-                  <a:srgbClr val="E2E8F0"/>
-                </a:solidFill>
-                <a:latin typeface="Courier New"/>
-              </a:rPr>
-              <a:t>    { href: '/profile',   label: 'Profile',   icon: User },</a:t>
+              <a:rPr sz="1200" dirty="0">
+                <a:solidFill>
+                  <a:srgbClr val="E2E8F0"/>
+                </a:solidFill>
+                <a:latin typeface="Courier New"/>
+              </a:rPr>
+              <a:t>  const </a:t>
+            </a:r>
+            <a:r>
+              <a:rPr sz="1200" dirty="0" err="1">
+                <a:solidFill>
+                  <a:srgbClr val="E2E8F0"/>
+                </a:solidFill>
+                <a:latin typeface="Courier New"/>
+              </a:rPr>
+              <a:t>navItems</a:t>
+            </a:r>
+            <a:r>
+              <a:rPr sz="1200" dirty="0">
+                <a:solidFill>
+                  <a:srgbClr val="E2E8F0"/>
+                </a:solidFill>
+                <a:latin typeface="Courier New"/>
+              </a:rPr>
+              <a:t> = [</a:t>
+            </a:r>
+          </a:p>
+          <a:p>
+            <a:pPr>
+              <a:spcAft>
+                <a:spcPts val="100"/>
+              </a:spcAft>
+            </a:pPr>
+            <a:r>
+              <a:rPr sz="1200" dirty="0">
+                <a:solidFill>
+                  <a:srgbClr val="E2E8F0"/>
+                </a:solidFill>
+                <a:latin typeface="Courier New"/>
+              </a:rPr>
+              <a:t>    { </a:t>
+            </a:r>
+            <a:r>
+              <a:rPr sz="1200" dirty="0" err="1">
+                <a:solidFill>
+                  <a:srgbClr val="E2E8F0"/>
+                </a:solidFill>
+                <a:latin typeface="Courier New"/>
+              </a:rPr>
+              <a:t>href</a:t>
+            </a:r>
+            <a:r>
+              <a:rPr sz="1200" dirty="0">
+                <a:solidFill>
+                  <a:srgbClr val="E2E8F0"/>
+                </a:solidFill>
+                <a:latin typeface="Courier New"/>
+              </a:rPr>
+              <a:t>: '/dashboard', label: 'Dashboard', icon: </a:t>
+            </a:r>
+            <a:r>
+              <a:rPr sz="1200" dirty="0" err="1">
+                <a:solidFill>
+                  <a:srgbClr val="E2E8F0"/>
+                </a:solidFill>
+                <a:latin typeface="Courier New"/>
+              </a:rPr>
+              <a:t>LayoutDashboard</a:t>
+            </a:r>
+            <a:r>
+              <a:rPr sz="1200" dirty="0">
+                <a:solidFill>
+                  <a:srgbClr val="E2E8F0"/>
+                </a:solidFill>
+                <a:latin typeface="Courier New"/>
+              </a:rPr>
+              <a:t> },</a:t>
+            </a:r>
+          </a:p>
+          <a:p>
+            <a:pPr>
+              <a:spcAft>
+                <a:spcPts val="100"/>
+              </a:spcAft>
+            </a:pPr>
+            <a:r>
+              <a:rPr sz="1200" dirty="0">
+                <a:solidFill>
+                  <a:srgbClr val="E2E8F0"/>
+                </a:solidFill>
+                <a:latin typeface="Courier New"/>
+              </a:rPr>
+              <a:t>+   { </a:t>
+            </a:r>
+            <a:r>
+              <a:rPr sz="1200" dirty="0" err="1">
+                <a:solidFill>
+                  <a:srgbClr val="E2E8F0"/>
+                </a:solidFill>
+                <a:latin typeface="Courier New"/>
+              </a:rPr>
+              <a:t>href</a:t>
+            </a:r>
+            <a:r>
+              <a:rPr sz="1200" dirty="0">
+                <a:solidFill>
+                  <a:srgbClr val="E2E8F0"/>
+                </a:solidFill>
+                <a:latin typeface="Courier New"/>
+              </a:rPr>
+              <a:t>: '/notes',     label: 'Notes',     icon: </a:t>
+            </a:r>
+            <a:r>
+              <a:rPr sz="1200" dirty="0" err="1">
+                <a:solidFill>
+                  <a:srgbClr val="E2E8F0"/>
+                </a:solidFill>
+                <a:latin typeface="Courier New"/>
+              </a:rPr>
+              <a:t>StickyNote</a:t>
+            </a:r>
+            <a:r>
+              <a:rPr sz="1200" dirty="0">
+                <a:solidFill>
+                  <a:srgbClr val="E2E8F0"/>
+                </a:solidFill>
+                <a:latin typeface="Courier New"/>
+              </a:rPr>
+              <a:t> },</a:t>
+            </a:r>
+          </a:p>
+          <a:p>
+            <a:pPr>
+              <a:spcAft>
+                <a:spcPts val="100"/>
+              </a:spcAft>
+            </a:pPr>
+            <a:r>
+              <a:rPr sz="1200" dirty="0">
+                <a:solidFill>
+                  <a:srgbClr val="E2E8F0"/>
+                </a:solidFill>
+                <a:latin typeface="Courier New"/>
+              </a:rPr>
+              <a:t>    { </a:t>
+            </a:r>
+            <a:r>
+              <a:rPr sz="1200" dirty="0" err="1">
+                <a:solidFill>
+                  <a:srgbClr val="E2E8F0"/>
+                </a:solidFill>
+                <a:latin typeface="Courier New"/>
+              </a:rPr>
+              <a:t>href</a:t>
+            </a:r>
+            <a:r>
+              <a:rPr sz="1200" dirty="0">
+                <a:solidFill>
+                  <a:srgbClr val="E2E8F0"/>
+                </a:solidFill>
+                <a:latin typeface="Courier New"/>
+              </a:rPr>
+              <a:t>: '/profile',   label: 'Profile',   icon: User },</a:t>
             </a:r>
           </a:p>
         </p:txBody>
@@ -4325,7 +4936,7 @@
 </file>
 
 <file path=ppt/slides/slide12.xml><?xml version="1.0" encoding="utf-8"?>
-<p:sld xmlns:a="http://schemas.openxmlformats.org/drawingml/2006/main" xmlns:p="http://schemas.openxmlformats.org/presentationml/2006/main" xmlns:r="http://schemas.openxmlformats.org/officeDocument/2006/relationships">
+<p:sld xmlns:a="http://schemas.openxmlformats.org/drawingml/2006/main" xmlns:r="http://schemas.openxmlformats.org/officeDocument/2006/relationships" xmlns:p="http://schemas.openxmlformats.org/presentationml/2006/main">
   <p:cSld>
     <p:bg>
       <p:bgPr>
@@ -4341,7 +4952,14 @@
         <p:cNvGrpSpPr/>
         <p:nvPr/>
       </p:nvGrpSpPr>
-      <p:grpSpPr/>
+      <p:grpSpPr>
+        <a:xfrm>
+          <a:off x="0" y="0"/>
+          <a:ext cx="0" cy="0"/>
+          <a:chOff x="0" y="0"/>
+          <a:chExt cx="0" cy="0"/>
+        </a:xfrm>
+      </p:grpSpPr>
       <p:sp>
         <p:nvSpPr>
           <p:cNvPr id="2" name="Rounded Rectangle 1"/>
@@ -4507,7 +5125,7 @@
           </a:fontRef>
         </p:style>
         <p:txBody>
-          <a:bodyPr rtlCol="0" anchor="t" wrap="none" lIns="228600" rIns="182880" tIns="128016"/>
+          <a:bodyPr wrap="none" lIns="228600" tIns="128016" rIns="182880" rtlCol="0" anchor="t"/>
           <a:lstStyle/>
           <a:p>
             <a:pPr algn="ctr">
@@ -4516,39 +5134,84 @@
               </a:spcAft>
             </a:pPr>
             <a:r>
-              <a:rPr sz="1100" b="1">
+              <a:rPr sz="1100" b="1" dirty="0">
                 <a:solidFill>
                   <a:srgbClr val="F59E0B"/>
                 </a:solidFill>
                 <a:latin typeface="Courier New"/>
               </a:rPr>
-              <a:t>backend/src/routes/notes.ts  (new) — plus mount + tests</a:t>
-            </a:r>
-          </a:p>
-          <a:p>
-            <a:pPr>
-              <a:spcAft>
-                <a:spcPts val="100"/>
-              </a:spcAft>
-            </a:pPr>
-            <a:r>
-              <a:rPr sz="1200">
-                <a:solidFill>
-                  <a:srgbClr val="E2E8F0"/>
-                </a:solidFill>
-                <a:latin typeface="Courier New"/>
-              </a:rPr>
-              <a:t>router.post('/', async (req, res, next) =&gt; {</a:t>
-            </a:r>
-          </a:p>
-          <a:p>
-            <a:pPr>
-              <a:spcAft>
-                <a:spcPts val="100"/>
-              </a:spcAft>
-            </a:pPr>
-            <a:r>
-              <a:rPr sz="1200">
+              <a:t>backend/</a:t>
+            </a:r>
+            <a:r>
+              <a:rPr sz="1100" b="1" dirty="0" err="1">
+                <a:solidFill>
+                  <a:srgbClr val="F59E0B"/>
+                </a:solidFill>
+                <a:latin typeface="Courier New"/>
+              </a:rPr>
+              <a:t>src</a:t>
+            </a:r>
+            <a:r>
+              <a:rPr sz="1100" b="1" dirty="0">
+                <a:solidFill>
+                  <a:srgbClr val="F59E0B"/>
+                </a:solidFill>
+                <a:latin typeface="Courier New"/>
+              </a:rPr>
+              <a:t>/routes/</a:t>
+            </a:r>
+            <a:r>
+              <a:rPr sz="1100" b="1" dirty="0" err="1">
+                <a:solidFill>
+                  <a:srgbClr val="F59E0B"/>
+                </a:solidFill>
+                <a:latin typeface="Courier New"/>
+              </a:rPr>
+              <a:t>notes.ts</a:t>
+            </a:r>
+            <a:r>
+              <a:rPr sz="1100" b="1" dirty="0">
+                <a:solidFill>
+                  <a:srgbClr val="F59E0B"/>
+                </a:solidFill>
+                <a:latin typeface="Courier New"/>
+              </a:rPr>
+              <a:t>  (new) — plus mount + tests</a:t>
+            </a:r>
+          </a:p>
+          <a:p>
+            <a:pPr>
+              <a:spcAft>
+                <a:spcPts val="100"/>
+              </a:spcAft>
+            </a:pPr>
+            <a:r>
+              <a:rPr sz="1200" dirty="0" err="1">
+                <a:solidFill>
+                  <a:srgbClr val="E2E8F0"/>
+                </a:solidFill>
+                <a:latin typeface="Courier New"/>
+              </a:rPr>
+              <a:t>router.post</a:t>
+            </a:r>
+            <a:r>
+              <a:rPr sz="1200" dirty="0">
+                <a:solidFill>
+                  <a:srgbClr val="E2E8F0"/>
+                </a:solidFill>
+                <a:latin typeface="Courier New"/>
+              </a:rPr>
+              <a:t>('/', async (req, res, next) =&gt; {</a:t>
+            </a:r>
+          </a:p>
+          <a:p>
+            <a:pPr>
+              <a:spcAft>
+                <a:spcPts val="100"/>
+              </a:spcAft>
+            </a:pPr>
+            <a:r>
+              <a:rPr sz="1200" dirty="0">
                 <a:solidFill>
                   <a:srgbClr val="E2E8F0"/>
                 </a:solidFill>
@@ -4564,23 +5227,38 @@
               </a:spcAft>
             </a:pPr>
             <a:r>
-              <a:rPr sz="1200">
-                <a:solidFill>
-                  <a:srgbClr val="E2E8F0"/>
-                </a:solidFill>
-                <a:latin typeface="Courier New"/>
-              </a:rPr>
-              <a:t>    const { user } = req as AuthenticatedRequest</a:t>
-            </a:r>
-          </a:p>
-          <a:p>
-            <a:pPr>
-              <a:spcAft>
-                <a:spcPts val="100"/>
-              </a:spcAft>
-            </a:pPr>
-            <a:r>
-              <a:rPr sz="1200">
+              <a:rPr sz="1200" dirty="0">
+                <a:solidFill>
+                  <a:srgbClr val="E2E8F0"/>
+                </a:solidFill>
+                <a:latin typeface="Courier New"/>
+              </a:rPr>
+              <a:t>    const { user } = req as </a:t>
+            </a:r>
+            <a:r>
+              <a:rPr sz="1200" dirty="0" err="1">
+                <a:solidFill>
+                  <a:srgbClr val="E2E8F0"/>
+                </a:solidFill>
+                <a:latin typeface="Courier New"/>
+              </a:rPr>
+              <a:t>AuthenticatedRequest</a:t>
+            </a:r>
+            <a:endParaRPr sz="1200" dirty="0">
+              <a:solidFill>
+                <a:srgbClr val="E2E8F0"/>
+              </a:solidFill>
+              <a:latin typeface="Courier New"/>
+            </a:endParaRPr>
+          </a:p>
+          <a:p>
+            <a:pPr>
+              <a:spcAft>
+                <a:spcPts val="100"/>
+              </a:spcAft>
+            </a:pPr>
+            <a:r>
+              <a:rPr sz="1200" dirty="0">
                 <a:solidFill>
                   <a:srgbClr val="E2E8F0"/>
                 </a:solidFill>
@@ -4596,55 +5274,127 @@
               </a:spcAft>
             </a:pPr>
             <a:r>
-              <a:rPr sz="1200">
-                <a:solidFill>
-                  <a:srgbClr val="E2E8F0"/>
-                </a:solidFill>
-                <a:latin typeface="Courier New"/>
-              </a:rPr>
-              <a:t>    const parsed = createNoteSchema.safeParse(req.body)</a:t>
-            </a:r>
-          </a:p>
-          <a:p>
-            <a:pPr>
-              <a:spcAft>
-                <a:spcPts val="100"/>
-              </a:spcAft>
-            </a:pPr>
-            <a:r>
-              <a:rPr sz="1200">
-                <a:solidFill>
-                  <a:srgbClr val="E2E8F0"/>
-                </a:solidFill>
-                <a:latin typeface="Courier New"/>
-              </a:rPr>
-              <a:t>    if (!parsed.success)</a:t>
-            </a:r>
-          </a:p>
-          <a:p>
-            <a:pPr>
-              <a:spcAft>
-                <a:spcPts val="100"/>
-              </a:spcAft>
-            </a:pPr>
-            <a:r>
-              <a:rPr sz="1200">
-                <a:solidFill>
-                  <a:srgbClr val="E2E8F0"/>
-                </a:solidFill>
-                <a:latin typeface="Courier New"/>
-              </a:rPr>
-              <a:t>      return next(HttpError.badRequest('…'))</a:t>
-            </a:r>
-          </a:p>
-          <a:p>
-            <a:pPr>
-              <a:spcAft>
-                <a:spcPts val="100"/>
-              </a:spcAft>
-            </a:pPr>
-            <a:r>
-              <a:rPr sz="1200">
+              <a:rPr sz="1200" dirty="0">
+                <a:solidFill>
+                  <a:srgbClr val="E2E8F0"/>
+                </a:solidFill>
+                <a:latin typeface="Courier New"/>
+              </a:rPr>
+              <a:t>    const parsed = </a:t>
+            </a:r>
+            <a:r>
+              <a:rPr sz="1200" dirty="0" err="1">
+                <a:solidFill>
+                  <a:srgbClr val="E2E8F0"/>
+                </a:solidFill>
+                <a:latin typeface="Courier New"/>
+              </a:rPr>
+              <a:t>createNoteSchema.safeParse</a:t>
+            </a:r>
+            <a:r>
+              <a:rPr sz="1200" dirty="0">
+                <a:solidFill>
+                  <a:srgbClr val="E2E8F0"/>
+                </a:solidFill>
+                <a:latin typeface="Courier New"/>
+              </a:rPr>
+              <a:t>(</a:t>
+            </a:r>
+            <a:r>
+              <a:rPr sz="1200" dirty="0" err="1">
+                <a:solidFill>
+                  <a:srgbClr val="E2E8F0"/>
+                </a:solidFill>
+                <a:latin typeface="Courier New"/>
+              </a:rPr>
+              <a:t>req.body</a:t>
+            </a:r>
+            <a:r>
+              <a:rPr sz="1200" dirty="0">
+                <a:solidFill>
+                  <a:srgbClr val="E2E8F0"/>
+                </a:solidFill>
+                <a:latin typeface="Courier New"/>
+              </a:rPr>
+              <a:t>)</a:t>
+            </a:r>
+          </a:p>
+          <a:p>
+            <a:pPr>
+              <a:spcAft>
+                <a:spcPts val="100"/>
+              </a:spcAft>
+            </a:pPr>
+            <a:r>
+              <a:rPr sz="1200" dirty="0">
+                <a:solidFill>
+                  <a:srgbClr val="E2E8F0"/>
+                </a:solidFill>
+                <a:latin typeface="Courier New"/>
+              </a:rPr>
+              <a:t>    if (!</a:t>
+            </a:r>
+            <a:r>
+              <a:rPr sz="1200" dirty="0" err="1">
+                <a:solidFill>
+                  <a:srgbClr val="E2E8F0"/>
+                </a:solidFill>
+                <a:latin typeface="Courier New"/>
+              </a:rPr>
+              <a:t>parsed.success</a:t>
+            </a:r>
+            <a:r>
+              <a:rPr sz="1200" dirty="0">
+                <a:solidFill>
+                  <a:srgbClr val="E2E8F0"/>
+                </a:solidFill>
+                <a:latin typeface="Courier New"/>
+              </a:rPr>
+              <a:t>)</a:t>
+            </a:r>
+          </a:p>
+          <a:p>
+            <a:pPr>
+              <a:spcAft>
+                <a:spcPts val="100"/>
+              </a:spcAft>
+            </a:pPr>
+            <a:r>
+              <a:rPr sz="1200" dirty="0">
+                <a:solidFill>
+                  <a:srgbClr val="E2E8F0"/>
+                </a:solidFill>
+                <a:latin typeface="Courier New"/>
+              </a:rPr>
+              <a:t>      return next(</a:t>
+            </a:r>
+            <a:r>
+              <a:rPr sz="1200" dirty="0" err="1">
+                <a:solidFill>
+                  <a:srgbClr val="E2E8F0"/>
+                </a:solidFill>
+                <a:latin typeface="Courier New"/>
+              </a:rPr>
+              <a:t>HttpError.badRequest</a:t>
+            </a:r>
+            <a:r>
+              <a:rPr sz="1200" dirty="0">
+                <a:solidFill>
+                  <a:srgbClr val="E2E8F0"/>
+                </a:solidFill>
+                <a:latin typeface="Courier New"/>
+              </a:rPr>
+              <a:t>('…'))</a:t>
+            </a:r>
+          </a:p>
+          <a:p>
+            <a:pPr>
+              <a:spcAft>
+                <a:spcPts val="100"/>
+              </a:spcAft>
+            </a:pPr>
+            <a:r>
+              <a:rPr sz="1200" dirty="0">
                 <a:solidFill>
                   <a:srgbClr val="E2E8F0"/>
                 </a:solidFill>
@@ -4660,71 +5410,233 @@
               </a:spcAft>
             </a:pPr>
             <a:r>
-              <a:rPr sz="1200">
-                <a:solidFill>
-                  <a:srgbClr val="E2E8F0"/>
-                </a:solidFill>
-                <a:latin typeface="Courier New"/>
-              </a:rPr>
-              <a:t>    const ref = adminDb.collection('notes').doc()</a:t>
-            </a:r>
-          </a:p>
-          <a:p>
-            <a:pPr>
-              <a:spcAft>
-                <a:spcPts val="100"/>
-              </a:spcAft>
-            </a:pPr>
-            <a:r>
-              <a:rPr sz="1200">
-                <a:solidFill>
-                  <a:srgbClr val="E2E8F0"/>
-                </a:solidFill>
-                <a:latin typeface="Courier New"/>
-              </a:rPr>
-              <a:t>    await ref.set({ ...parsed.data, uid: user.uid,</a:t>
-            </a:r>
-          </a:p>
-          <a:p>
-            <a:pPr>
-              <a:spcAft>
-                <a:spcPts val="100"/>
-              </a:spcAft>
-            </a:pPr>
-            <a:r>
-              <a:rPr sz="1200">
-                <a:solidFill>
-                  <a:srgbClr val="E2E8F0"/>
-                </a:solidFill>
-                <a:latin typeface="Courier New"/>
-              </a:rPr>
-              <a:t>                    _schemaVersion: 1 })</a:t>
-            </a:r>
-          </a:p>
-          <a:p>
-            <a:pPr>
-              <a:spcAft>
-                <a:spcPts val="100"/>
-              </a:spcAft>
-            </a:pPr>
-            <a:r>
-              <a:rPr sz="1200">
-                <a:solidFill>
-                  <a:srgbClr val="E2E8F0"/>
-                </a:solidFill>
-                <a:latin typeface="Courier New"/>
-              </a:rPr>
-              <a:t>    res.status(201).json({ id: ref.id })</a:t>
-            </a:r>
-          </a:p>
-          <a:p>
-            <a:pPr>
-              <a:spcAft>
-                <a:spcPts val="100"/>
-              </a:spcAft>
-            </a:pPr>
-            <a:r>
-              <a:rPr sz="1200">
+              <a:rPr sz="1200" dirty="0">
+                <a:solidFill>
+                  <a:srgbClr val="E2E8F0"/>
+                </a:solidFill>
+                <a:latin typeface="Courier New"/>
+              </a:rPr>
+              <a:t>    const ref = </a:t>
+            </a:r>
+            <a:r>
+              <a:rPr sz="1200" dirty="0" err="1">
+                <a:solidFill>
+                  <a:srgbClr val="E2E8F0"/>
+                </a:solidFill>
+                <a:latin typeface="Courier New"/>
+              </a:rPr>
+              <a:t>adminDb.collection</a:t>
+            </a:r>
+            <a:r>
+              <a:rPr sz="1200" dirty="0">
+                <a:solidFill>
+                  <a:srgbClr val="E2E8F0"/>
+                </a:solidFill>
+                <a:latin typeface="Courier New"/>
+              </a:rPr>
+              <a:t>('notes').doc()</a:t>
+            </a:r>
+          </a:p>
+          <a:p>
+            <a:pPr>
+              <a:spcAft>
+                <a:spcPts val="100"/>
+              </a:spcAft>
+            </a:pPr>
+            <a:r>
+              <a:rPr sz="1200" dirty="0">
+                <a:solidFill>
+                  <a:srgbClr val="E2E8F0"/>
+                </a:solidFill>
+                <a:latin typeface="Courier New"/>
+              </a:rPr>
+              <a:t>    await </a:t>
+            </a:r>
+            <a:r>
+              <a:rPr sz="1200" dirty="0" err="1">
+                <a:solidFill>
+                  <a:srgbClr val="E2E8F0"/>
+                </a:solidFill>
+                <a:latin typeface="Courier New"/>
+              </a:rPr>
+              <a:t>ref.set</a:t>
+            </a:r>
+            <a:r>
+              <a:rPr sz="1200" dirty="0">
+                <a:solidFill>
+                  <a:srgbClr val="E2E8F0"/>
+                </a:solidFill>
+                <a:latin typeface="Courier New"/>
+              </a:rPr>
+              <a:t>({ ...</a:t>
+            </a:r>
+            <a:r>
+              <a:rPr sz="1200" dirty="0" err="1">
+                <a:solidFill>
+                  <a:srgbClr val="E2E8F0"/>
+                </a:solidFill>
+                <a:latin typeface="Courier New"/>
+              </a:rPr>
+              <a:t>parsed.data</a:t>
+            </a:r>
+            <a:r>
+              <a:rPr sz="1200" dirty="0">
+                <a:solidFill>
+                  <a:srgbClr val="E2E8F0"/>
+                </a:solidFill>
+                <a:latin typeface="Courier New"/>
+              </a:rPr>
+              <a:t>, </a:t>
+            </a:r>
+            <a:r>
+              <a:rPr sz="1200" dirty="0" err="1">
+                <a:solidFill>
+                  <a:srgbClr val="E2E8F0"/>
+                </a:solidFill>
+                <a:latin typeface="Courier New"/>
+              </a:rPr>
+              <a:t>uid</a:t>
+            </a:r>
+            <a:r>
+              <a:rPr sz="1200" dirty="0">
+                <a:solidFill>
+                  <a:srgbClr val="E2E8F0"/>
+                </a:solidFill>
+                <a:latin typeface="Courier New"/>
+              </a:rPr>
+              <a:t>: </a:t>
+            </a:r>
+            <a:r>
+              <a:rPr sz="1200" dirty="0" err="1">
+                <a:solidFill>
+                  <a:srgbClr val="E2E8F0"/>
+                </a:solidFill>
+                <a:latin typeface="Courier New"/>
+              </a:rPr>
+              <a:t>user.uid</a:t>
+            </a:r>
+            <a:r>
+              <a:rPr sz="1200" dirty="0">
+                <a:solidFill>
+                  <a:srgbClr val="E2E8F0"/>
+                </a:solidFill>
+                <a:latin typeface="Courier New"/>
+              </a:rPr>
+              <a:t>,</a:t>
+            </a:r>
+          </a:p>
+          <a:p>
+            <a:pPr>
+              <a:spcAft>
+                <a:spcPts val="100"/>
+              </a:spcAft>
+            </a:pPr>
+            <a:r>
+              <a:rPr sz="1200" dirty="0">
+                <a:solidFill>
+                  <a:srgbClr val="E2E8F0"/>
+                </a:solidFill>
+                <a:latin typeface="Courier New"/>
+              </a:rPr>
+              <a:t>                    _</a:t>
+            </a:r>
+            <a:r>
+              <a:rPr sz="1200" dirty="0" err="1">
+                <a:solidFill>
+                  <a:srgbClr val="E2E8F0"/>
+                </a:solidFill>
+                <a:latin typeface="Courier New"/>
+              </a:rPr>
+              <a:t>schemaVersion</a:t>
+            </a:r>
+            <a:r>
+              <a:rPr sz="1200" dirty="0">
+                <a:solidFill>
+                  <a:srgbClr val="E2E8F0"/>
+                </a:solidFill>
+                <a:latin typeface="Courier New"/>
+              </a:rPr>
+              <a:t>: 1 })</a:t>
+            </a:r>
+          </a:p>
+          <a:p>
+            <a:pPr>
+              <a:spcAft>
+                <a:spcPts val="100"/>
+              </a:spcAft>
+            </a:pPr>
+            <a:r>
+              <a:rPr sz="1200" dirty="0">
+                <a:solidFill>
+                  <a:srgbClr val="E2E8F0"/>
+                </a:solidFill>
+                <a:latin typeface="Courier New"/>
+              </a:rPr>
+              <a:t>    </a:t>
+            </a:r>
+            <a:r>
+              <a:rPr sz="1200" dirty="0" err="1">
+                <a:solidFill>
+                  <a:srgbClr val="E2E8F0"/>
+                </a:solidFill>
+                <a:latin typeface="Courier New"/>
+              </a:rPr>
+              <a:t>res.status</a:t>
+            </a:r>
+            <a:r>
+              <a:rPr sz="1200" dirty="0">
+                <a:solidFill>
+                  <a:srgbClr val="E2E8F0"/>
+                </a:solidFill>
+                <a:latin typeface="Courier New"/>
+              </a:rPr>
+              <a:t>(201).</a:t>
+            </a:r>
+            <a:r>
+              <a:rPr sz="1200" dirty="0" err="1">
+                <a:solidFill>
+                  <a:srgbClr val="E2E8F0"/>
+                </a:solidFill>
+                <a:latin typeface="Courier New"/>
+              </a:rPr>
+              <a:t>json</a:t>
+            </a:r>
+            <a:r>
+              <a:rPr sz="1200" dirty="0">
+                <a:solidFill>
+                  <a:srgbClr val="E2E8F0"/>
+                </a:solidFill>
+                <a:latin typeface="Courier New"/>
+              </a:rPr>
+              <a:t>({ id: </a:t>
+            </a:r>
+            <a:r>
+              <a:rPr sz="1200" dirty="0" err="1">
+                <a:solidFill>
+                  <a:srgbClr val="E2E8F0"/>
+                </a:solidFill>
+                <a:latin typeface="Courier New"/>
+              </a:rPr>
+              <a:t>ref.id</a:t>
+            </a:r>
+            <a:r>
+              <a:rPr sz="1200" dirty="0">
+                <a:solidFill>
+                  <a:srgbClr val="E2E8F0"/>
+                </a:solidFill>
+                <a:latin typeface="Courier New"/>
+              </a:rPr>
+              <a:t> })</a:t>
+            </a:r>
+          </a:p>
+          <a:p>
+            <a:pPr>
+              <a:spcAft>
+                <a:spcPts val="100"/>
+              </a:spcAft>
+            </a:pPr>
+            <a:r>
+              <a:rPr sz="1200" dirty="0">
                 <a:solidFill>
                   <a:srgbClr val="E2E8F0"/>
                 </a:solidFill>
@@ -4740,7 +5652,7 @@
               </a:spcAft>
             </a:pPr>
             <a:r>
-              <a:rPr sz="1200">
+              <a:rPr sz="1200" dirty="0">
                 <a:solidFill>
                   <a:srgbClr val="E2E8F0"/>
                 </a:solidFill>
@@ -4756,7 +5668,7 @@
               </a:spcAft>
             </a:pPr>
             <a:r>
-              <a:rPr sz="1200">
+              <a:rPr sz="1200" dirty="0">
                 <a:solidFill>
                   <a:srgbClr val="E2E8F0"/>
                 </a:solidFill>
@@ -4772,7 +5684,7 @@
               </a:spcAft>
             </a:pPr>
             <a:r>
-              <a:rPr sz="1200">
+              <a:rPr sz="1200" dirty="0">
                 <a:solidFill>
                   <a:srgbClr val="E2E8F0"/>
                 </a:solidFill>
@@ -4884,7 +5796,7 @@
 </file>
 
 <file path=ppt/slides/slide13.xml><?xml version="1.0" encoding="utf-8"?>
-<p:sld xmlns:a="http://schemas.openxmlformats.org/drawingml/2006/main" xmlns:p="http://schemas.openxmlformats.org/presentationml/2006/main" xmlns:r="http://schemas.openxmlformats.org/officeDocument/2006/relationships">
+<p:sld xmlns:a="http://schemas.openxmlformats.org/drawingml/2006/main" xmlns:r="http://schemas.openxmlformats.org/officeDocument/2006/relationships" xmlns:p="http://schemas.openxmlformats.org/presentationml/2006/main">
   <p:cSld>
     <p:bg>
       <p:bgPr>
@@ -4900,7 +5812,14 @@
         <p:cNvGrpSpPr/>
         <p:nvPr/>
       </p:nvGrpSpPr>
-      <p:grpSpPr/>
+      <p:grpSpPr>
+        <a:xfrm>
+          <a:off x="0" y="0"/>
+          <a:ext cx="0" cy="0"/>
+          <a:chOff x="0" y="0"/>
+          <a:chExt cx="0" cy="0"/>
+        </a:xfrm>
+      </p:grpSpPr>
       <p:sp>
         <p:nvSpPr>
           <p:cNvPr id="2" name="TextBox 1"/>
@@ -4987,7 +5906,7 @@
         </p:nvGraphicFramePr>
         <p:xfrm>
           <a:off x="1097280" y="1920240"/>
-          <a:ext cx="9966960" cy="3840480"/>
+          <a:ext cx="9966960" cy="3931920"/>
         </p:xfrm>
         <a:graphic>
           <a:graphicData uri="http://schemas.openxmlformats.org/drawingml/2006/table">
@@ -4996,8 +5915,20 @@
                 <a:tableStyleId>{5C22544A-7EE6-4342-B048-85BDC9FD1C3A}</a:tableStyleId>
               </a:tblPr>
               <a:tblGrid>
-                <a:gridCol w="4754880"/>
-                <a:gridCol w="5212080"/>
+                <a:gridCol w="4754880">
+                  <a:extLst>
+                    <a:ext uri="{9D8B030D-6E8A-4147-A177-3AD203B41FA5}">
+                      <a16:colId xmlns:a16="http://schemas.microsoft.com/office/drawing/2014/main" val="20000"/>
+                    </a:ext>
+                  </a:extLst>
+                </a:gridCol>
+                <a:gridCol w="5212080">
+                  <a:extLst>
+                    <a:ext uri="{9D8B030D-6E8A-4147-A177-3AD203B41FA5}">
+                      <a16:colId xmlns:a16="http://schemas.microsoft.com/office/drawing/2014/main" val="20001"/>
+                    </a:ext>
+                  </a:extLst>
+                </a:gridCol>
               </a:tblGrid>
               <a:tr h="548640">
                 <a:tc>
@@ -5042,6 +5973,11 @@
                     </a:solidFill>
                   </a:tcPr>
                 </a:tc>
+                <a:extLst>
+                  <a:ext uri="{0D108BD9-81ED-4DB2-BD59-A6C34878D82A}">
+                    <a16:rowId xmlns:a16="http://schemas.microsoft.com/office/drawing/2014/main" val="10000"/>
+                  </a:ext>
+                </a:extLst>
               </a:tr>
               <a:tr h="548640">
                 <a:tc>
@@ -5087,6 +6023,11 @@
                     </a:solidFill>
                   </a:tcPr>
                 </a:tc>
+                <a:extLst>
+                  <a:ext uri="{0D108BD9-81ED-4DB2-BD59-A6C34878D82A}">
+                    <a16:rowId xmlns:a16="http://schemas.microsoft.com/office/drawing/2014/main" val="10001"/>
+                  </a:ext>
+                </a:extLst>
               </a:tr>
               <a:tr h="548640">
                 <a:tc>
@@ -5132,6 +6073,11 @@
                     </a:solidFill>
                   </a:tcPr>
                 </a:tc>
+                <a:extLst>
+                  <a:ext uri="{0D108BD9-81ED-4DB2-BD59-A6C34878D82A}">
+                    <a16:rowId xmlns:a16="http://schemas.microsoft.com/office/drawing/2014/main" val="10002"/>
+                  </a:ext>
+                </a:extLst>
               </a:tr>
               <a:tr h="548640">
                 <a:tc>
@@ -5177,6 +6123,11 @@
                     </a:solidFill>
                   </a:tcPr>
                 </a:tc>
+                <a:extLst>
+                  <a:ext uri="{0D108BD9-81ED-4DB2-BD59-A6C34878D82A}">
+                    <a16:rowId xmlns:a16="http://schemas.microsoft.com/office/drawing/2014/main" val="10003"/>
+                  </a:ext>
+                </a:extLst>
               </a:tr>
               <a:tr h="548640">
                 <a:tc>
@@ -5217,6 +6168,11 @@
                     </a:solidFill>
                   </a:tcPr>
                 </a:tc>
+                <a:extLst>
+                  <a:ext uri="{0D108BD9-81ED-4DB2-BD59-A6C34878D82A}">
+                    <a16:rowId xmlns:a16="http://schemas.microsoft.com/office/drawing/2014/main" val="10004"/>
+                  </a:ext>
+                </a:extLst>
               </a:tr>
               <a:tr h="548640">
                 <a:tc>
@@ -5262,6 +6218,11 @@
                     </a:solidFill>
                   </a:tcPr>
                 </a:tc>
+                <a:extLst>
+                  <a:ext uri="{0D108BD9-81ED-4DB2-BD59-A6C34878D82A}">
+                    <a16:rowId xmlns:a16="http://schemas.microsoft.com/office/drawing/2014/main" val="10005"/>
+                  </a:ext>
+                </a:extLst>
               </a:tr>
               <a:tr h="548640">
                 <a:tc>
@@ -5307,6 +6268,11 @@
                     </a:solidFill>
                   </a:tcPr>
                 </a:tc>
+                <a:extLst>
+                  <a:ext uri="{0D108BD9-81ED-4DB2-BD59-A6C34878D82A}">
+                    <a16:rowId xmlns:a16="http://schemas.microsoft.com/office/drawing/2014/main" val="10006"/>
+                  </a:ext>
+                </a:extLst>
               </a:tr>
             </a:tbl>
           </a:graphicData>
@@ -5321,7 +6287,7 @@
 </file>
 
 <file path=ppt/slides/slide14.xml><?xml version="1.0" encoding="utf-8"?>
-<p:sld xmlns:a="http://schemas.openxmlformats.org/drawingml/2006/main" xmlns:p="http://schemas.openxmlformats.org/presentationml/2006/main" xmlns:r="http://schemas.openxmlformats.org/officeDocument/2006/relationships">
+<p:sld xmlns:a="http://schemas.openxmlformats.org/drawingml/2006/main" xmlns:r="http://schemas.openxmlformats.org/officeDocument/2006/relationships" xmlns:p="http://schemas.openxmlformats.org/presentationml/2006/main">
   <p:cSld>
     <p:bg>
       <p:bgPr>
@@ -5337,7 +6303,14 @@
         <p:cNvGrpSpPr/>
         <p:nvPr/>
       </p:nvGrpSpPr>
-      <p:grpSpPr/>
+      <p:grpSpPr>
+        <a:xfrm>
+          <a:off x="0" y="0"/>
+          <a:ext cx="0" cy="0"/>
+          <a:chOff x="0" y="0"/>
+          <a:chExt cx="0" cy="0"/>
+        </a:xfrm>
+      </p:grpSpPr>
       <p:sp>
         <p:nvSpPr>
           <p:cNvPr id="2" name="TextBox 1"/>
@@ -5433,9 +6406,27 @@
                 <a:tableStyleId>{5C22544A-7EE6-4342-B048-85BDC9FD1C3A}</a:tableStyleId>
               </a:tblPr>
               <a:tblGrid>
-                <a:gridCol w="6126480"/>
-                <a:gridCol w="1828800"/>
-                <a:gridCol w="2011680"/>
+                <a:gridCol w="6126480">
+                  <a:extLst>
+                    <a:ext uri="{9D8B030D-6E8A-4147-A177-3AD203B41FA5}">
+                      <a16:colId xmlns:a16="http://schemas.microsoft.com/office/drawing/2014/main" val="20000"/>
+                    </a:ext>
+                  </a:extLst>
+                </a:gridCol>
+                <a:gridCol w="1828800">
+                  <a:extLst>
+                    <a:ext uri="{9D8B030D-6E8A-4147-A177-3AD203B41FA5}">
+                      <a16:colId xmlns:a16="http://schemas.microsoft.com/office/drawing/2014/main" val="20001"/>
+                    </a:ext>
+                  </a:extLst>
+                </a:gridCol>
+                <a:gridCol w="2011680">
+                  <a:extLst>
+                    <a:ext uri="{9D8B030D-6E8A-4147-A177-3AD203B41FA5}">
+                      <a16:colId xmlns:a16="http://schemas.microsoft.com/office/drawing/2014/main" val="20002"/>
+                    </a:ext>
+                  </a:extLst>
+                </a:gridCol>
               </a:tblGrid>
               <a:tr h="548640">
                 <a:tc>
@@ -5501,6 +6492,11 @@
                     </a:solidFill>
                   </a:tcPr>
                 </a:tc>
+                <a:extLst>
+                  <a:ext uri="{0D108BD9-81ED-4DB2-BD59-A6C34878D82A}">
+                    <a16:rowId xmlns:a16="http://schemas.microsoft.com/office/drawing/2014/main" val="10000"/>
+                  </a:ext>
+                </a:extLst>
               </a:tr>
               <a:tr h="548640">
                 <a:tc>
@@ -5566,6 +6562,11 @@
                     </a:solidFill>
                   </a:tcPr>
                 </a:tc>
+                <a:extLst>
+                  <a:ext uri="{0D108BD9-81ED-4DB2-BD59-A6C34878D82A}">
+                    <a16:rowId xmlns:a16="http://schemas.microsoft.com/office/drawing/2014/main" val="10001"/>
+                  </a:ext>
+                </a:extLst>
               </a:tr>
               <a:tr h="548640">
                 <a:tc>
@@ -5631,6 +6632,11 @@
                     </a:solidFill>
                   </a:tcPr>
                 </a:tc>
+                <a:extLst>
+                  <a:ext uri="{0D108BD9-81ED-4DB2-BD59-A6C34878D82A}">
+                    <a16:rowId xmlns:a16="http://schemas.microsoft.com/office/drawing/2014/main" val="10002"/>
+                  </a:ext>
+                </a:extLst>
               </a:tr>
               <a:tr h="548640">
                 <a:tc>
@@ -5696,6 +6702,11 @@
                     </a:solidFill>
                   </a:tcPr>
                 </a:tc>
+                <a:extLst>
+                  <a:ext uri="{0D108BD9-81ED-4DB2-BD59-A6C34878D82A}">
+                    <a16:rowId xmlns:a16="http://schemas.microsoft.com/office/drawing/2014/main" val="10003"/>
+                  </a:ext>
+                </a:extLst>
               </a:tr>
               <a:tr h="548640">
                 <a:tc>
@@ -5761,6 +6772,11 @@
                     </a:solidFill>
                   </a:tcPr>
                 </a:tc>
+                <a:extLst>
+                  <a:ext uri="{0D108BD9-81ED-4DB2-BD59-A6C34878D82A}">
+                    <a16:rowId xmlns:a16="http://schemas.microsoft.com/office/drawing/2014/main" val="10004"/>
+                  </a:ext>
+                </a:extLst>
               </a:tr>
               <a:tr h="548640">
                 <a:tc>
@@ -5826,6 +6842,11 @@
                     </a:solidFill>
                   </a:tcPr>
                 </a:tc>
+                <a:extLst>
+                  <a:ext uri="{0D108BD9-81ED-4DB2-BD59-A6C34878D82A}">
+                    <a16:rowId xmlns:a16="http://schemas.microsoft.com/office/drawing/2014/main" val="10005"/>
+                  </a:ext>
+                </a:extLst>
               </a:tr>
               <a:tr h="548640">
                 <a:tc>
@@ -5891,6 +6912,11 @@
                     </a:solidFill>
                   </a:tcPr>
                 </a:tc>
+                <a:extLst>
+                  <a:ext uri="{0D108BD9-81ED-4DB2-BD59-A6C34878D82A}">
+                    <a16:rowId xmlns:a16="http://schemas.microsoft.com/office/drawing/2014/main" val="10006"/>
+                  </a:ext>
+                </a:extLst>
               </a:tr>
             </a:tbl>
           </a:graphicData>
@@ -5943,7 +6969,7 @@
 </file>
 
 <file path=ppt/slides/slide15.xml><?xml version="1.0" encoding="utf-8"?>
-<p:sld xmlns:a="http://schemas.openxmlformats.org/drawingml/2006/main" xmlns:p="http://schemas.openxmlformats.org/presentationml/2006/main" xmlns:r="http://schemas.openxmlformats.org/officeDocument/2006/relationships">
+<p:sld xmlns:a="http://schemas.openxmlformats.org/drawingml/2006/main" xmlns:r="http://schemas.openxmlformats.org/officeDocument/2006/relationships" xmlns:p="http://schemas.openxmlformats.org/presentationml/2006/main">
   <p:cSld>
     <p:bg>
       <p:bgPr>
@@ -5959,7 +6985,14 @@
         <p:cNvGrpSpPr/>
         <p:nvPr/>
       </p:nvGrpSpPr>
-      <p:grpSpPr/>
+      <p:grpSpPr>
+        <a:xfrm>
+          <a:off x="0" y="0"/>
+          <a:ext cx="0" cy="0"/>
+          <a:chOff x="0" y="0"/>
+          <a:chExt cx="0" cy="0"/>
+        </a:xfrm>
+      </p:grpSpPr>
       <p:sp>
         <p:nvSpPr>
           <p:cNvPr id="2" name="TextBox 1"/>
@@ -6073,7 +7106,7 @@
           </a:fontRef>
         </p:style>
         <p:txBody>
-          <a:bodyPr rtlCol="0" anchor="t" wrap="none" lIns="228600" rIns="182880" tIns="128016"/>
+          <a:bodyPr wrap="none" lIns="228600" tIns="128016" rIns="182880" rtlCol="0" anchor="t"/>
           <a:lstStyle/>
           <a:p>
             <a:pPr algn="ctr">
@@ -6231,14 +7264,6 @@
               </a:rPr>
               <a:t>Total for this feature: 9 frontend/rules/docs files + 3 optional backend files. All of it scaffoldable with skills — or copy-paste, see COPY-PASTE-FEATURE.md.</a:t>
             </a:r>
-            <a:r>
-              <a:rPr sz="1600" b="0">
-                <a:solidFill>
-                  <a:srgbClr val="334155"/>
-                </a:solidFill>
-              </a:rPr>
-              <a:t/>
-            </a:r>
           </a:p>
         </p:txBody>
       </p:sp>
@@ -6251,7 +7276,7 @@
 </file>
 
 <file path=ppt/slides/slide16.xml><?xml version="1.0" encoding="utf-8"?>
-<p:sld xmlns:a="http://schemas.openxmlformats.org/drawingml/2006/main" xmlns:p="http://schemas.openxmlformats.org/presentationml/2006/main" xmlns:r="http://schemas.openxmlformats.org/officeDocument/2006/relationships">
+<p:sld xmlns:a="http://schemas.openxmlformats.org/drawingml/2006/main" xmlns:r="http://schemas.openxmlformats.org/officeDocument/2006/relationships" xmlns:p="http://schemas.openxmlformats.org/presentationml/2006/main">
   <p:cSld>
     <p:bg>
       <p:bgPr>
@@ -6267,7 +7292,14 @@
         <p:cNvGrpSpPr/>
         <p:nvPr/>
       </p:nvGrpSpPr>
-      <p:grpSpPr/>
+      <p:grpSpPr>
+        <a:xfrm>
+          <a:off x="0" y="0"/>
+          <a:ext cx="0" cy="0"/>
+          <a:chOff x="0" y="0"/>
+          <a:chExt cx="0" cy="0"/>
+        </a:xfrm>
+      </p:grpSpPr>
       <p:sp>
         <p:nvSpPr>
           <p:cNvPr id="2" name="TextBox 1"/>
@@ -6347,6 +7379,7 @@
           <a:lstStyle/>
           <a:p>
             <a:pPr algn="ctr"/>
+            <a:endParaRPr/>
           </a:p>
         </p:txBody>
       </p:sp>
@@ -6558,7 +7591,7 @@
 </file>
 
 <file path=ppt/slides/slide2.xml><?xml version="1.0" encoding="utf-8"?>
-<p:sld xmlns:a="http://schemas.openxmlformats.org/drawingml/2006/main" xmlns:p="http://schemas.openxmlformats.org/presentationml/2006/main" xmlns:r="http://schemas.openxmlformats.org/officeDocument/2006/relationships">
+<p:sld xmlns:a="http://schemas.openxmlformats.org/drawingml/2006/main" xmlns:r="http://schemas.openxmlformats.org/officeDocument/2006/relationships" xmlns:p="http://schemas.openxmlformats.org/presentationml/2006/main">
   <p:cSld>
     <p:bg>
       <p:bgPr>
@@ -6574,7 +7607,14 @@
         <p:cNvGrpSpPr/>
         <p:nvPr/>
       </p:nvGrpSpPr>
-      <p:grpSpPr/>
+      <p:grpSpPr>
+        <a:xfrm>
+          <a:off x="0" y="0"/>
+          <a:ext cx="0" cy="0"/>
+          <a:chOff x="0" y="0"/>
+          <a:chExt cx="0" cy="0"/>
+        </a:xfrm>
+      </p:grpSpPr>
       <p:sp>
         <p:nvSpPr>
           <p:cNvPr id="2" name="TextBox 1"/>
@@ -7118,7 +8158,7 @@
 </file>
 
 <file path=ppt/slides/slide3.xml><?xml version="1.0" encoding="utf-8"?>
-<p:sld xmlns:a="http://schemas.openxmlformats.org/drawingml/2006/main" xmlns:p="http://schemas.openxmlformats.org/presentationml/2006/main" xmlns:r="http://schemas.openxmlformats.org/officeDocument/2006/relationships">
+<p:sld xmlns:a="http://schemas.openxmlformats.org/drawingml/2006/main" xmlns:r="http://schemas.openxmlformats.org/officeDocument/2006/relationships" xmlns:p="http://schemas.openxmlformats.org/presentationml/2006/main">
   <p:cSld>
     <p:bg>
       <p:bgPr>
@@ -7134,7 +8174,14 @@
         <p:cNvGrpSpPr/>
         <p:nvPr/>
       </p:nvGrpSpPr>
-      <p:grpSpPr/>
+      <p:grpSpPr>
+        <a:xfrm>
+          <a:off x="0" y="0"/>
+          <a:ext cx="0" cy="0"/>
+          <a:chOff x="0" y="0"/>
+          <a:chExt cx="0" cy="0"/>
+        </a:xfrm>
+      </p:grpSpPr>
       <p:sp>
         <p:nvSpPr>
           <p:cNvPr id="2" name="Rounded Rectangle 1"/>
@@ -7300,7 +8347,7 @@
           </a:fontRef>
         </p:style>
         <p:txBody>
-          <a:bodyPr rtlCol="0" anchor="t" wrap="none" lIns="228600" rIns="182880" tIns="128016"/>
+          <a:bodyPr wrap="none" lIns="228600" tIns="128016" rIns="182880" rtlCol="0" anchor="t"/>
           <a:lstStyle/>
           <a:p>
             <a:pPr algn="ctr">
@@ -7309,23 +8356,59 @@
               </a:spcAft>
             </a:pPr>
             <a:r>
-              <a:rPr sz="1300" b="1">
+              <a:rPr sz="1300" b="1" dirty="0">
                 <a:solidFill>
                   <a:srgbClr val="F59E0B"/>
                 </a:solidFill>
                 <a:latin typeface="Courier New"/>
               </a:rPr>
-              <a:t>frontend/src/types/firestore.ts  (append)</a:t>
-            </a:r>
-          </a:p>
-          <a:p>
-            <a:pPr>
-              <a:spcAft>
-                <a:spcPts val="100"/>
-              </a:spcAft>
-            </a:pPr>
-            <a:r>
-              <a:rPr sz="1400">
+              <a:t>frontend/</a:t>
+            </a:r>
+            <a:r>
+              <a:rPr sz="1300" b="1" dirty="0" err="1">
+                <a:solidFill>
+                  <a:srgbClr val="F59E0B"/>
+                </a:solidFill>
+                <a:latin typeface="Courier New"/>
+              </a:rPr>
+              <a:t>src</a:t>
+            </a:r>
+            <a:r>
+              <a:rPr sz="1300" b="1" dirty="0">
+                <a:solidFill>
+                  <a:srgbClr val="F59E0B"/>
+                </a:solidFill>
+                <a:latin typeface="Courier New"/>
+              </a:rPr>
+              <a:t>/types/</a:t>
+            </a:r>
+            <a:r>
+              <a:rPr sz="1300" b="1" dirty="0" err="1">
+                <a:solidFill>
+                  <a:srgbClr val="F59E0B"/>
+                </a:solidFill>
+                <a:latin typeface="Courier New"/>
+              </a:rPr>
+              <a:t>firestore.ts</a:t>
+            </a:r>
+            <a:r>
+              <a:rPr sz="1300" b="1" dirty="0">
+                <a:solidFill>
+                  <a:srgbClr val="F59E0B"/>
+                </a:solidFill>
+                <a:latin typeface="Courier New"/>
+              </a:rPr>
+              <a:t>  (append)</a:t>
+            </a:r>
+          </a:p>
+          <a:p>
+            <a:pPr>
+              <a:spcAft>
+                <a:spcPts val="100"/>
+              </a:spcAft>
+            </a:pPr>
+            <a:r>
+              <a:rPr sz="1400" dirty="0">
                 <a:solidFill>
                   <a:srgbClr val="E2E8F0"/>
                 </a:solidFill>
@@ -7341,7 +8424,7 @@
               </a:spcAft>
             </a:pPr>
             <a:r>
-              <a:rPr sz="1400">
+              <a:rPr sz="1400" dirty="0">
                 <a:solidFill>
                   <a:srgbClr val="E2E8F0"/>
                 </a:solidFill>
@@ -7357,23 +8440,41 @@
               </a:spcAft>
             </a:pPr>
             <a:r>
-              <a:rPr sz="1400">
-                <a:solidFill>
-                  <a:srgbClr val="E2E8F0"/>
-                </a:solidFill>
-                <a:latin typeface="Courier New"/>
-              </a:rPr>
-              <a:t>  uid: string  // owner — used by security rules</a:t>
-            </a:r>
-          </a:p>
-          <a:p>
-            <a:pPr>
-              <a:spcAft>
-                <a:spcPts val="100"/>
-              </a:spcAft>
-            </a:pPr>
-            <a:r>
-              <a:rPr sz="1400">
+              <a:rPr sz="1400" dirty="0">
+                <a:solidFill>
+                  <a:srgbClr val="E2E8F0"/>
+                </a:solidFill>
+                <a:latin typeface="Courier New"/>
+              </a:rPr>
+              <a:t>  </a:t>
+            </a:r>
+            <a:r>
+              <a:rPr sz="1400" dirty="0" err="1">
+                <a:solidFill>
+                  <a:srgbClr val="E2E8F0"/>
+                </a:solidFill>
+                <a:latin typeface="Courier New"/>
+              </a:rPr>
+              <a:t>uid</a:t>
+            </a:r>
+            <a:r>
+              <a:rPr sz="1400" dirty="0">
+                <a:solidFill>
+                  <a:srgbClr val="E2E8F0"/>
+                </a:solidFill>
+                <a:latin typeface="Courier New"/>
+              </a:rPr>
+              <a:t>: string  // owner — used by security rules</a:t>
+            </a:r>
+          </a:p>
+          <a:p>
+            <a:pPr>
+              <a:spcAft>
+                <a:spcPts val="100"/>
+              </a:spcAft>
+            </a:pPr>
+            <a:r>
+              <a:rPr sz="1400" dirty="0">
                 <a:solidFill>
                   <a:srgbClr val="E2E8F0"/>
                 </a:solidFill>
@@ -7389,7 +8490,7 @@
               </a:spcAft>
             </a:pPr>
             <a:r>
-              <a:rPr sz="1400">
+              <a:rPr sz="1400" dirty="0">
                 <a:solidFill>
                   <a:srgbClr val="E2E8F0"/>
                 </a:solidFill>
@@ -7405,55 +8506,109 @@
               </a:spcAft>
             </a:pPr>
             <a:r>
-              <a:rPr sz="1400">
-                <a:solidFill>
-                  <a:srgbClr val="E2E8F0"/>
-                </a:solidFill>
-                <a:latin typeface="Courier New"/>
-              </a:rPr>
-              <a:t>  createdAt: Timestamp</a:t>
-            </a:r>
-          </a:p>
-          <a:p>
-            <a:pPr>
-              <a:spcAft>
-                <a:spcPts val="100"/>
-              </a:spcAft>
-            </a:pPr>
-            <a:r>
-              <a:rPr sz="1400">
-                <a:solidFill>
-                  <a:srgbClr val="E2E8F0"/>
-                </a:solidFill>
-                <a:latin typeface="Courier New"/>
-              </a:rPr>
-              <a:t>  updatedAt: Timestamp</a:t>
-            </a:r>
-          </a:p>
-          <a:p>
-            <a:pPr>
-              <a:spcAft>
-                <a:spcPts val="100"/>
-              </a:spcAft>
-            </a:pPr>
-            <a:r>
-              <a:rPr sz="1400">
-                <a:solidFill>
-                  <a:srgbClr val="E2E8F0"/>
-                </a:solidFill>
-                <a:latin typeface="Courier New"/>
-              </a:rPr>
-              <a:t>  _schemaVersion: 1</a:t>
-            </a:r>
-          </a:p>
-          <a:p>
-            <a:pPr>
-              <a:spcAft>
-                <a:spcPts val="100"/>
-              </a:spcAft>
-            </a:pPr>
-            <a:r>
-              <a:rPr sz="1400">
+              <a:rPr sz="1400" dirty="0">
+                <a:solidFill>
+                  <a:srgbClr val="E2E8F0"/>
+                </a:solidFill>
+                <a:latin typeface="Courier New"/>
+              </a:rPr>
+              <a:t>  </a:t>
+            </a:r>
+            <a:r>
+              <a:rPr sz="1400" dirty="0" err="1">
+                <a:solidFill>
+                  <a:srgbClr val="E2E8F0"/>
+                </a:solidFill>
+                <a:latin typeface="Courier New"/>
+              </a:rPr>
+              <a:t>createdAt</a:t>
+            </a:r>
+            <a:r>
+              <a:rPr sz="1400" dirty="0">
+                <a:solidFill>
+                  <a:srgbClr val="E2E8F0"/>
+                </a:solidFill>
+                <a:latin typeface="Courier New"/>
+              </a:rPr>
+              <a:t>: Timestamp</a:t>
+            </a:r>
+          </a:p>
+          <a:p>
+            <a:pPr>
+              <a:spcAft>
+                <a:spcPts val="100"/>
+              </a:spcAft>
+            </a:pPr>
+            <a:r>
+              <a:rPr sz="1400" dirty="0">
+                <a:solidFill>
+                  <a:srgbClr val="E2E8F0"/>
+                </a:solidFill>
+                <a:latin typeface="Courier New"/>
+              </a:rPr>
+              <a:t>  </a:t>
+            </a:r>
+            <a:r>
+              <a:rPr sz="1400" dirty="0" err="1">
+                <a:solidFill>
+                  <a:srgbClr val="E2E8F0"/>
+                </a:solidFill>
+                <a:latin typeface="Courier New"/>
+              </a:rPr>
+              <a:t>updatedAt</a:t>
+            </a:r>
+            <a:r>
+              <a:rPr sz="1400" dirty="0">
+                <a:solidFill>
+                  <a:srgbClr val="E2E8F0"/>
+                </a:solidFill>
+                <a:latin typeface="Courier New"/>
+              </a:rPr>
+              <a:t>: Timestamp</a:t>
+            </a:r>
+          </a:p>
+          <a:p>
+            <a:pPr>
+              <a:spcAft>
+                <a:spcPts val="100"/>
+              </a:spcAft>
+            </a:pPr>
+            <a:r>
+              <a:rPr sz="1400" dirty="0">
+                <a:solidFill>
+                  <a:srgbClr val="E2E8F0"/>
+                </a:solidFill>
+                <a:latin typeface="Courier New"/>
+              </a:rPr>
+              <a:t>  _</a:t>
+            </a:r>
+            <a:r>
+              <a:rPr sz="1400" dirty="0" err="1">
+                <a:solidFill>
+                  <a:srgbClr val="E2E8F0"/>
+                </a:solidFill>
+                <a:latin typeface="Courier New"/>
+              </a:rPr>
+              <a:t>schemaVersion</a:t>
+            </a:r>
+            <a:r>
+              <a:rPr sz="1400" dirty="0">
+                <a:solidFill>
+                  <a:srgbClr val="E2E8F0"/>
+                </a:solidFill>
+                <a:latin typeface="Courier New"/>
+              </a:rPr>
+              <a:t>: 1</a:t>
+            </a:r>
+          </a:p>
+          <a:p>
+            <a:pPr>
+              <a:spcAft>
+                <a:spcPts val="100"/>
+              </a:spcAft>
+            </a:pPr>
+            <a:r>
+              <a:rPr sz="1400" dirty="0">
                 <a:solidFill>
                   <a:srgbClr val="E2E8F0"/>
                 </a:solidFill>
@@ -7565,7 +8720,7 @@
 </file>
 
 <file path=ppt/slides/slide4.xml><?xml version="1.0" encoding="utf-8"?>
-<p:sld xmlns:a="http://schemas.openxmlformats.org/drawingml/2006/main" xmlns:p="http://schemas.openxmlformats.org/presentationml/2006/main" xmlns:r="http://schemas.openxmlformats.org/officeDocument/2006/relationships">
+<p:sld xmlns:a="http://schemas.openxmlformats.org/drawingml/2006/main" xmlns:r="http://schemas.openxmlformats.org/officeDocument/2006/relationships" xmlns:p="http://schemas.openxmlformats.org/presentationml/2006/main">
   <p:cSld>
     <p:bg>
       <p:bgPr>
@@ -7581,7 +8736,14 @@
         <p:cNvGrpSpPr/>
         <p:nvPr/>
       </p:nvGrpSpPr>
-      <p:grpSpPr/>
+      <p:grpSpPr>
+        <a:xfrm>
+          <a:off x="0" y="0"/>
+          <a:ext cx="0" cy="0"/>
+          <a:chOff x="0" y="0"/>
+          <a:chExt cx="0" cy="0"/>
+        </a:xfrm>
+      </p:grpSpPr>
       <p:sp>
         <p:nvSpPr>
           <p:cNvPr id="2" name="Rounded Rectangle 1"/>
@@ -7747,7 +8909,7 @@
           </a:fontRef>
         </p:style>
         <p:txBody>
-          <a:bodyPr rtlCol="0" anchor="t" wrap="none" lIns="228600" rIns="182880" tIns="128016"/>
+          <a:bodyPr wrap="none" lIns="228600" tIns="128016" rIns="182880" rtlCol="0" anchor="t"/>
           <a:lstStyle/>
           <a:p>
             <a:pPr algn="ctr">
@@ -7756,39 +8918,111 @@
               </a:spcAft>
             </a:pPr>
             <a:r>
-              <a:rPr sz="1300" b="1">
+              <a:rPr sz="1300" b="1" dirty="0">
                 <a:solidFill>
                   <a:srgbClr val="F59E0B"/>
                 </a:solidFill>
                 <a:latin typeface="Courier New"/>
               </a:rPr>
-              <a:t>frontend/src/lib/firebase/firestore.ts  (append)</a:t>
-            </a:r>
-          </a:p>
-          <a:p>
-            <a:pPr>
-              <a:spcAft>
-                <a:spcPts val="100"/>
-              </a:spcAft>
-            </a:pPr>
-            <a:r>
-              <a:rPr sz="1400">
-                <a:solidFill>
-                  <a:srgbClr val="E2E8F0"/>
-                </a:solidFill>
-                <a:latin typeface="Courier New"/>
-              </a:rPr>
-              <a:t>import type { Note, UserProfile } from '@/types/firestore'</a:t>
-            </a:r>
-          </a:p>
-          <a:p>
-            <a:pPr>
-              <a:spcAft>
-                <a:spcPts val="100"/>
-              </a:spcAft>
-            </a:pPr>
-            <a:r>
-              <a:rPr sz="1400">
+              <a:t>frontend/</a:t>
+            </a:r>
+            <a:r>
+              <a:rPr sz="1300" b="1" dirty="0" err="1">
+                <a:solidFill>
+                  <a:srgbClr val="F59E0B"/>
+                </a:solidFill>
+                <a:latin typeface="Courier New"/>
+              </a:rPr>
+              <a:t>src</a:t>
+            </a:r>
+            <a:r>
+              <a:rPr sz="1300" b="1" dirty="0">
+                <a:solidFill>
+                  <a:srgbClr val="F59E0B"/>
+                </a:solidFill>
+                <a:latin typeface="Courier New"/>
+              </a:rPr>
+              <a:t>/lib/firebase/</a:t>
+            </a:r>
+            <a:r>
+              <a:rPr sz="1300" b="1" dirty="0" err="1">
+                <a:solidFill>
+                  <a:srgbClr val="F59E0B"/>
+                </a:solidFill>
+                <a:latin typeface="Courier New"/>
+              </a:rPr>
+              <a:t>firestore.ts</a:t>
+            </a:r>
+            <a:r>
+              <a:rPr sz="1300" b="1" dirty="0">
+                <a:solidFill>
+                  <a:srgbClr val="F59E0B"/>
+                </a:solidFill>
+                <a:latin typeface="Courier New"/>
+              </a:rPr>
+              <a:t>  (append)</a:t>
+            </a:r>
+          </a:p>
+          <a:p>
+            <a:pPr>
+              <a:spcAft>
+                <a:spcPts val="100"/>
+              </a:spcAft>
+            </a:pPr>
+            <a:r>
+              <a:rPr sz="1400" dirty="0">
+                <a:solidFill>
+                  <a:srgbClr val="E2E8F0"/>
+                </a:solidFill>
+                <a:latin typeface="Courier New"/>
+              </a:rPr>
+              <a:t>import type { Note, </a:t>
+            </a:r>
+            <a:r>
+              <a:rPr sz="1400" dirty="0" err="1">
+                <a:solidFill>
+                  <a:srgbClr val="E2E8F0"/>
+                </a:solidFill>
+                <a:latin typeface="Courier New"/>
+              </a:rPr>
+              <a:t>UserProfile</a:t>
+            </a:r>
+            <a:r>
+              <a:rPr sz="1400" dirty="0">
+                <a:solidFill>
+                  <a:srgbClr val="E2E8F0"/>
+                </a:solidFill>
+                <a:latin typeface="Courier New"/>
+              </a:rPr>
+              <a:t> } from '@/types/</a:t>
+            </a:r>
+            <a:r>
+              <a:rPr sz="1400" dirty="0" err="1">
+                <a:solidFill>
+                  <a:srgbClr val="E2E8F0"/>
+                </a:solidFill>
+                <a:latin typeface="Courier New"/>
+              </a:rPr>
+              <a:t>firestore</a:t>
+            </a:r>
+            <a:r>
+              <a:rPr sz="1400" dirty="0">
+                <a:solidFill>
+                  <a:srgbClr val="E2E8F0"/>
+                </a:solidFill>
+                <a:latin typeface="Courier New"/>
+              </a:rPr>
+              <a:t>'</a:t>
+            </a:r>
+          </a:p>
+          <a:p>
+            <a:pPr>
+              <a:spcAft>
+                <a:spcPts val="100"/>
+              </a:spcAft>
+            </a:pPr>
+            <a:r>
+              <a:rPr sz="1400" dirty="0">
                 <a:solidFill>
                   <a:srgbClr val="E2E8F0"/>
                 </a:solidFill>
@@ -7804,39 +9038,75 @@
               </a:spcAft>
             </a:pPr>
             <a:r>
-              <a:rPr sz="1400">
-                <a:solidFill>
-                  <a:srgbClr val="E2E8F0"/>
-                </a:solidFill>
-                <a:latin typeface="Courier New"/>
-              </a:rPr>
-              <a:t>export function getNotesCollection() {</a:t>
-            </a:r>
-          </a:p>
-          <a:p>
-            <a:pPr>
-              <a:spcAft>
-                <a:spcPts val="100"/>
-              </a:spcAft>
-            </a:pPr>
-            <a:r>
-              <a:rPr sz="1400">
-                <a:solidFill>
-                  <a:srgbClr val="E2E8F0"/>
-                </a:solidFill>
-                <a:latin typeface="Courier New"/>
-              </a:rPr>
-              <a:t>  return typedCollection&lt;Note&gt;('notes')</a:t>
-            </a:r>
-          </a:p>
-          <a:p>
-            <a:pPr>
-              <a:spcAft>
-                <a:spcPts val="100"/>
-              </a:spcAft>
-            </a:pPr>
-            <a:r>
-              <a:rPr sz="1400">
+              <a:rPr sz="1400" dirty="0">
+                <a:solidFill>
+                  <a:srgbClr val="E2E8F0"/>
+                </a:solidFill>
+                <a:latin typeface="Courier New"/>
+              </a:rPr>
+              <a:t>export function </a:t>
+            </a:r>
+            <a:r>
+              <a:rPr sz="1400" dirty="0" err="1">
+                <a:solidFill>
+                  <a:srgbClr val="E2E8F0"/>
+                </a:solidFill>
+                <a:latin typeface="Courier New"/>
+              </a:rPr>
+              <a:t>getNotesCollection</a:t>
+            </a:r>
+            <a:r>
+              <a:rPr sz="1400" dirty="0">
+                <a:solidFill>
+                  <a:srgbClr val="E2E8F0"/>
+                </a:solidFill>
+                <a:latin typeface="Courier New"/>
+              </a:rPr>
+              <a:t>() {</a:t>
+            </a:r>
+          </a:p>
+          <a:p>
+            <a:pPr>
+              <a:spcAft>
+                <a:spcPts val="100"/>
+              </a:spcAft>
+            </a:pPr>
+            <a:r>
+              <a:rPr sz="1400" dirty="0">
+                <a:solidFill>
+                  <a:srgbClr val="E2E8F0"/>
+                </a:solidFill>
+                <a:latin typeface="Courier New"/>
+              </a:rPr>
+              <a:t>  return </a:t>
+            </a:r>
+            <a:r>
+              <a:rPr sz="1400" dirty="0" err="1">
+                <a:solidFill>
+                  <a:srgbClr val="E2E8F0"/>
+                </a:solidFill>
+                <a:latin typeface="Courier New"/>
+              </a:rPr>
+              <a:t>typedCollection</a:t>
+            </a:r>
+            <a:r>
+              <a:rPr sz="1400" dirty="0">
+                <a:solidFill>
+                  <a:srgbClr val="E2E8F0"/>
+                </a:solidFill>
+                <a:latin typeface="Courier New"/>
+              </a:rPr>
+              <a:t>&lt;Note&gt;('notes')</a:t>
+            </a:r>
+          </a:p>
+          <a:p>
+            <a:pPr>
+              <a:spcAft>
+                <a:spcPts val="100"/>
+              </a:spcAft>
+            </a:pPr>
+            <a:r>
+              <a:rPr sz="1400" dirty="0">
                 <a:solidFill>
                   <a:srgbClr val="E2E8F0"/>
                 </a:solidFill>
@@ -7852,7 +9122,7 @@
               </a:spcAft>
             </a:pPr>
             <a:r>
-              <a:rPr sz="1400">
+              <a:rPr sz="1400" dirty="0">
                 <a:solidFill>
                   <a:srgbClr val="E2E8F0"/>
                 </a:solidFill>
@@ -7868,39 +9138,75 @@
               </a:spcAft>
             </a:pPr>
             <a:r>
-              <a:rPr sz="1400">
-                <a:solidFill>
-                  <a:srgbClr val="E2E8F0"/>
-                </a:solidFill>
-                <a:latin typeface="Courier New"/>
-              </a:rPr>
-              <a:t>export function noteDoc(id: string) {</a:t>
-            </a:r>
-          </a:p>
-          <a:p>
-            <a:pPr>
-              <a:spcAft>
-                <a:spcPts val="100"/>
-              </a:spcAft>
-            </a:pPr>
-            <a:r>
-              <a:rPr sz="1400">
-                <a:solidFill>
-                  <a:srgbClr val="E2E8F0"/>
-                </a:solidFill>
-                <a:latin typeface="Courier New"/>
-              </a:rPr>
-              <a:t>  return doc(getNotesCollection(), id)</a:t>
-            </a:r>
-          </a:p>
-          <a:p>
-            <a:pPr>
-              <a:spcAft>
-                <a:spcPts val="100"/>
-              </a:spcAft>
-            </a:pPr>
-            <a:r>
-              <a:rPr sz="1400">
+              <a:rPr sz="1400" dirty="0">
+                <a:solidFill>
+                  <a:srgbClr val="E2E8F0"/>
+                </a:solidFill>
+                <a:latin typeface="Courier New"/>
+              </a:rPr>
+              <a:t>export function </a:t>
+            </a:r>
+            <a:r>
+              <a:rPr sz="1400" dirty="0" err="1">
+                <a:solidFill>
+                  <a:srgbClr val="E2E8F0"/>
+                </a:solidFill>
+                <a:latin typeface="Courier New"/>
+              </a:rPr>
+              <a:t>noteDoc</a:t>
+            </a:r>
+            <a:r>
+              <a:rPr sz="1400" dirty="0">
+                <a:solidFill>
+                  <a:srgbClr val="E2E8F0"/>
+                </a:solidFill>
+                <a:latin typeface="Courier New"/>
+              </a:rPr>
+              <a:t>(id: string) {</a:t>
+            </a:r>
+          </a:p>
+          <a:p>
+            <a:pPr>
+              <a:spcAft>
+                <a:spcPts val="100"/>
+              </a:spcAft>
+            </a:pPr>
+            <a:r>
+              <a:rPr sz="1400" dirty="0">
+                <a:solidFill>
+                  <a:srgbClr val="E2E8F0"/>
+                </a:solidFill>
+                <a:latin typeface="Courier New"/>
+              </a:rPr>
+              <a:t>  return doc(</a:t>
+            </a:r>
+            <a:r>
+              <a:rPr sz="1400" dirty="0" err="1">
+                <a:solidFill>
+                  <a:srgbClr val="E2E8F0"/>
+                </a:solidFill>
+                <a:latin typeface="Courier New"/>
+              </a:rPr>
+              <a:t>getNotesCollection</a:t>
+            </a:r>
+            <a:r>
+              <a:rPr sz="1400" dirty="0">
+                <a:solidFill>
+                  <a:srgbClr val="E2E8F0"/>
+                </a:solidFill>
+                <a:latin typeface="Courier New"/>
+              </a:rPr>
+              <a:t>(), id)</a:t>
+            </a:r>
+          </a:p>
+          <a:p>
+            <a:pPr>
+              <a:spcAft>
+                <a:spcPts val="100"/>
+              </a:spcAft>
+            </a:pPr>
+            <a:r>
+              <a:rPr sz="1400" dirty="0">
                 <a:solidFill>
                   <a:srgbClr val="E2E8F0"/>
                 </a:solidFill>
@@ -7989,7 +9295,7 @@
 </file>
 
 <file path=ppt/slides/slide5.xml><?xml version="1.0" encoding="utf-8"?>
-<p:sld xmlns:a="http://schemas.openxmlformats.org/drawingml/2006/main" xmlns:p="http://schemas.openxmlformats.org/presentationml/2006/main" xmlns:r="http://schemas.openxmlformats.org/officeDocument/2006/relationships">
+<p:sld xmlns:a="http://schemas.openxmlformats.org/drawingml/2006/main" xmlns:r="http://schemas.openxmlformats.org/officeDocument/2006/relationships" xmlns:p="http://schemas.openxmlformats.org/presentationml/2006/main">
   <p:cSld>
     <p:bg>
       <p:bgPr>
@@ -8005,7 +9311,14 @@
         <p:cNvGrpSpPr/>
         <p:nvPr/>
       </p:nvGrpSpPr>
-      <p:grpSpPr/>
+      <p:grpSpPr>
+        <a:xfrm>
+          <a:off x="0" y="0"/>
+          <a:ext cx="0" cy="0"/>
+          <a:chOff x="0" y="0"/>
+          <a:chExt cx="0" cy="0"/>
+        </a:xfrm>
+      </p:grpSpPr>
       <p:sp>
         <p:nvSpPr>
           <p:cNvPr id="2" name="Rounded Rectangle 1"/>
@@ -8171,7 +9484,7 @@
           </a:fontRef>
         </p:style>
         <p:txBody>
-          <a:bodyPr rtlCol="0" anchor="t" wrap="none" lIns="228600" rIns="182880" tIns="128016"/>
+          <a:bodyPr wrap="none" lIns="228600" tIns="128016" rIns="182880" rtlCol="0" anchor="t"/>
           <a:lstStyle/>
           <a:p>
             <a:pPr algn="ctr">
@@ -8180,71 +9493,179 @@
               </a:spcAft>
             </a:pPr>
             <a:r>
-              <a:rPr sz="1000" b="1">
+              <a:rPr sz="1000" b="1" dirty="0">
                 <a:solidFill>
                   <a:srgbClr val="F59E0B"/>
                 </a:solidFill>
                 <a:latin typeface="Courier New"/>
               </a:rPr>
-              <a:t>firebase/firestore.rules  (add above the marker comment)</a:t>
-            </a:r>
-          </a:p>
-          <a:p>
-            <a:pPr>
-              <a:spcAft>
-                <a:spcPts val="100"/>
-              </a:spcAft>
-            </a:pPr>
-            <a:r>
-              <a:rPr sz="1100">
-                <a:solidFill>
-                  <a:srgbClr val="E2E8F0"/>
-                </a:solidFill>
-                <a:latin typeface="Courier New"/>
-              </a:rPr>
-              <a:t>match /notes/{noteId} {</a:t>
-            </a:r>
-          </a:p>
-          <a:p>
-            <a:pPr>
-              <a:spcAft>
-                <a:spcPts val="100"/>
-              </a:spcAft>
-            </a:pPr>
-            <a:r>
-              <a:rPr sz="1100">
-                <a:solidFill>
-                  <a:srgbClr val="E2E8F0"/>
-                </a:solidFill>
-                <a:latin typeface="Courier New"/>
-              </a:rPr>
-              <a:t>  allow read: if isAuthenticated() &amp;&amp; isOwner(resource.data.uid)</a:t>
-            </a:r>
-          </a:p>
-          <a:p>
-            <a:pPr>
-              <a:spcAft>
-                <a:spcPts val="100"/>
-              </a:spcAft>
-            </a:pPr>
-            <a:r>
-              <a:rPr sz="1100">
-                <a:solidFill>
-                  <a:srgbClr val="E2E8F0"/>
-                </a:solidFill>
-                <a:latin typeface="Courier New"/>
-              </a:rPr>
-              <a:t>              &amp;&amp; notDeleted();</a:t>
-            </a:r>
-          </a:p>
-          <a:p>
-            <a:pPr>
-              <a:spcAft>
-                <a:spcPts val="100"/>
-              </a:spcAft>
-            </a:pPr>
-            <a:r>
-              <a:rPr sz="1100">
+              <a:t>firebase/</a:t>
+            </a:r>
+            <a:r>
+              <a:rPr sz="1000" b="1" dirty="0" err="1">
+                <a:solidFill>
+                  <a:srgbClr val="F59E0B"/>
+                </a:solidFill>
+                <a:latin typeface="Courier New"/>
+              </a:rPr>
+              <a:t>firestore.rules</a:t>
+            </a:r>
+            <a:r>
+              <a:rPr sz="1000" b="1" dirty="0">
+                <a:solidFill>
+                  <a:srgbClr val="F59E0B"/>
+                </a:solidFill>
+                <a:latin typeface="Courier New"/>
+              </a:rPr>
+              <a:t>  (add above the marker comment)</a:t>
+            </a:r>
+          </a:p>
+          <a:p>
+            <a:pPr>
+              <a:spcAft>
+                <a:spcPts val="100"/>
+              </a:spcAft>
+            </a:pPr>
+            <a:r>
+              <a:rPr sz="1100" dirty="0">
+                <a:solidFill>
+                  <a:srgbClr val="E2E8F0"/>
+                </a:solidFill>
+                <a:latin typeface="Courier New"/>
+              </a:rPr>
+              <a:t>match /notes/{</a:t>
+            </a:r>
+            <a:r>
+              <a:rPr sz="1100" dirty="0" err="1">
+                <a:solidFill>
+                  <a:srgbClr val="E2E8F0"/>
+                </a:solidFill>
+                <a:latin typeface="Courier New"/>
+              </a:rPr>
+              <a:t>noteId</a:t>
+            </a:r>
+            <a:r>
+              <a:rPr sz="1100" dirty="0">
+                <a:solidFill>
+                  <a:srgbClr val="E2E8F0"/>
+                </a:solidFill>
+                <a:latin typeface="Courier New"/>
+              </a:rPr>
+              <a:t>} {</a:t>
+            </a:r>
+          </a:p>
+          <a:p>
+            <a:pPr>
+              <a:spcAft>
+                <a:spcPts val="100"/>
+              </a:spcAft>
+            </a:pPr>
+            <a:r>
+              <a:rPr sz="1100" dirty="0">
+                <a:solidFill>
+                  <a:srgbClr val="E2E8F0"/>
+                </a:solidFill>
+                <a:latin typeface="Courier New"/>
+              </a:rPr>
+              <a:t>  allow read: if </a:t>
+            </a:r>
+            <a:r>
+              <a:rPr sz="1100" dirty="0" err="1">
+                <a:solidFill>
+                  <a:srgbClr val="E2E8F0"/>
+                </a:solidFill>
+                <a:latin typeface="Courier New"/>
+              </a:rPr>
+              <a:t>isAuthenticated</a:t>
+            </a:r>
+            <a:r>
+              <a:rPr sz="1100" dirty="0">
+                <a:solidFill>
+                  <a:srgbClr val="E2E8F0"/>
+                </a:solidFill>
+                <a:latin typeface="Courier New"/>
+              </a:rPr>
+              <a:t>() &amp;&amp; </a:t>
+            </a:r>
+            <a:r>
+              <a:rPr sz="1100" dirty="0" err="1">
+                <a:solidFill>
+                  <a:srgbClr val="E2E8F0"/>
+                </a:solidFill>
+                <a:latin typeface="Courier New"/>
+              </a:rPr>
+              <a:t>isOwner</a:t>
+            </a:r>
+            <a:r>
+              <a:rPr sz="1100" dirty="0">
+                <a:solidFill>
+                  <a:srgbClr val="E2E8F0"/>
+                </a:solidFill>
+                <a:latin typeface="Courier New"/>
+              </a:rPr>
+              <a:t>(</a:t>
+            </a:r>
+            <a:r>
+              <a:rPr sz="1100" dirty="0" err="1">
+                <a:solidFill>
+                  <a:srgbClr val="E2E8F0"/>
+                </a:solidFill>
+                <a:latin typeface="Courier New"/>
+              </a:rPr>
+              <a:t>resource.data.uid</a:t>
+            </a:r>
+            <a:r>
+              <a:rPr sz="1100" dirty="0">
+                <a:solidFill>
+                  <a:srgbClr val="E2E8F0"/>
+                </a:solidFill>
+                <a:latin typeface="Courier New"/>
+              </a:rPr>
+              <a:t>)</a:t>
+            </a:r>
+          </a:p>
+          <a:p>
+            <a:pPr>
+              <a:spcAft>
+                <a:spcPts val="100"/>
+              </a:spcAft>
+            </a:pPr>
+            <a:r>
+              <a:rPr sz="1100" dirty="0">
+                <a:solidFill>
+                  <a:srgbClr val="E2E8F0"/>
+                </a:solidFill>
+                <a:latin typeface="Courier New"/>
+              </a:rPr>
+              <a:t>              &amp;&amp; </a:t>
+            </a:r>
+            <a:r>
+              <a:rPr sz="1100" dirty="0" err="1">
+                <a:solidFill>
+                  <a:srgbClr val="E2E8F0"/>
+                </a:solidFill>
+                <a:latin typeface="Courier New"/>
+              </a:rPr>
+              <a:t>notDeleted</a:t>
+            </a:r>
+            <a:r>
+              <a:rPr sz="1100" dirty="0">
+                <a:solidFill>
+                  <a:srgbClr val="E2E8F0"/>
+                </a:solidFill>
+                <a:latin typeface="Courier New"/>
+              </a:rPr>
+              <a:t>();</a:t>
+            </a:r>
+          </a:p>
+          <a:p>
+            <a:pPr>
+              <a:spcAft>
+                <a:spcPts val="100"/>
+              </a:spcAft>
+            </a:pPr>
+            <a:r>
+              <a:rPr sz="1100" dirty="0">
                 <a:solidFill>
                   <a:srgbClr val="E2E8F0"/>
                 </a:solidFill>
@@ -8260,71 +9681,233 @@
               </a:spcAft>
             </a:pPr>
             <a:r>
-              <a:rPr sz="1100">
-                <a:solidFill>
-                  <a:srgbClr val="E2E8F0"/>
-                </a:solidFill>
-                <a:latin typeface="Courier New"/>
-              </a:rPr>
-              <a:t>  allow create: if isAuthenticated()</a:t>
-            </a:r>
-          </a:p>
-          <a:p>
-            <a:pPr>
-              <a:spcAft>
-                <a:spcPts val="100"/>
-              </a:spcAft>
-            </a:pPr>
-            <a:r>
-              <a:rPr sz="1100">
-                <a:solidFill>
-                  <a:srgbClr val="E2E8F0"/>
-                </a:solidFill>
-                <a:latin typeface="Courier New"/>
-              </a:rPr>
-              <a:t>    &amp;&amp; isOwner(request.resource.data.uid)</a:t>
-            </a:r>
-          </a:p>
-          <a:p>
-            <a:pPr>
-              <a:spcAft>
-                <a:spcPts val="100"/>
-              </a:spcAft>
-            </a:pPr>
-            <a:r>
-              <a:rPr sz="1100">
-                <a:solidFill>
-                  <a:srgbClr val="E2E8F0"/>
-                </a:solidFill>
-                <a:latin typeface="Courier New"/>
-              </a:rPr>
-              <a:t>    &amp;&amp; request.resource.data.keys().hasOnly(</a:t>
-            </a:r>
-          </a:p>
-          <a:p>
-            <a:pPr>
-              <a:spcAft>
-                <a:spcPts val="100"/>
-              </a:spcAft>
-            </a:pPr>
-            <a:r>
-              <a:rPr sz="1100">
-                <a:solidFill>
-                  <a:srgbClr val="E2E8F0"/>
-                </a:solidFill>
-                <a:latin typeface="Courier New"/>
-              </a:rPr>
-              <a:t>         ['uid','title','body','createdAt','updatedAt','_schemaVersion']);</a:t>
-            </a:r>
-          </a:p>
-          <a:p>
-            <a:pPr>
-              <a:spcAft>
-                <a:spcPts val="100"/>
-              </a:spcAft>
-            </a:pPr>
-            <a:r>
-              <a:rPr sz="1100">
+              <a:rPr sz="1100" dirty="0">
+                <a:solidFill>
+                  <a:srgbClr val="E2E8F0"/>
+                </a:solidFill>
+                <a:latin typeface="Courier New"/>
+              </a:rPr>
+              <a:t>  allow create: if </a:t>
+            </a:r>
+            <a:r>
+              <a:rPr sz="1100" dirty="0" err="1">
+                <a:solidFill>
+                  <a:srgbClr val="E2E8F0"/>
+                </a:solidFill>
+                <a:latin typeface="Courier New"/>
+              </a:rPr>
+              <a:t>isAuthenticated</a:t>
+            </a:r>
+            <a:r>
+              <a:rPr sz="1100" dirty="0">
+                <a:solidFill>
+                  <a:srgbClr val="E2E8F0"/>
+                </a:solidFill>
+                <a:latin typeface="Courier New"/>
+              </a:rPr>
+              <a:t>()</a:t>
+            </a:r>
+          </a:p>
+          <a:p>
+            <a:pPr>
+              <a:spcAft>
+                <a:spcPts val="100"/>
+              </a:spcAft>
+            </a:pPr>
+            <a:r>
+              <a:rPr sz="1100" dirty="0">
+                <a:solidFill>
+                  <a:srgbClr val="E2E8F0"/>
+                </a:solidFill>
+                <a:latin typeface="Courier New"/>
+              </a:rPr>
+              <a:t>    &amp;&amp; </a:t>
+            </a:r>
+            <a:r>
+              <a:rPr sz="1100" dirty="0" err="1">
+                <a:solidFill>
+                  <a:srgbClr val="E2E8F0"/>
+                </a:solidFill>
+                <a:latin typeface="Courier New"/>
+              </a:rPr>
+              <a:t>isOwner</a:t>
+            </a:r>
+            <a:r>
+              <a:rPr sz="1100" dirty="0">
+                <a:solidFill>
+                  <a:srgbClr val="E2E8F0"/>
+                </a:solidFill>
+                <a:latin typeface="Courier New"/>
+              </a:rPr>
+              <a:t>(</a:t>
+            </a:r>
+            <a:r>
+              <a:rPr sz="1100" dirty="0" err="1">
+                <a:solidFill>
+                  <a:srgbClr val="E2E8F0"/>
+                </a:solidFill>
+                <a:latin typeface="Courier New"/>
+              </a:rPr>
+              <a:t>request.resource.data.uid</a:t>
+            </a:r>
+            <a:r>
+              <a:rPr sz="1100" dirty="0">
+                <a:solidFill>
+                  <a:srgbClr val="E2E8F0"/>
+                </a:solidFill>
+                <a:latin typeface="Courier New"/>
+              </a:rPr>
+              <a:t>)</a:t>
+            </a:r>
+          </a:p>
+          <a:p>
+            <a:pPr>
+              <a:spcAft>
+                <a:spcPts val="100"/>
+              </a:spcAft>
+            </a:pPr>
+            <a:r>
+              <a:rPr sz="1100" dirty="0">
+                <a:solidFill>
+                  <a:srgbClr val="E2E8F0"/>
+                </a:solidFill>
+                <a:latin typeface="Courier New"/>
+              </a:rPr>
+              <a:t>    &amp;&amp; </a:t>
+            </a:r>
+            <a:r>
+              <a:rPr sz="1100" dirty="0" err="1">
+                <a:solidFill>
+                  <a:srgbClr val="E2E8F0"/>
+                </a:solidFill>
+                <a:latin typeface="Courier New"/>
+              </a:rPr>
+              <a:t>request.resource.data.keys</a:t>
+            </a:r>
+            <a:r>
+              <a:rPr sz="1100" dirty="0">
+                <a:solidFill>
+                  <a:srgbClr val="E2E8F0"/>
+                </a:solidFill>
+                <a:latin typeface="Courier New"/>
+              </a:rPr>
+              <a:t>().</a:t>
+            </a:r>
+            <a:r>
+              <a:rPr sz="1100" dirty="0" err="1">
+                <a:solidFill>
+                  <a:srgbClr val="E2E8F0"/>
+                </a:solidFill>
+                <a:latin typeface="Courier New"/>
+              </a:rPr>
+              <a:t>hasOnly</a:t>
+            </a:r>
+            <a:r>
+              <a:rPr sz="1100" dirty="0">
+                <a:solidFill>
+                  <a:srgbClr val="E2E8F0"/>
+                </a:solidFill>
+                <a:latin typeface="Courier New"/>
+              </a:rPr>
+              <a:t>(</a:t>
+            </a:r>
+          </a:p>
+          <a:p>
+            <a:pPr>
+              <a:spcAft>
+                <a:spcPts val="100"/>
+              </a:spcAft>
+            </a:pPr>
+            <a:r>
+              <a:rPr sz="1100" dirty="0">
+                <a:solidFill>
+                  <a:srgbClr val="E2E8F0"/>
+                </a:solidFill>
+                <a:latin typeface="Courier New"/>
+              </a:rPr>
+              <a:t>         ['</a:t>
+            </a:r>
+            <a:r>
+              <a:rPr sz="1100" dirty="0" err="1">
+                <a:solidFill>
+                  <a:srgbClr val="E2E8F0"/>
+                </a:solidFill>
+                <a:latin typeface="Courier New"/>
+              </a:rPr>
+              <a:t>uid</a:t>
+            </a:r>
+            <a:r>
+              <a:rPr sz="1100" dirty="0">
+                <a:solidFill>
+                  <a:srgbClr val="E2E8F0"/>
+                </a:solidFill>
+                <a:latin typeface="Courier New"/>
+              </a:rPr>
+              <a:t>','title','body','</a:t>
+            </a:r>
+            <a:r>
+              <a:rPr sz="1100" dirty="0" err="1">
+                <a:solidFill>
+                  <a:srgbClr val="E2E8F0"/>
+                </a:solidFill>
+                <a:latin typeface="Courier New"/>
+              </a:rPr>
+              <a:t>createdAt</a:t>
+            </a:r>
+            <a:r>
+              <a:rPr sz="1100" dirty="0">
+                <a:solidFill>
+                  <a:srgbClr val="E2E8F0"/>
+                </a:solidFill>
+                <a:latin typeface="Courier New"/>
+              </a:rPr>
+              <a:t>','</a:t>
+            </a:r>
+            <a:r>
+              <a:rPr sz="1100" dirty="0" err="1">
+                <a:solidFill>
+                  <a:srgbClr val="E2E8F0"/>
+                </a:solidFill>
+                <a:latin typeface="Courier New"/>
+              </a:rPr>
+              <a:t>updatedAt</a:t>
+            </a:r>
+            <a:r>
+              <a:rPr sz="1100" dirty="0">
+                <a:solidFill>
+                  <a:srgbClr val="E2E8F0"/>
+                </a:solidFill>
+                <a:latin typeface="Courier New"/>
+              </a:rPr>
+              <a:t>','_</a:t>
+            </a:r>
+            <a:r>
+              <a:rPr sz="1100" dirty="0" err="1">
+                <a:solidFill>
+                  <a:srgbClr val="E2E8F0"/>
+                </a:solidFill>
+                <a:latin typeface="Courier New"/>
+              </a:rPr>
+              <a:t>schemaVersion</a:t>
+            </a:r>
+            <a:r>
+              <a:rPr sz="1100" dirty="0">
+                <a:solidFill>
+                  <a:srgbClr val="E2E8F0"/>
+                </a:solidFill>
+                <a:latin typeface="Courier New"/>
+              </a:rPr>
+              <a:t>']);</a:t>
+            </a:r>
+          </a:p>
+          <a:p>
+            <a:pPr>
+              <a:spcAft>
+                <a:spcPts val="100"/>
+              </a:spcAft>
+            </a:pPr>
+            <a:r>
+              <a:rPr sz="1100" dirty="0">
                 <a:solidFill>
                   <a:srgbClr val="E2E8F0"/>
                 </a:solidFill>
@@ -8340,55 +9923,199 @@
               </a:spcAft>
             </a:pPr>
             <a:r>
-              <a:rPr sz="1100">
-                <a:solidFill>
-                  <a:srgbClr val="E2E8F0"/>
-                </a:solidFill>
-                <a:latin typeface="Courier New"/>
-              </a:rPr>
-              <a:t>  allow update: if isAuthenticated() &amp;&amp; isOwner(resource.data.uid)</a:t>
-            </a:r>
-          </a:p>
-          <a:p>
-            <a:pPr>
-              <a:spcAft>
-                <a:spcPts val="100"/>
-              </a:spcAft>
-            </a:pPr>
-            <a:r>
-              <a:rPr sz="1100">
-                <a:solidFill>
-                  <a:srgbClr val="E2E8F0"/>
-                </a:solidFill>
-                <a:latin typeface="Courier New"/>
-              </a:rPr>
-              <a:t>    &amp;&amp; request.resource.data.uid == resource.data.uid  // uid immutable</a:t>
-            </a:r>
-          </a:p>
-          <a:p>
-            <a:pPr>
-              <a:spcAft>
-                <a:spcPts val="100"/>
-              </a:spcAft>
-            </a:pPr>
-            <a:r>
-              <a:rPr sz="1100">
-                <a:solidFill>
-                  <a:srgbClr val="E2E8F0"/>
-                </a:solidFill>
-                <a:latin typeface="Courier New"/>
-              </a:rPr>
-              <a:t>    &amp;&amp; request.resource.data.keys().hasOnly([...]);</a:t>
-            </a:r>
-          </a:p>
-          <a:p>
-            <a:pPr>
-              <a:spcAft>
-                <a:spcPts val="100"/>
-              </a:spcAft>
-            </a:pPr>
-            <a:r>
-              <a:rPr sz="1100">
+              <a:rPr sz="1100" dirty="0">
+                <a:solidFill>
+                  <a:srgbClr val="E2E8F0"/>
+                </a:solidFill>
+                <a:latin typeface="Courier New"/>
+              </a:rPr>
+              <a:t>  allow update: if </a:t>
+            </a:r>
+            <a:r>
+              <a:rPr sz="1100" dirty="0" err="1">
+                <a:solidFill>
+                  <a:srgbClr val="E2E8F0"/>
+                </a:solidFill>
+                <a:latin typeface="Courier New"/>
+              </a:rPr>
+              <a:t>isAuthenticated</a:t>
+            </a:r>
+            <a:r>
+              <a:rPr sz="1100" dirty="0">
+                <a:solidFill>
+                  <a:srgbClr val="E2E8F0"/>
+                </a:solidFill>
+                <a:latin typeface="Courier New"/>
+              </a:rPr>
+              <a:t>() &amp;&amp; </a:t>
+            </a:r>
+            <a:r>
+              <a:rPr sz="1100" dirty="0" err="1">
+                <a:solidFill>
+                  <a:srgbClr val="E2E8F0"/>
+                </a:solidFill>
+                <a:latin typeface="Courier New"/>
+              </a:rPr>
+              <a:t>isOwner</a:t>
+            </a:r>
+            <a:r>
+              <a:rPr sz="1100" dirty="0">
+                <a:solidFill>
+                  <a:srgbClr val="E2E8F0"/>
+                </a:solidFill>
+                <a:latin typeface="Courier New"/>
+              </a:rPr>
+              <a:t>(</a:t>
+            </a:r>
+            <a:r>
+              <a:rPr sz="1100" dirty="0" err="1">
+                <a:solidFill>
+                  <a:srgbClr val="E2E8F0"/>
+                </a:solidFill>
+                <a:latin typeface="Courier New"/>
+              </a:rPr>
+              <a:t>resource.data.uid</a:t>
+            </a:r>
+            <a:r>
+              <a:rPr sz="1100" dirty="0">
+                <a:solidFill>
+                  <a:srgbClr val="E2E8F0"/>
+                </a:solidFill>
+                <a:latin typeface="Courier New"/>
+              </a:rPr>
+              <a:t>)</a:t>
+            </a:r>
+          </a:p>
+          <a:p>
+            <a:pPr>
+              <a:spcAft>
+                <a:spcPts val="100"/>
+              </a:spcAft>
+            </a:pPr>
+            <a:r>
+              <a:rPr sz="1100" dirty="0">
+                <a:solidFill>
+                  <a:srgbClr val="E2E8F0"/>
+                </a:solidFill>
+                <a:latin typeface="Courier New"/>
+              </a:rPr>
+              <a:t>    &amp;&amp; </a:t>
+            </a:r>
+            <a:r>
+              <a:rPr sz="1100" dirty="0" err="1">
+                <a:solidFill>
+                  <a:srgbClr val="E2E8F0"/>
+                </a:solidFill>
+                <a:latin typeface="Courier New"/>
+              </a:rPr>
+              <a:t>request.resource.data.uid</a:t>
+            </a:r>
+            <a:r>
+              <a:rPr sz="1100" dirty="0">
+                <a:solidFill>
+                  <a:srgbClr val="E2E8F0"/>
+                </a:solidFill>
+                <a:latin typeface="Courier New"/>
+              </a:rPr>
+              <a:t> == </a:t>
+            </a:r>
+            <a:r>
+              <a:rPr sz="1100" dirty="0" err="1">
+                <a:solidFill>
+                  <a:srgbClr val="E2E8F0"/>
+                </a:solidFill>
+                <a:latin typeface="Courier New"/>
+              </a:rPr>
+              <a:t>resource.data.uid</a:t>
+            </a:r>
+            <a:r>
+              <a:rPr sz="1100" dirty="0">
+                <a:solidFill>
+                  <a:srgbClr val="E2E8F0"/>
+                </a:solidFill>
+                <a:latin typeface="Courier New"/>
+              </a:rPr>
+              <a:t>  // </a:t>
+            </a:r>
+            <a:r>
+              <a:rPr sz="1100" dirty="0" err="1">
+                <a:solidFill>
+                  <a:srgbClr val="E2E8F0"/>
+                </a:solidFill>
+                <a:latin typeface="Courier New"/>
+              </a:rPr>
+              <a:t>uid</a:t>
+            </a:r>
+            <a:r>
+              <a:rPr sz="1100" dirty="0">
+                <a:solidFill>
+                  <a:srgbClr val="E2E8F0"/>
+                </a:solidFill>
+                <a:latin typeface="Courier New"/>
+              </a:rPr>
+              <a:t> immutable</a:t>
+            </a:r>
+          </a:p>
+          <a:p>
+            <a:pPr>
+              <a:spcAft>
+                <a:spcPts val="100"/>
+              </a:spcAft>
+            </a:pPr>
+            <a:r>
+              <a:rPr sz="1100" dirty="0">
+                <a:solidFill>
+                  <a:srgbClr val="E2E8F0"/>
+                </a:solidFill>
+                <a:latin typeface="Courier New"/>
+              </a:rPr>
+              <a:t>    &amp;&amp; </a:t>
+            </a:r>
+            <a:r>
+              <a:rPr sz="1100" dirty="0" err="1">
+                <a:solidFill>
+                  <a:srgbClr val="E2E8F0"/>
+                </a:solidFill>
+                <a:latin typeface="Courier New"/>
+              </a:rPr>
+              <a:t>request.resource.data.keys</a:t>
+            </a:r>
+            <a:r>
+              <a:rPr sz="1100" dirty="0">
+                <a:solidFill>
+                  <a:srgbClr val="E2E8F0"/>
+                </a:solidFill>
+                <a:latin typeface="Courier New"/>
+              </a:rPr>
+              <a:t>().</a:t>
+            </a:r>
+            <a:r>
+              <a:rPr sz="1100" dirty="0" err="1">
+                <a:solidFill>
+                  <a:srgbClr val="E2E8F0"/>
+                </a:solidFill>
+                <a:latin typeface="Courier New"/>
+              </a:rPr>
+              <a:t>hasOnly</a:t>
+            </a:r>
+            <a:r>
+              <a:rPr sz="1100" dirty="0">
+                <a:solidFill>
+                  <a:srgbClr val="E2E8F0"/>
+                </a:solidFill>
+                <a:latin typeface="Courier New"/>
+              </a:rPr>
+              <a:t>([...]);</a:t>
+            </a:r>
+          </a:p>
+          <a:p>
+            <a:pPr>
+              <a:spcAft>
+                <a:spcPts val="100"/>
+              </a:spcAft>
+            </a:pPr>
+            <a:r>
+              <a:rPr sz="1100" dirty="0">
                 <a:solidFill>
                   <a:srgbClr val="E2E8F0"/>
                 </a:solidFill>
@@ -8404,23 +10131,38 @@
               </a:spcAft>
             </a:pPr>
             <a:r>
-              <a:rPr sz="1100">
-                <a:solidFill>
-                  <a:srgbClr val="E2E8F0"/>
-                </a:solidFill>
-                <a:latin typeface="Courier New"/>
-              </a:rPr>
-              <a:t>  allow delete: if false;  // soft-delete only — set deletedAt</a:t>
-            </a:r>
-          </a:p>
-          <a:p>
-            <a:pPr>
-              <a:spcAft>
-                <a:spcPts val="100"/>
-              </a:spcAft>
-            </a:pPr>
-            <a:r>
-              <a:rPr sz="1100">
+              <a:rPr sz="1100" dirty="0">
+                <a:solidFill>
+                  <a:srgbClr val="E2E8F0"/>
+                </a:solidFill>
+                <a:latin typeface="Courier New"/>
+              </a:rPr>
+              <a:t>  allow delete: if false;  // soft-delete only — set </a:t>
+            </a:r>
+            <a:r>
+              <a:rPr sz="1100" dirty="0" err="1">
+                <a:solidFill>
+                  <a:srgbClr val="E2E8F0"/>
+                </a:solidFill>
+                <a:latin typeface="Courier New"/>
+              </a:rPr>
+              <a:t>deletedAt</a:t>
+            </a:r>
+            <a:endParaRPr sz="1100" dirty="0">
+              <a:solidFill>
+                <a:srgbClr val="E2E8F0"/>
+              </a:solidFill>
+              <a:latin typeface="Courier New"/>
+            </a:endParaRPr>
+          </a:p>
+          <a:p>
+            <a:pPr>
+              <a:spcAft>
+                <a:spcPts val="100"/>
+              </a:spcAft>
+            </a:pPr>
+            <a:r>
+              <a:rPr sz="1100" dirty="0">
                 <a:solidFill>
                   <a:srgbClr val="E2E8F0"/>
                 </a:solidFill>
@@ -8578,7 +10320,7 @@
 </file>
 
 <file path=ppt/slides/slide6.xml><?xml version="1.0" encoding="utf-8"?>
-<p:sld xmlns:a="http://schemas.openxmlformats.org/drawingml/2006/main" xmlns:p="http://schemas.openxmlformats.org/presentationml/2006/main" xmlns:r="http://schemas.openxmlformats.org/officeDocument/2006/relationships">
+<p:sld xmlns:a="http://schemas.openxmlformats.org/drawingml/2006/main" xmlns:r="http://schemas.openxmlformats.org/officeDocument/2006/relationships" xmlns:p="http://schemas.openxmlformats.org/presentationml/2006/main">
   <p:cSld>
     <p:bg>
       <p:bgPr>
@@ -8594,7 +10336,14 @@
         <p:cNvGrpSpPr/>
         <p:nvPr/>
       </p:nvGrpSpPr>
-      <p:grpSpPr/>
+      <p:grpSpPr>
+        <a:xfrm>
+          <a:off x="0" y="0"/>
+          <a:ext cx="0" cy="0"/>
+          <a:chOff x="0" y="0"/>
+          <a:chExt cx="0" cy="0"/>
+        </a:xfrm>
+      </p:grpSpPr>
       <p:sp>
         <p:nvSpPr>
           <p:cNvPr id="2" name="Rounded Rectangle 1"/>
@@ -8760,7 +10509,7 @@
           </a:fontRef>
         </p:style>
         <p:txBody>
-          <a:bodyPr rtlCol="0" anchor="t" wrap="none" lIns="228600" rIns="182880" tIns="128016"/>
+          <a:bodyPr wrap="none" lIns="228600" tIns="128016" rIns="182880" rtlCol="0" anchor="t"/>
           <a:lstStyle/>
           <a:p>
             <a:pPr algn="ctr">
@@ -8769,23 +10518,41 @@
               </a:spcAft>
             </a:pPr>
             <a:r>
-              <a:rPr sz="1100" b="1">
+              <a:rPr sz="1100" b="1" dirty="0">
                 <a:solidFill>
                   <a:srgbClr val="F59E0B"/>
                 </a:solidFill>
                 <a:latin typeface="Courier New"/>
               </a:rPr>
-              <a:t>docs/FIRESTORE-SCHEMA.md  (append)</a:t>
-            </a:r>
-          </a:p>
-          <a:p>
-            <a:pPr>
-              <a:spcAft>
-                <a:spcPts val="100"/>
-              </a:spcAft>
-            </a:pPr>
-            <a:r>
-              <a:rPr sz="1200">
+              <a:t>docs/FIRESTORE-</a:t>
+            </a:r>
+            <a:r>
+              <a:rPr sz="1100" b="1" dirty="0" err="1">
+                <a:solidFill>
+                  <a:srgbClr val="F59E0B"/>
+                </a:solidFill>
+                <a:latin typeface="Courier New"/>
+              </a:rPr>
+              <a:t>SCHEMA.md</a:t>
+            </a:r>
+            <a:r>
+              <a:rPr sz="1100" b="1" dirty="0">
+                <a:solidFill>
+                  <a:srgbClr val="F59E0B"/>
+                </a:solidFill>
+                <a:latin typeface="Courier New"/>
+              </a:rPr>
+              <a:t>  (append)</a:t>
+            </a:r>
+          </a:p>
+          <a:p>
+            <a:pPr>
+              <a:spcAft>
+                <a:spcPts val="100"/>
+              </a:spcAft>
+            </a:pPr>
+            <a:r>
+              <a:rPr sz="1200" dirty="0">
                 <a:solidFill>
                   <a:srgbClr val="94A3B8"/>
                 </a:solidFill>
@@ -8801,7 +10568,7 @@
               </a:spcAft>
             </a:pPr>
             <a:r>
-              <a:rPr sz="1200">
+              <a:rPr sz="1200" dirty="0">
                 <a:solidFill>
                   <a:srgbClr val="E2E8F0"/>
                 </a:solidFill>
@@ -8817,23 +10584,41 @@
               </a:spcAft>
             </a:pPr>
             <a:r>
-              <a:rPr sz="1200">
-                <a:solidFill>
-                  <a:srgbClr val="E2E8F0"/>
-                </a:solidFill>
-                <a:latin typeface="Courier New"/>
-              </a:rPr>
-              <a:t>**Path:** /notes/{noteId}   **Access:** owner-only</a:t>
-            </a:r>
-          </a:p>
-          <a:p>
-            <a:pPr>
-              <a:spcAft>
-                <a:spcPts val="100"/>
-              </a:spcAft>
-            </a:pPr>
-            <a:r>
-              <a:rPr sz="1200">
+              <a:rPr sz="1200" dirty="0">
+                <a:solidFill>
+                  <a:srgbClr val="E2E8F0"/>
+                </a:solidFill>
+                <a:latin typeface="Courier New"/>
+              </a:rPr>
+              <a:t>**Path:** /notes/{</a:t>
+            </a:r>
+            <a:r>
+              <a:rPr sz="1200" dirty="0" err="1">
+                <a:solidFill>
+                  <a:srgbClr val="E2E8F0"/>
+                </a:solidFill>
+                <a:latin typeface="Courier New"/>
+              </a:rPr>
+              <a:t>noteId</a:t>
+            </a:r>
+            <a:r>
+              <a:rPr sz="1200" dirty="0">
+                <a:solidFill>
+                  <a:srgbClr val="E2E8F0"/>
+                </a:solidFill>
+                <a:latin typeface="Courier New"/>
+              </a:rPr>
+              <a:t>}   **Access:** owner-only</a:t>
+            </a:r>
+          </a:p>
+          <a:p>
+            <a:pPr>
+              <a:spcAft>
+                <a:spcPts val="100"/>
+              </a:spcAft>
+            </a:pPr>
+            <a:r>
+              <a:rPr sz="1200" dirty="0">
                 <a:solidFill>
                   <a:srgbClr val="E2E8F0"/>
                 </a:solidFill>
@@ -8849,7 +10634,7 @@
               </a:spcAft>
             </a:pPr>
             <a:r>
-              <a:rPr sz="1200">
+              <a:rPr sz="1200" dirty="0">
                 <a:solidFill>
                   <a:srgbClr val="E2E8F0"/>
                 </a:solidFill>
@@ -8865,23 +10650,41 @@
               </a:spcAft>
             </a:pPr>
             <a:r>
-              <a:rPr sz="1200">
-                <a:solidFill>
-                  <a:srgbClr val="E2E8F0"/>
-                </a:solidFill>
-                <a:latin typeface="Courier New"/>
-              </a:rPr>
-              <a:t>| uid            | string    | Owner's Auth UID       |</a:t>
-            </a:r>
-          </a:p>
-          <a:p>
-            <a:pPr>
-              <a:spcAft>
-                <a:spcPts val="100"/>
-              </a:spcAft>
-            </a:pPr>
-            <a:r>
-              <a:rPr sz="1200">
+              <a:rPr sz="1200" dirty="0">
+                <a:solidFill>
+                  <a:srgbClr val="E2E8F0"/>
+                </a:solidFill>
+                <a:latin typeface="Courier New"/>
+              </a:rPr>
+              <a:t>| </a:t>
+            </a:r>
+            <a:r>
+              <a:rPr sz="1200" dirty="0" err="1">
+                <a:solidFill>
+                  <a:srgbClr val="E2E8F0"/>
+                </a:solidFill>
+                <a:latin typeface="Courier New"/>
+              </a:rPr>
+              <a:t>uid</a:t>
+            </a:r>
+            <a:r>
+              <a:rPr sz="1200" dirty="0">
+                <a:solidFill>
+                  <a:srgbClr val="E2E8F0"/>
+                </a:solidFill>
+                <a:latin typeface="Courier New"/>
+              </a:rPr>
+              <a:t>            | string    | Owner's Auth UID       |</a:t>
+            </a:r>
+          </a:p>
+          <a:p>
+            <a:pPr>
+              <a:spcAft>
+                <a:spcPts val="100"/>
+              </a:spcAft>
+            </a:pPr>
+            <a:r>
+              <a:rPr sz="1200" dirty="0">
                 <a:solidFill>
                   <a:srgbClr val="E2E8F0"/>
                 </a:solidFill>
@@ -8897,7 +10700,7 @@
               </a:spcAft>
             </a:pPr>
             <a:r>
-              <a:rPr sz="1200">
+              <a:rPr sz="1200" dirty="0">
                 <a:solidFill>
                   <a:srgbClr val="E2E8F0"/>
                 </a:solidFill>
@@ -8913,13 +10716,31 @@
               </a:spcAft>
             </a:pPr>
             <a:r>
-              <a:rPr sz="1200">
-                <a:solidFill>
-                  <a:srgbClr val="E2E8F0"/>
-                </a:solidFill>
-                <a:latin typeface="Courier New"/>
-              </a:rPr>
-              <a:t>| _schemaVersion | 1         | for lazy migration     |</a:t>
+              <a:rPr sz="1200" dirty="0">
+                <a:solidFill>
+                  <a:srgbClr val="E2E8F0"/>
+                </a:solidFill>
+                <a:latin typeface="Courier New"/>
+              </a:rPr>
+              <a:t>| _</a:t>
+            </a:r>
+            <a:r>
+              <a:rPr sz="1200" dirty="0" err="1">
+                <a:solidFill>
+                  <a:srgbClr val="E2E8F0"/>
+                </a:solidFill>
+                <a:latin typeface="Courier New"/>
+              </a:rPr>
+              <a:t>schemaVersion</a:t>
+            </a:r>
+            <a:r>
+              <a:rPr sz="1200" dirty="0">
+                <a:solidFill>
+                  <a:srgbClr val="E2E8F0"/>
+                </a:solidFill>
+                <a:latin typeface="Courier New"/>
+              </a:rPr>
+              <a:t> | 1         | for lazy migration     |</a:t>
             </a:r>
           </a:p>
         </p:txBody>
@@ -8971,7 +10792,7 @@
 </file>
 
 <file path=ppt/slides/slide7.xml><?xml version="1.0" encoding="utf-8"?>
-<p:sld xmlns:a="http://schemas.openxmlformats.org/drawingml/2006/main" xmlns:p="http://schemas.openxmlformats.org/presentationml/2006/main" xmlns:r="http://schemas.openxmlformats.org/officeDocument/2006/relationships">
+<p:sld xmlns:a="http://schemas.openxmlformats.org/drawingml/2006/main" xmlns:r="http://schemas.openxmlformats.org/officeDocument/2006/relationships" xmlns:p="http://schemas.openxmlformats.org/presentationml/2006/main">
   <p:cSld>
     <p:bg>
       <p:bgPr>
@@ -8987,7 +10808,14 @@
         <p:cNvGrpSpPr/>
         <p:nvPr/>
       </p:nvGrpSpPr>
-      <p:grpSpPr/>
+      <p:grpSpPr>
+        <a:xfrm>
+          <a:off x="0" y="0"/>
+          <a:ext cx="0" cy="0"/>
+          <a:chOff x="0" y="0"/>
+          <a:chExt cx="0" cy="0"/>
+        </a:xfrm>
+      </p:grpSpPr>
       <p:sp>
         <p:nvSpPr>
           <p:cNvPr id="2" name="Rounded Rectangle 1"/>
@@ -9153,7 +10981,7 @@
           </a:fontRef>
         </p:style>
         <p:txBody>
-          <a:bodyPr rtlCol="0" anchor="t" wrap="none" lIns="228600" rIns="182880" tIns="128016"/>
+          <a:bodyPr wrap="none" lIns="228600" tIns="128016" rIns="182880" rtlCol="0" anchor="t"/>
           <a:lstStyle/>
           <a:p>
             <a:pPr algn="ctr">
@@ -9162,23 +10990,59 @@
               </a:spcAft>
             </a:pPr>
             <a:r>
-              <a:rPr sz="1000" b="1">
+              <a:rPr sz="1000" b="1" dirty="0">
                 <a:solidFill>
                   <a:srgbClr val="F59E0B"/>
                 </a:solidFill>
                 <a:latin typeface="Courier New"/>
               </a:rPr>
-              <a:t>frontend/src/features/notes/actions/notes.actions.ts  (new)</a:t>
-            </a:r>
-          </a:p>
-          <a:p>
-            <a:pPr>
-              <a:spcAft>
-                <a:spcPts val="100"/>
-              </a:spcAft>
-            </a:pPr>
-            <a:r>
-              <a:rPr sz="1100">
+              <a:t>frontend/</a:t>
+            </a:r>
+            <a:r>
+              <a:rPr sz="1000" b="1" dirty="0" err="1">
+                <a:solidFill>
+                  <a:srgbClr val="F59E0B"/>
+                </a:solidFill>
+                <a:latin typeface="Courier New"/>
+              </a:rPr>
+              <a:t>src</a:t>
+            </a:r>
+            <a:r>
+              <a:rPr sz="1000" b="1" dirty="0">
+                <a:solidFill>
+                  <a:srgbClr val="F59E0B"/>
+                </a:solidFill>
+                <a:latin typeface="Courier New"/>
+              </a:rPr>
+              <a:t>/features/notes/actions/</a:t>
+            </a:r>
+            <a:r>
+              <a:rPr sz="1000" b="1" dirty="0" err="1">
+                <a:solidFill>
+                  <a:srgbClr val="F59E0B"/>
+                </a:solidFill>
+                <a:latin typeface="Courier New"/>
+              </a:rPr>
+              <a:t>notes.actions.ts</a:t>
+            </a:r>
+            <a:r>
+              <a:rPr sz="1000" b="1" dirty="0">
+                <a:solidFill>
+                  <a:srgbClr val="F59E0B"/>
+                </a:solidFill>
+                <a:latin typeface="Courier New"/>
+              </a:rPr>
+              <a:t>  (new)</a:t>
+            </a:r>
+          </a:p>
+          <a:p>
+            <a:pPr>
+              <a:spcAft>
+                <a:spcPts val="100"/>
+              </a:spcAft>
+            </a:pPr>
+            <a:r>
+              <a:rPr sz="1100" dirty="0">
                 <a:solidFill>
                   <a:srgbClr val="E2E8F0"/>
                 </a:solidFill>
@@ -9194,7 +11058,7 @@
               </a:spcAft>
             </a:pPr>
             <a:r>
-              <a:rPr sz="1100">
+              <a:rPr sz="1100" dirty="0">
                 <a:solidFill>
                   <a:srgbClr val="E2E8F0"/>
                 </a:solidFill>
@@ -9210,55 +11074,127 @@
               </a:spcAft>
             </a:pPr>
             <a:r>
-              <a:rPr sz="1100">
-                <a:solidFill>
-                  <a:srgbClr val="E2E8F0"/>
-                </a:solidFill>
-                <a:latin typeface="Courier New"/>
-              </a:rPr>
-              <a:t>const createNoteSchema = z.object({</a:t>
-            </a:r>
-          </a:p>
-          <a:p>
-            <a:pPr>
-              <a:spcAft>
-                <a:spcPts val="100"/>
-              </a:spcAft>
-            </a:pPr>
-            <a:r>
-              <a:rPr sz="1100">
-                <a:solidFill>
-                  <a:srgbClr val="E2E8F0"/>
-                </a:solidFill>
-                <a:latin typeface="Courier New"/>
-              </a:rPr>
-              <a:t>  title: z.string().min(1).max(200),</a:t>
-            </a:r>
-          </a:p>
-          <a:p>
-            <a:pPr>
-              <a:spcAft>
-                <a:spcPts val="100"/>
-              </a:spcAft>
-            </a:pPr>
-            <a:r>
-              <a:rPr sz="1100">
-                <a:solidFill>
-                  <a:srgbClr val="E2E8F0"/>
-                </a:solidFill>
-                <a:latin typeface="Courier New"/>
-              </a:rPr>
-              <a:t>  body: z.string().max(10_000),</a:t>
-            </a:r>
-          </a:p>
-          <a:p>
-            <a:pPr>
-              <a:spcAft>
-                <a:spcPts val="100"/>
-              </a:spcAft>
-            </a:pPr>
-            <a:r>
-              <a:rPr sz="1100">
+              <a:rPr sz="1100" dirty="0">
+                <a:solidFill>
+                  <a:srgbClr val="E2E8F0"/>
+                </a:solidFill>
+                <a:latin typeface="Courier New"/>
+              </a:rPr>
+              <a:t>const </a:t>
+            </a:r>
+            <a:r>
+              <a:rPr sz="1100" dirty="0" err="1">
+                <a:solidFill>
+                  <a:srgbClr val="E2E8F0"/>
+                </a:solidFill>
+                <a:latin typeface="Courier New"/>
+              </a:rPr>
+              <a:t>createNoteSchema</a:t>
+            </a:r>
+            <a:r>
+              <a:rPr sz="1100" dirty="0">
+                <a:solidFill>
+                  <a:srgbClr val="E2E8F0"/>
+                </a:solidFill>
+                <a:latin typeface="Courier New"/>
+              </a:rPr>
+              <a:t> = </a:t>
+            </a:r>
+            <a:r>
+              <a:rPr sz="1100" dirty="0" err="1">
+                <a:solidFill>
+                  <a:srgbClr val="E2E8F0"/>
+                </a:solidFill>
+                <a:latin typeface="Courier New"/>
+              </a:rPr>
+              <a:t>z.object</a:t>
+            </a:r>
+            <a:r>
+              <a:rPr sz="1100" dirty="0">
+                <a:solidFill>
+                  <a:srgbClr val="E2E8F0"/>
+                </a:solidFill>
+                <a:latin typeface="Courier New"/>
+              </a:rPr>
+              <a:t>({</a:t>
+            </a:r>
+          </a:p>
+          <a:p>
+            <a:pPr>
+              <a:spcAft>
+                <a:spcPts val="100"/>
+              </a:spcAft>
+            </a:pPr>
+            <a:r>
+              <a:rPr sz="1100" dirty="0">
+                <a:solidFill>
+                  <a:srgbClr val="E2E8F0"/>
+                </a:solidFill>
+                <a:latin typeface="Courier New"/>
+              </a:rPr>
+              <a:t>  title: </a:t>
+            </a:r>
+            <a:r>
+              <a:rPr sz="1100" dirty="0" err="1">
+                <a:solidFill>
+                  <a:srgbClr val="E2E8F0"/>
+                </a:solidFill>
+                <a:latin typeface="Courier New"/>
+              </a:rPr>
+              <a:t>z.string</a:t>
+            </a:r>
+            <a:r>
+              <a:rPr sz="1100" dirty="0">
+                <a:solidFill>
+                  <a:srgbClr val="E2E8F0"/>
+                </a:solidFill>
+                <a:latin typeface="Courier New"/>
+              </a:rPr>
+              <a:t>().min(1).max(200),</a:t>
+            </a:r>
+          </a:p>
+          <a:p>
+            <a:pPr>
+              <a:spcAft>
+                <a:spcPts val="100"/>
+              </a:spcAft>
+            </a:pPr>
+            <a:r>
+              <a:rPr sz="1100" dirty="0">
+                <a:solidFill>
+                  <a:srgbClr val="E2E8F0"/>
+                </a:solidFill>
+                <a:latin typeface="Courier New"/>
+              </a:rPr>
+              <a:t>  body: </a:t>
+            </a:r>
+            <a:r>
+              <a:rPr sz="1100" dirty="0" err="1">
+                <a:solidFill>
+                  <a:srgbClr val="E2E8F0"/>
+                </a:solidFill>
+                <a:latin typeface="Courier New"/>
+              </a:rPr>
+              <a:t>z.string</a:t>
+            </a:r>
+            <a:r>
+              <a:rPr sz="1100" dirty="0">
+                <a:solidFill>
+                  <a:srgbClr val="E2E8F0"/>
+                </a:solidFill>
+                <a:latin typeface="Courier New"/>
+              </a:rPr>
+              <a:t>().max(10_000),</a:t>
+            </a:r>
+          </a:p>
+          <a:p>
+            <a:pPr>
+              <a:spcAft>
+                <a:spcPts val="100"/>
+              </a:spcAft>
+            </a:pPr>
+            <a:r>
+              <a:rPr sz="1100" dirty="0">
                 <a:solidFill>
                   <a:srgbClr val="E2E8F0"/>
                 </a:solidFill>
@@ -9274,7 +11210,7 @@
               </a:spcAft>
             </a:pPr>
             <a:r>
-              <a:rPr sz="1100">
+              <a:rPr sz="1100" dirty="0">
                 <a:solidFill>
                   <a:srgbClr val="E2E8F0"/>
                 </a:solidFill>
@@ -9290,55 +11226,109 @@
               </a:spcAft>
             </a:pPr>
             <a:r>
-              <a:rPr sz="1100">
-                <a:solidFill>
-                  <a:srgbClr val="E2E8F0"/>
-                </a:solidFill>
-                <a:latin typeface="Courier New"/>
-              </a:rPr>
-              <a:t>export async function createNote(input: unknown):</a:t>
-            </a:r>
-          </a:p>
-          <a:p>
-            <a:pPr>
-              <a:spcAft>
-                <a:spcPts val="100"/>
-              </a:spcAft>
-            </a:pPr>
-            <a:r>
-              <a:rPr sz="1100">
-                <a:solidFill>
-                  <a:srgbClr val="E2E8F0"/>
-                </a:solidFill>
-                <a:latin typeface="Courier New"/>
-              </a:rPr>
-              <a:t>    Promise&lt;ActionResult&lt;string&gt;&gt; {</a:t>
-            </a:r>
-          </a:p>
-          <a:p>
-            <a:pPr>
-              <a:spcAft>
-                <a:spcPts val="100"/>
-              </a:spcAft>
-            </a:pPr>
-            <a:r>
-              <a:rPr sz="1100">
-                <a:solidFill>
-                  <a:srgbClr val="E2E8F0"/>
-                </a:solidFill>
-                <a:latin typeface="Courier New"/>
-              </a:rPr>
-              <a:t>  const session = await requireAuth()              // beat 1: who?</a:t>
-            </a:r>
-          </a:p>
-          <a:p>
-            <a:pPr>
-              <a:spcAft>
-                <a:spcPts val="100"/>
-              </a:spcAft>
-            </a:pPr>
-            <a:r>
-              <a:rPr sz="1100">
+              <a:rPr sz="1100" dirty="0">
+                <a:solidFill>
+                  <a:srgbClr val="E2E8F0"/>
+                </a:solidFill>
+                <a:latin typeface="Courier New"/>
+              </a:rPr>
+              <a:t>export async function </a:t>
+            </a:r>
+            <a:r>
+              <a:rPr sz="1100" dirty="0" err="1">
+                <a:solidFill>
+                  <a:srgbClr val="E2E8F0"/>
+                </a:solidFill>
+                <a:latin typeface="Courier New"/>
+              </a:rPr>
+              <a:t>createNote</a:t>
+            </a:r>
+            <a:r>
+              <a:rPr sz="1100" dirty="0">
+                <a:solidFill>
+                  <a:srgbClr val="E2E8F0"/>
+                </a:solidFill>
+                <a:latin typeface="Courier New"/>
+              </a:rPr>
+              <a:t>(input: unknown):</a:t>
+            </a:r>
+          </a:p>
+          <a:p>
+            <a:pPr>
+              <a:spcAft>
+                <a:spcPts val="100"/>
+              </a:spcAft>
+            </a:pPr>
+            <a:r>
+              <a:rPr sz="1100" dirty="0">
+                <a:solidFill>
+                  <a:srgbClr val="E2E8F0"/>
+                </a:solidFill>
+                <a:latin typeface="Courier New"/>
+              </a:rPr>
+              <a:t>    Promise&lt;</a:t>
+            </a:r>
+            <a:r>
+              <a:rPr sz="1100" dirty="0" err="1">
+                <a:solidFill>
+                  <a:srgbClr val="E2E8F0"/>
+                </a:solidFill>
+                <a:latin typeface="Courier New"/>
+              </a:rPr>
+              <a:t>ActionResult</a:t>
+            </a:r>
+            <a:r>
+              <a:rPr sz="1100" dirty="0">
+                <a:solidFill>
+                  <a:srgbClr val="E2E8F0"/>
+                </a:solidFill>
+                <a:latin typeface="Courier New"/>
+              </a:rPr>
+              <a:t>&lt;string&gt;&gt; {</a:t>
+            </a:r>
+          </a:p>
+          <a:p>
+            <a:pPr>
+              <a:spcAft>
+                <a:spcPts val="100"/>
+              </a:spcAft>
+            </a:pPr>
+            <a:r>
+              <a:rPr sz="1100" dirty="0">
+                <a:solidFill>
+                  <a:srgbClr val="E2E8F0"/>
+                </a:solidFill>
+                <a:latin typeface="Courier New"/>
+              </a:rPr>
+              <a:t>  const session = await </a:t>
+            </a:r>
+            <a:r>
+              <a:rPr sz="1100" dirty="0" err="1">
+                <a:solidFill>
+                  <a:srgbClr val="E2E8F0"/>
+                </a:solidFill>
+                <a:latin typeface="Courier New"/>
+              </a:rPr>
+              <a:t>requireAuth</a:t>
+            </a:r>
+            <a:r>
+              <a:rPr sz="1100" dirty="0">
+                <a:solidFill>
+                  <a:srgbClr val="E2E8F0"/>
+                </a:solidFill>
+                <a:latin typeface="Courier New"/>
+              </a:rPr>
+              <a:t>()              // beat 1: who?</a:t>
+            </a:r>
+          </a:p>
+          <a:p>
+            <a:pPr>
+              <a:spcAft>
+                <a:spcPts val="100"/>
+              </a:spcAft>
+            </a:pPr>
+            <a:r>
+              <a:rPr sz="1100" dirty="0">
                 <a:solidFill>
                   <a:srgbClr val="E2E8F0"/>
                 </a:solidFill>
@@ -9354,39 +11344,75 @@
               </a:spcAft>
             </a:pPr>
             <a:r>
-              <a:rPr sz="1100">
-                <a:solidFill>
-                  <a:srgbClr val="E2E8F0"/>
-                </a:solidFill>
-                <a:latin typeface="Courier New"/>
-              </a:rPr>
-              <a:t>  const parsed = createNoteSchema.safeParse(input) // beat 2: sane?</a:t>
-            </a:r>
-          </a:p>
-          <a:p>
-            <a:pPr>
-              <a:spcAft>
-                <a:spcPts val="100"/>
-              </a:spcAft>
-            </a:pPr>
-            <a:r>
-              <a:rPr sz="1100">
-                <a:solidFill>
-                  <a:srgbClr val="E2E8F0"/>
-                </a:solidFill>
-                <a:latin typeface="Courier New"/>
-              </a:rPr>
-              <a:t>  if (!parsed.success)</a:t>
-            </a:r>
-          </a:p>
-          <a:p>
-            <a:pPr>
-              <a:spcAft>
-                <a:spcPts val="100"/>
-              </a:spcAft>
-            </a:pPr>
-            <a:r>
-              <a:rPr sz="1100">
+              <a:rPr sz="1100" dirty="0">
+                <a:solidFill>
+                  <a:srgbClr val="E2E8F0"/>
+                </a:solidFill>
+                <a:latin typeface="Courier New"/>
+              </a:rPr>
+              <a:t>  const parsed = </a:t>
+            </a:r>
+            <a:r>
+              <a:rPr sz="1100" dirty="0" err="1">
+                <a:solidFill>
+                  <a:srgbClr val="E2E8F0"/>
+                </a:solidFill>
+                <a:latin typeface="Courier New"/>
+              </a:rPr>
+              <a:t>createNoteSchema.safeParse</a:t>
+            </a:r>
+            <a:r>
+              <a:rPr sz="1100" dirty="0">
+                <a:solidFill>
+                  <a:srgbClr val="E2E8F0"/>
+                </a:solidFill>
+                <a:latin typeface="Courier New"/>
+              </a:rPr>
+              <a:t>(input) // beat 2: sane?</a:t>
+            </a:r>
+          </a:p>
+          <a:p>
+            <a:pPr>
+              <a:spcAft>
+                <a:spcPts val="100"/>
+              </a:spcAft>
+            </a:pPr>
+            <a:r>
+              <a:rPr sz="1100" dirty="0">
+                <a:solidFill>
+                  <a:srgbClr val="E2E8F0"/>
+                </a:solidFill>
+                <a:latin typeface="Courier New"/>
+              </a:rPr>
+              <a:t>  if (!</a:t>
+            </a:r>
+            <a:r>
+              <a:rPr sz="1100" dirty="0" err="1">
+                <a:solidFill>
+                  <a:srgbClr val="E2E8F0"/>
+                </a:solidFill>
+                <a:latin typeface="Courier New"/>
+              </a:rPr>
+              <a:t>parsed.success</a:t>
+            </a:r>
+            <a:r>
+              <a:rPr sz="1100" dirty="0">
+                <a:solidFill>
+                  <a:srgbClr val="E2E8F0"/>
+                </a:solidFill>
+                <a:latin typeface="Courier New"/>
+              </a:rPr>
+              <a:t>)</a:t>
+            </a:r>
+          </a:p>
+          <a:p>
+            <a:pPr>
+              <a:spcAft>
+                <a:spcPts val="100"/>
+              </a:spcAft>
+            </a:pPr>
+            <a:r>
+              <a:rPr sz="1100" dirty="0">
                 <a:solidFill>
                   <a:srgbClr val="E2E8F0"/>
                 </a:solidFill>
@@ -9402,7 +11428,7 @@
               </a:spcAft>
             </a:pPr>
             <a:r>
-              <a:rPr sz="1100">
+              <a:rPr sz="1100" dirty="0">
                 <a:solidFill>
                   <a:srgbClr val="E2E8F0"/>
                 </a:solidFill>
@@ -9418,55 +11444,181 @@
               </a:spcAft>
             </a:pPr>
             <a:r>
-              <a:rPr sz="1100">
-                <a:solidFill>
-                  <a:srgbClr val="E2E8F0"/>
-                </a:solidFill>
-                <a:latin typeface="Courier New"/>
-              </a:rPr>
-              <a:t>  const ref = await adminDb.collection('notes').add({  // beat 3</a:t>
-            </a:r>
-          </a:p>
-          <a:p>
-            <a:pPr>
-              <a:spcAft>
-                <a:spcPts val="100"/>
-              </a:spcAft>
-            </a:pPr>
-            <a:r>
-              <a:rPr sz="1100">
-                <a:solidFill>
-                  <a:srgbClr val="E2E8F0"/>
-                </a:solidFill>
-                <a:latin typeface="Courier New"/>
-              </a:rPr>
-              <a:t>    ...parsed.data, uid: session.uid,</a:t>
-            </a:r>
-          </a:p>
-          <a:p>
-            <a:pPr>
-              <a:spcAft>
-                <a:spcPts val="100"/>
-              </a:spcAft>
-            </a:pPr>
-            <a:r>
-              <a:rPr sz="1100">
-                <a:solidFill>
-                  <a:srgbClr val="E2E8F0"/>
-                </a:solidFill>
-                <a:latin typeface="Courier New"/>
-              </a:rPr>
-              <a:t>    createdAt: now, updatedAt: now, _schemaVersion: 1,</a:t>
-            </a:r>
-          </a:p>
-          <a:p>
-            <a:pPr>
-              <a:spcAft>
-                <a:spcPts val="100"/>
-              </a:spcAft>
-            </a:pPr>
-            <a:r>
-              <a:rPr sz="1100">
+              <a:rPr sz="1100" dirty="0">
+                <a:solidFill>
+                  <a:srgbClr val="E2E8F0"/>
+                </a:solidFill>
+                <a:latin typeface="Courier New"/>
+              </a:rPr>
+              <a:t>  const ref = await </a:t>
+            </a:r>
+            <a:r>
+              <a:rPr sz="1100" dirty="0" err="1">
+                <a:solidFill>
+                  <a:srgbClr val="E2E8F0"/>
+                </a:solidFill>
+                <a:latin typeface="Courier New"/>
+              </a:rPr>
+              <a:t>adminDb.collection</a:t>
+            </a:r>
+            <a:r>
+              <a:rPr sz="1100" dirty="0">
+                <a:solidFill>
+                  <a:srgbClr val="E2E8F0"/>
+                </a:solidFill>
+                <a:latin typeface="Courier New"/>
+              </a:rPr>
+              <a:t>('notes').add({  // beat 3</a:t>
+            </a:r>
+          </a:p>
+          <a:p>
+            <a:pPr>
+              <a:spcAft>
+                <a:spcPts val="100"/>
+              </a:spcAft>
+            </a:pPr>
+            <a:r>
+              <a:rPr sz="1100" dirty="0">
+                <a:solidFill>
+                  <a:srgbClr val="E2E8F0"/>
+                </a:solidFill>
+                <a:latin typeface="Courier New"/>
+              </a:rPr>
+              <a:t>    ...</a:t>
+            </a:r>
+            <a:r>
+              <a:rPr sz="1100" dirty="0" err="1">
+                <a:solidFill>
+                  <a:srgbClr val="E2E8F0"/>
+                </a:solidFill>
+                <a:latin typeface="Courier New"/>
+              </a:rPr>
+              <a:t>parsed.data</a:t>
+            </a:r>
+            <a:r>
+              <a:rPr sz="1100" dirty="0">
+                <a:solidFill>
+                  <a:srgbClr val="E2E8F0"/>
+                </a:solidFill>
+                <a:latin typeface="Courier New"/>
+              </a:rPr>
+              <a:t>, </a:t>
+            </a:r>
+            <a:r>
+              <a:rPr sz="1100" dirty="0" err="1">
+                <a:solidFill>
+                  <a:srgbClr val="E2E8F0"/>
+                </a:solidFill>
+                <a:latin typeface="Courier New"/>
+              </a:rPr>
+              <a:t>uid</a:t>
+            </a:r>
+            <a:r>
+              <a:rPr sz="1100" dirty="0">
+                <a:solidFill>
+                  <a:srgbClr val="E2E8F0"/>
+                </a:solidFill>
+                <a:latin typeface="Courier New"/>
+              </a:rPr>
+              <a:t>: </a:t>
+            </a:r>
+            <a:r>
+              <a:rPr sz="1100" dirty="0" err="1">
+                <a:solidFill>
+                  <a:srgbClr val="E2E8F0"/>
+                </a:solidFill>
+                <a:latin typeface="Courier New"/>
+              </a:rPr>
+              <a:t>session.uid</a:t>
+            </a:r>
+            <a:r>
+              <a:rPr sz="1100" dirty="0">
+                <a:solidFill>
+                  <a:srgbClr val="E2E8F0"/>
+                </a:solidFill>
+                <a:latin typeface="Courier New"/>
+              </a:rPr>
+              <a:t>,</a:t>
+            </a:r>
+          </a:p>
+          <a:p>
+            <a:pPr>
+              <a:spcAft>
+                <a:spcPts val="100"/>
+              </a:spcAft>
+            </a:pPr>
+            <a:r>
+              <a:rPr sz="1100" dirty="0">
+                <a:solidFill>
+                  <a:srgbClr val="E2E8F0"/>
+                </a:solidFill>
+                <a:latin typeface="Courier New"/>
+              </a:rPr>
+              <a:t>    </a:t>
+            </a:r>
+            <a:r>
+              <a:rPr sz="1100" dirty="0" err="1">
+                <a:solidFill>
+                  <a:srgbClr val="E2E8F0"/>
+                </a:solidFill>
+                <a:latin typeface="Courier New"/>
+              </a:rPr>
+              <a:t>createdAt</a:t>
+            </a:r>
+            <a:r>
+              <a:rPr sz="1100" dirty="0">
+                <a:solidFill>
+                  <a:srgbClr val="E2E8F0"/>
+                </a:solidFill>
+                <a:latin typeface="Courier New"/>
+              </a:rPr>
+              <a:t>: now, </a:t>
+            </a:r>
+            <a:r>
+              <a:rPr sz="1100" dirty="0" err="1">
+                <a:solidFill>
+                  <a:srgbClr val="E2E8F0"/>
+                </a:solidFill>
+                <a:latin typeface="Courier New"/>
+              </a:rPr>
+              <a:t>updatedAt</a:t>
+            </a:r>
+            <a:r>
+              <a:rPr sz="1100" dirty="0">
+                <a:solidFill>
+                  <a:srgbClr val="E2E8F0"/>
+                </a:solidFill>
+                <a:latin typeface="Courier New"/>
+              </a:rPr>
+              <a:t>: now, _</a:t>
+            </a:r>
+            <a:r>
+              <a:rPr sz="1100" dirty="0" err="1">
+                <a:solidFill>
+                  <a:srgbClr val="E2E8F0"/>
+                </a:solidFill>
+                <a:latin typeface="Courier New"/>
+              </a:rPr>
+              <a:t>schemaVersion</a:t>
+            </a:r>
+            <a:r>
+              <a:rPr sz="1100" dirty="0">
+                <a:solidFill>
+                  <a:srgbClr val="E2E8F0"/>
+                </a:solidFill>
+                <a:latin typeface="Courier New"/>
+              </a:rPr>
+              <a:t>: 1,</a:t>
+            </a:r>
+          </a:p>
+          <a:p>
+            <a:pPr>
+              <a:spcAft>
+                <a:spcPts val="100"/>
+              </a:spcAft>
+            </a:pPr>
+            <a:r>
+              <a:rPr sz="1100" dirty="0">
                 <a:solidFill>
                   <a:srgbClr val="E2E8F0"/>
                 </a:solidFill>
@@ -9482,23 +11634,41 @@
               </a:spcAft>
             </a:pPr>
             <a:r>
-              <a:rPr sz="1100">
-                <a:solidFill>
-                  <a:srgbClr val="E2E8F0"/>
-                </a:solidFill>
-                <a:latin typeface="Courier New"/>
-              </a:rPr>
-              <a:t>  return { success: true, data: ref.id }</a:t>
-            </a:r>
-          </a:p>
-          <a:p>
-            <a:pPr>
-              <a:spcAft>
-                <a:spcPts val="100"/>
-              </a:spcAft>
-            </a:pPr>
-            <a:r>
-              <a:rPr sz="1100">
+              <a:rPr sz="1100" dirty="0">
+                <a:solidFill>
+                  <a:srgbClr val="E2E8F0"/>
+                </a:solidFill>
+                <a:latin typeface="Courier New"/>
+              </a:rPr>
+              <a:t>  return { success: true, data: </a:t>
+            </a:r>
+            <a:r>
+              <a:rPr sz="1100" dirty="0" err="1">
+                <a:solidFill>
+                  <a:srgbClr val="E2E8F0"/>
+                </a:solidFill>
+                <a:latin typeface="Courier New"/>
+              </a:rPr>
+              <a:t>ref.id</a:t>
+            </a:r>
+            <a:r>
+              <a:rPr sz="1100" dirty="0">
+                <a:solidFill>
+                  <a:srgbClr val="E2E8F0"/>
+                </a:solidFill>
+                <a:latin typeface="Courier New"/>
+              </a:rPr>
+              <a:t> }</a:t>
+            </a:r>
+          </a:p>
+          <a:p>
+            <a:pPr>
+              <a:spcAft>
+                <a:spcPts val="100"/>
+              </a:spcAft>
+            </a:pPr>
+            <a:r>
+              <a:rPr sz="1100" dirty="0">
                 <a:solidFill>
                   <a:srgbClr val="E2E8F0"/>
                 </a:solidFill>
@@ -9610,7 +11780,7 @@
 </file>
 
 <file path=ppt/slides/slide8.xml><?xml version="1.0" encoding="utf-8"?>
-<p:sld xmlns:a="http://schemas.openxmlformats.org/drawingml/2006/main" xmlns:p="http://schemas.openxmlformats.org/presentationml/2006/main" xmlns:r="http://schemas.openxmlformats.org/officeDocument/2006/relationships">
+<p:sld xmlns:a="http://schemas.openxmlformats.org/drawingml/2006/main" xmlns:r="http://schemas.openxmlformats.org/officeDocument/2006/relationships" xmlns:p="http://schemas.openxmlformats.org/presentationml/2006/main">
   <p:cSld>
     <p:spTree>
       <p:nvGrpSpPr>
@@ -9618,7 +11788,14 @@
         <p:cNvGrpSpPr/>
         <p:nvPr/>
       </p:nvGrpSpPr>
-      <p:grpSpPr/>
+      <p:grpSpPr>
+        <a:xfrm>
+          <a:off x="0" y="0"/>
+          <a:ext cx="0" cy="0"/>
+          <a:chOff x="0" y="0"/>
+          <a:chExt cx="0" cy="0"/>
+        </a:xfrm>
+      </p:grpSpPr>
       <p:sp>
         <p:nvSpPr>
           <p:cNvPr id="2" name="Rounded Rectangle 1"/>
@@ -9784,7 +11961,7 @@
           </a:fontRef>
         </p:style>
         <p:txBody>
-          <a:bodyPr rtlCol="0" anchor="t" wrap="none" lIns="228600" rIns="182880" tIns="128016"/>
+          <a:bodyPr wrap="none" lIns="228600" tIns="128016" rIns="182880" rtlCol="0" anchor="t"/>
           <a:lstStyle/>
           <a:p>
             <a:pPr algn="ctr">
@@ -9793,23 +11970,59 @@
               </a:spcAft>
             </a:pPr>
             <a:r>
-              <a:rPr sz="1000" b="1">
+              <a:rPr sz="1000" b="1" dirty="0">
                 <a:solidFill>
                   <a:srgbClr val="F59E0B"/>
                 </a:solidFill>
                 <a:latin typeface="Courier New"/>
               </a:rPr>
-              <a:t>frontend/src/features/notes/components/CreateNoteForm.tsx  (new)</a:t>
-            </a:r>
-          </a:p>
-          <a:p>
-            <a:pPr>
-              <a:spcAft>
-                <a:spcPts val="100"/>
-              </a:spcAft>
-            </a:pPr>
-            <a:r>
-              <a:rPr sz="1100">
+              <a:t>frontend/</a:t>
+            </a:r>
+            <a:r>
+              <a:rPr sz="1000" b="1" dirty="0" err="1">
+                <a:solidFill>
+                  <a:srgbClr val="F59E0B"/>
+                </a:solidFill>
+                <a:latin typeface="Courier New"/>
+              </a:rPr>
+              <a:t>src</a:t>
+            </a:r>
+            <a:r>
+              <a:rPr sz="1000" b="1" dirty="0">
+                <a:solidFill>
+                  <a:srgbClr val="F59E0B"/>
+                </a:solidFill>
+                <a:latin typeface="Courier New"/>
+              </a:rPr>
+              <a:t>/features/notes/components/</a:t>
+            </a:r>
+            <a:r>
+              <a:rPr sz="1000" b="1" dirty="0" err="1">
+                <a:solidFill>
+                  <a:srgbClr val="F59E0B"/>
+                </a:solidFill>
+                <a:latin typeface="Courier New"/>
+              </a:rPr>
+              <a:t>CreateNoteForm.tsx</a:t>
+            </a:r>
+            <a:r>
+              <a:rPr sz="1000" b="1" dirty="0">
+                <a:solidFill>
+                  <a:srgbClr val="F59E0B"/>
+                </a:solidFill>
+                <a:latin typeface="Courier New"/>
+              </a:rPr>
+              <a:t>  (new)</a:t>
+            </a:r>
+          </a:p>
+          <a:p>
+            <a:pPr>
+              <a:spcAft>
+                <a:spcPts val="100"/>
+              </a:spcAft>
+            </a:pPr>
+            <a:r>
+              <a:rPr sz="1100" dirty="0">
                 <a:solidFill>
                   <a:srgbClr val="E2E8F0"/>
                 </a:solidFill>
@@ -9825,7 +12038,7 @@
               </a:spcAft>
             </a:pPr>
             <a:r>
-              <a:rPr sz="1100">
+              <a:rPr sz="1100" dirty="0">
                 <a:solidFill>
                   <a:srgbClr val="E2E8F0"/>
                 </a:solidFill>
@@ -9841,71 +12054,197 @@
               </a:spcAft>
             </a:pPr>
             <a:r>
-              <a:rPr sz="1100">
-                <a:solidFill>
-                  <a:srgbClr val="E2E8F0"/>
-                </a:solidFill>
-                <a:latin typeface="Courier New"/>
-              </a:rPr>
-              <a:t>import { useForm } from 'react-hook-form'</a:t>
-            </a:r>
-          </a:p>
-          <a:p>
-            <a:pPr>
-              <a:spcAft>
-                <a:spcPts val="100"/>
-              </a:spcAft>
-            </a:pPr>
-            <a:r>
-              <a:rPr sz="1100">
-                <a:solidFill>
-                  <a:srgbClr val="E2E8F0"/>
-                </a:solidFill>
-                <a:latin typeface="Courier New"/>
-              </a:rPr>
-              <a:t>import { zodResolver } from '@hookform/resolvers/zod'</a:t>
-            </a:r>
-          </a:p>
-          <a:p>
-            <a:pPr>
-              <a:spcAft>
-                <a:spcPts val="100"/>
-              </a:spcAft>
-            </a:pPr>
-            <a:r>
-              <a:rPr sz="1100">
-                <a:solidFill>
-                  <a:srgbClr val="E2E8F0"/>
-                </a:solidFill>
-                <a:latin typeface="Courier New"/>
-              </a:rPr>
-              <a:t>import { toast } from 'sonner'</a:t>
-            </a:r>
-          </a:p>
-          <a:p>
-            <a:pPr>
-              <a:spcAft>
-                <a:spcPts val="100"/>
-              </a:spcAft>
-            </a:pPr>
-            <a:r>
-              <a:rPr sz="1100">
-                <a:solidFill>
-                  <a:srgbClr val="E2E8F0"/>
-                </a:solidFill>
-                <a:latin typeface="Courier New"/>
-              </a:rPr>
-              <a:t>import { createNote } from '@/features/notes/actions/notes.actions'</a:t>
-            </a:r>
-          </a:p>
-          <a:p>
-            <a:pPr>
-              <a:spcAft>
-                <a:spcPts val="100"/>
-              </a:spcAft>
-            </a:pPr>
-            <a:r>
-              <a:rPr sz="1100">
+              <a:rPr sz="1100" dirty="0">
+                <a:solidFill>
+                  <a:srgbClr val="E2E8F0"/>
+                </a:solidFill>
+                <a:latin typeface="Courier New"/>
+              </a:rPr>
+              <a:t>import { </a:t>
+            </a:r>
+            <a:r>
+              <a:rPr sz="1100" dirty="0" err="1">
+                <a:solidFill>
+                  <a:srgbClr val="E2E8F0"/>
+                </a:solidFill>
+                <a:latin typeface="Courier New"/>
+              </a:rPr>
+              <a:t>useForm</a:t>
+            </a:r>
+            <a:r>
+              <a:rPr sz="1100" dirty="0">
+                <a:solidFill>
+                  <a:srgbClr val="E2E8F0"/>
+                </a:solidFill>
+                <a:latin typeface="Courier New"/>
+              </a:rPr>
+              <a:t> } from 'react-hook-form'</a:t>
+            </a:r>
+          </a:p>
+          <a:p>
+            <a:pPr>
+              <a:spcAft>
+                <a:spcPts val="100"/>
+              </a:spcAft>
+            </a:pPr>
+            <a:r>
+              <a:rPr sz="1100" dirty="0">
+                <a:solidFill>
+                  <a:srgbClr val="E2E8F0"/>
+                </a:solidFill>
+                <a:latin typeface="Courier New"/>
+              </a:rPr>
+              <a:t>import { </a:t>
+            </a:r>
+            <a:r>
+              <a:rPr sz="1100" dirty="0" err="1">
+                <a:solidFill>
+                  <a:srgbClr val="E2E8F0"/>
+                </a:solidFill>
+                <a:latin typeface="Courier New"/>
+              </a:rPr>
+              <a:t>zodResolver</a:t>
+            </a:r>
+            <a:r>
+              <a:rPr sz="1100" dirty="0">
+                <a:solidFill>
+                  <a:srgbClr val="E2E8F0"/>
+                </a:solidFill>
+                <a:latin typeface="Courier New"/>
+              </a:rPr>
+              <a:t> } from '@</a:t>
+            </a:r>
+            <a:r>
+              <a:rPr sz="1100" dirty="0" err="1">
+                <a:solidFill>
+                  <a:srgbClr val="E2E8F0"/>
+                </a:solidFill>
+                <a:latin typeface="Courier New"/>
+              </a:rPr>
+              <a:t>hookform</a:t>
+            </a:r>
+            <a:r>
+              <a:rPr sz="1100" dirty="0">
+                <a:solidFill>
+                  <a:srgbClr val="E2E8F0"/>
+                </a:solidFill>
+                <a:latin typeface="Courier New"/>
+              </a:rPr>
+              <a:t>/resolvers/</a:t>
+            </a:r>
+            <a:r>
+              <a:rPr sz="1100" dirty="0" err="1">
+                <a:solidFill>
+                  <a:srgbClr val="E2E8F0"/>
+                </a:solidFill>
+                <a:latin typeface="Courier New"/>
+              </a:rPr>
+              <a:t>zod</a:t>
+            </a:r>
+            <a:r>
+              <a:rPr sz="1100" dirty="0">
+                <a:solidFill>
+                  <a:srgbClr val="E2E8F0"/>
+                </a:solidFill>
+                <a:latin typeface="Courier New"/>
+              </a:rPr>
+              <a:t>'</a:t>
+            </a:r>
+          </a:p>
+          <a:p>
+            <a:pPr>
+              <a:spcAft>
+                <a:spcPts val="100"/>
+              </a:spcAft>
+            </a:pPr>
+            <a:r>
+              <a:rPr sz="1100" dirty="0">
+                <a:solidFill>
+                  <a:srgbClr val="E2E8F0"/>
+                </a:solidFill>
+                <a:latin typeface="Courier New"/>
+              </a:rPr>
+              <a:t>import { toast } from '</a:t>
+            </a:r>
+            <a:r>
+              <a:rPr sz="1100" dirty="0" err="1">
+                <a:solidFill>
+                  <a:srgbClr val="E2E8F0"/>
+                </a:solidFill>
+                <a:latin typeface="Courier New"/>
+              </a:rPr>
+              <a:t>sonner</a:t>
+            </a:r>
+            <a:r>
+              <a:rPr sz="1100" dirty="0">
+                <a:solidFill>
+                  <a:srgbClr val="E2E8F0"/>
+                </a:solidFill>
+                <a:latin typeface="Courier New"/>
+              </a:rPr>
+              <a:t>'</a:t>
+            </a:r>
+          </a:p>
+          <a:p>
+            <a:pPr>
+              <a:spcAft>
+                <a:spcPts val="100"/>
+              </a:spcAft>
+            </a:pPr>
+            <a:r>
+              <a:rPr sz="1100" dirty="0">
+                <a:solidFill>
+                  <a:srgbClr val="E2E8F0"/>
+                </a:solidFill>
+                <a:latin typeface="Courier New"/>
+              </a:rPr>
+              <a:t>import { </a:t>
+            </a:r>
+            <a:r>
+              <a:rPr sz="1100" dirty="0" err="1">
+                <a:solidFill>
+                  <a:srgbClr val="E2E8F0"/>
+                </a:solidFill>
+                <a:latin typeface="Courier New"/>
+              </a:rPr>
+              <a:t>createNote</a:t>
+            </a:r>
+            <a:r>
+              <a:rPr sz="1100" dirty="0">
+                <a:solidFill>
+                  <a:srgbClr val="E2E8F0"/>
+                </a:solidFill>
+                <a:latin typeface="Courier New"/>
+              </a:rPr>
+              <a:t> } from '@/features/notes/actions/</a:t>
+            </a:r>
+            <a:r>
+              <a:rPr sz="1100" dirty="0" err="1">
+                <a:solidFill>
+                  <a:srgbClr val="E2E8F0"/>
+                </a:solidFill>
+                <a:latin typeface="Courier New"/>
+              </a:rPr>
+              <a:t>notes.actions</a:t>
+            </a:r>
+            <a:r>
+              <a:rPr sz="1100" dirty="0">
+                <a:solidFill>
+                  <a:srgbClr val="E2E8F0"/>
+                </a:solidFill>
+                <a:latin typeface="Courier New"/>
+              </a:rPr>
+              <a:t>'</a:t>
+            </a:r>
+          </a:p>
+          <a:p>
+            <a:pPr>
+              <a:spcAft>
+                <a:spcPts val="100"/>
+              </a:spcAft>
+            </a:pPr>
+            <a:r>
+              <a:rPr sz="1100" dirty="0">
                 <a:solidFill>
                   <a:srgbClr val="E2E8F0"/>
                 </a:solidFill>
@@ -9921,55 +12260,127 @@
               </a:spcAft>
             </a:pPr>
             <a:r>
-              <a:rPr sz="1100">
-                <a:solidFill>
-                  <a:srgbClr val="E2E8F0"/>
-                </a:solidFill>
-                <a:latin typeface="Courier New"/>
-              </a:rPr>
-              <a:t>const createNoteFormSchema = z.object({</a:t>
-            </a:r>
-          </a:p>
-          <a:p>
-            <a:pPr>
-              <a:spcAft>
-                <a:spcPts val="100"/>
-              </a:spcAft>
-            </a:pPr>
-            <a:r>
-              <a:rPr sz="1100">
-                <a:solidFill>
-                  <a:srgbClr val="E2E8F0"/>
-                </a:solidFill>
-                <a:latin typeface="Courier New"/>
-              </a:rPr>
-              <a:t>  title: z.string().min(1, 'Title is required').max(200),</a:t>
-            </a:r>
-          </a:p>
-          <a:p>
-            <a:pPr>
-              <a:spcAft>
-                <a:spcPts val="100"/>
-              </a:spcAft>
-            </a:pPr>
-            <a:r>
-              <a:rPr sz="1100">
-                <a:solidFill>
-                  <a:srgbClr val="E2E8F0"/>
-                </a:solidFill>
-                <a:latin typeface="Courier New"/>
-              </a:rPr>
-              <a:t>  body: z.string().max(10_000),</a:t>
-            </a:r>
-          </a:p>
-          <a:p>
-            <a:pPr>
-              <a:spcAft>
-                <a:spcPts val="100"/>
-              </a:spcAft>
-            </a:pPr>
-            <a:r>
-              <a:rPr sz="1100">
+              <a:rPr sz="1100" dirty="0">
+                <a:solidFill>
+                  <a:srgbClr val="E2E8F0"/>
+                </a:solidFill>
+                <a:latin typeface="Courier New"/>
+              </a:rPr>
+              <a:t>const </a:t>
+            </a:r>
+            <a:r>
+              <a:rPr sz="1100" dirty="0" err="1">
+                <a:solidFill>
+                  <a:srgbClr val="E2E8F0"/>
+                </a:solidFill>
+                <a:latin typeface="Courier New"/>
+              </a:rPr>
+              <a:t>createNoteFormSchema</a:t>
+            </a:r>
+            <a:r>
+              <a:rPr sz="1100" dirty="0">
+                <a:solidFill>
+                  <a:srgbClr val="E2E8F0"/>
+                </a:solidFill>
+                <a:latin typeface="Courier New"/>
+              </a:rPr>
+              <a:t> = </a:t>
+            </a:r>
+            <a:r>
+              <a:rPr sz="1100" dirty="0" err="1">
+                <a:solidFill>
+                  <a:srgbClr val="E2E8F0"/>
+                </a:solidFill>
+                <a:latin typeface="Courier New"/>
+              </a:rPr>
+              <a:t>z.object</a:t>
+            </a:r>
+            <a:r>
+              <a:rPr sz="1100" dirty="0">
+                <a:solidFill>
+                  <a:srgbClr val="E2E8F0"/>
+                </a:solidFill>
+                <a:latin typeface="Courier New"/>
+              </a:rPr>
+              <a:t>({</a:t>
+            </a:r>
+          </a:p>
+          <a:p>
+            <a:pPr>
+              <a:spcAft>
+                <a:spcPts val="100"/>
+              </a:spcAft>
+            </a:pPr>
+            <a:r>
+              <a:rPr sz="1100" dirty="0">
+                <a:solidFill>
+                  <a:srgbClr val="E2E8F0"/>
+                </a:solidFill>
+                <a:latin typeface="Courier New"/>
+              </a:rPr>
+              <a:t>  title: </a:t>
+            </a:r>
+            <a:r>
+              <a:rPr sz="1100" dirty="0" err="1">
+                <a:solidFill>
+                  <a:srgbClr val="E2E8F0"/>
+                </a:solidFill>
+                <a:latin typeface="Courier New"/>
+              </a:rPr>
+              <a:t>z.string</a:t>
+            </a:r>
+            <a:r>
+              <a:rPr sz="1100" dirty="0">
+                <a:solidFill>
+                  <a:srgbClr val="E2E8F0"/>
+                </a:solidFill>
+                <a:latin typeface="Courier New"/>
+              </a:rPr>
+              <a:t>().min(1, 'Title is required').max(200),</a:t>
+            </a:r>
+          </a:p>
+          <a:p>
+            <a:pPr>
+              <a:spcAft>
+                <a:spcPts val="100"/>
+              </a:spcAft>
+            </a:pPr>
+            <a:r>
+              <a:rPr sz="1100" dirty="0">
+                <a:solidFill>
+                  <a:srgbClr val="E2E8F0"/>
+                </a:solidFill>
+                <a:latin typeface="Courier New"/>
+              </a:rPr>
+              <a:t>  body: </a:t>
+            </a:r>
+            <a:r>
+              <a:rPr sz="1100" dirty="0" err="1">
+                <a:solidFill>
+                  <a:srgbClr val="E2E8F0"/>
+                </a:solidFill>
+                <a:latin typeface="Courier New"/>
+              </a:rPr>
+              <a:t>z.string</a:t>
+            </a:r>
+            <a:r>
+              <a:rPr sz="1100" dirty="0">
+                <a:solidFill>
+                  <a:srgbClr val="E2E8F0"/>
+                </a:solidFill>
+                <a:latin typeface="Courier New"/>
+              </a:rPr>
+              <a:t>().max(10_000),</a:t>
+            </a:r>
+          </a:p>
+          <a:p>
+            <a:pPr>
+              <a:spcAft>
+                <a:spcPts val="100"/>
+              </a:spcAft>
+            </a:pPr>
+            <a:r>
+              <a:rPr sz="1100" dirty="0">
                 <a:solidFill>
                   <a:srgbClr val="E2E8F0"/>
                 </a:solidFill>
@@ -9985,7 +12396,7 @@
               </a:spcAft>
             </a:pPr>
             <a:r>
-              <a:rPr sz="1100">
+              <a:rPr sz="1100" dirty="0">
                 <a:solidFill>
                   <a:srgbClr val="E2E8F0"/>
                 </a:solidFill>
@@ -10001,39 +12412,111 @@
               </a:spcAft>
             </a:pPr>
             <a:r>
-              <a:rPr sz="1100">
-                <a:solidFill>
-                  <a:srgbClr val="E2E8F0"/>
-                </a:solidFill>
-                <a:latin typeface="Courier New"/>
-              </a:rPr>
-              <a:t>export function CreateNoteForm() {</a:t>
-            </a:r>
-          </a:p>
-          <a:p>
-            <a:pPr>
-              <a:spcAft>
-                <a:spcPts val="100"/>
-              </a:spcAft>
-            </a:pPr>
-            <a:r>
-              <a:rPr sz="1100">
-                <a:solidFill>
-                  <a:srgbClr val="E2E8F0"/>
-                </a:solidFill>
-                <a:latin typeface="Courier New"/>
-              </a:rPr>
-              <a:t>  const { register, handleSubmit, reset, formState } = useForm(...)</a:t>
-            </a:r>
-          </a:p>
-          <a:p>
-            <a:pPr>
-              <a:spcAft>
-                <a:spcPts val="100"/>
-              </a:spcAft>
-            </a:pPr>
-            <a:r>
-              <a:rPr sz="1100">
+              <a:rPr sz="1100" dirty="0">
+                <a:solidFill>
+                  <a:srgbClr val="E2E8F0"/>
+                </a:solidFill>
+                <a:latin typeface="Courier New"/>
+              </a:rPr>
+              <a:t>export function </a:t>
+            </a:r>
+            <a:r>
+              <a:rPr sz="1100" dirty="0" err="1">
+                <a:solidFill>
+                  <a:srgbClr val="E2E8F0"/>
+                </a:solidFill>
+                <a:latin typeface="Courier New"/>
+              </a:rPr>
+              <a:t>CreateNoteForm</a:t>
+            </a:r>
+            <a:r>
+              <a:rPr sz="1100" dirty="0">
+                <a:solidFill>
+                  <a:srgbClr val="E2E8F0"/>
+                </a:solidFill>
+                <a:latin typeface="Courier New"/>
+              </a:rPr>
+              <a:t>() {</a:t>
+            </a:r>
+          </a:p>
+          <a:p>
+            <a:pPr>
+              <a:spcAft>
+                <a:spcPts val="100"/>
+              </a:spcAft>
+            </a:pPr>
+            <a:r>
+              <a:rPr sz="1100" dirty="0">
+                <a:solidFill>
+                  <a:srgbClr val="E2E8F0"/>
+                </a:solidFill>
+                <a:latin typeface="Courier New"/>
+              </a:rPr>
+              <a:t>  const { register, </a:t>
+            </a:r>
+            <a:r>
+              <a:rPr sz="1100" dirty="0" err="1">
+                <a:solidFill>
+                  <a:srgbClr val="E2E8F0"/>
+                </a:solidFill>
+                <a:latin typeface="Courier New"/>
+              </a:rPr>
+              <a:t>handleSubmit</a:t>
+            </a:r>
+            <a:r>
+              <a:rPr sz="1100" dirty="0">
+                <a:solidFill>
+                  <a:srgbClr val="E2E8F0"/>
+                </a:solidFill>
+                <a:latin typeface="Courier New"/>
+              </a:rPr>
+              <a:t>, reset, </a:t>
+            </a:r>
+            <a:r>
+              <a:rPr sz="1100" dirty="0" err="1">
+                <a:solidFill>
+                  <a:srgbClr val="E2E8F0"/>
+                </a:solidFill>
+                <a:latin typeface="Courier New"/>
+              </a:rPr>
+              <a:t>formState</a:t>
+            </a:r>
+            <a:r>
+              <a:rPr sz="1100" dirty="0">
+                <a:solidFill>
+                  <a:srgbClr val="E2E8F0"/>
+                </a:solidFill>
+                <a:latin typeface="Courier New"/>
+              </a:rPr>
+              <a:t> } = </a:t>
+            </a:r>
+            <a:r>
+              <a:rPr sz="1100" dirty="0" err="1">
+                <a:solidFill>
+                  <a:srgbClr val="E2E8F0"/>
+                </a:solidFill>
+                <a:latin typeface="Courier New"/>
+              </a:rPr>
+              <a:t>useForm</a:t>
+            </a:r>
+            <a:r>
+              <a:rPr sz="1100" dirty="0">
+                <a:solidFill>
+                  <a:srgbClr val="E2E8F0"/>
+                </a:solidFill>
+                <a:latin typeface="Courier New"/>
+              </a:rPr>
+              <a:t>(...)</a:t>
+            </a:r>
+          </a:p>
+          <a:p>
+            <a:pPr>
+              <a:spcAft>
+                <a:spcPts val="100"/>
+              </a:spcAft>
+            </a:pPr>
+            <a:r>
+              <a:rPr sz="1100" dirty="0">
                 <a:solidFill>
                   <a:srgbClr val="E2E8F0"/>
                 </a:solidFill>
@@ -10049,71 +12532,179 @@
               </a:spcAft>
             </a:pPr>
             <a:r>
-              <a:rPr sz="1100">
-                <a:solidFill>
-                  <a:srgbClr val="E2E8F0"/>
-                </a:solidFill>
-                <a:latin typeface="Courier New"/>
-              </a:rPr>
-              <a:t>  const onSubmit = async (data) =&gt; {</a:t>
-            </a:r>
-          </a:p>
-          <a:p>
-            <a:pPr>
-              <a:spcAft>
-                <a:spcPts val="100"/>
-              </a:spcAft>
-            </a:pPr>
-            <a:r>
-              <a:rPr sz="1100">
-                <a:solidFill>
-                  <a:srgbClr val="E2E8F0"/>
-                </a:solidFill>
-                <a:latin typeface="Courier New"/>
-              </a:rPr>
-              <a:t>    const result = await createNote(data)</a:t>
-            </a:r>
-          </a:p>
-          <a:p>
-            <a:pPr>
-              <a:spcAft>
-                <a:spcPts val="100"/>
-              </a:spcAft>
-            </a:pPr>
-            <a:r>
-              <a:rPr sz="1100">
-                <a:solidFill>
-                  <a:srgbClr val="E2E8F0"/>
-                </a:solidFill>
-                <a:latin typeface="Courier New"/>
-              </a:rPr>
-              <a:t>    if (result.success) { toast.success('Note created'); reset() }</a:t>
-            </a:r>
-          </a:p>
-          <a:p>
-            <a:pPr>
-              <a:spcAft>
-                <a:spcPts val="100"/>
-              </a:spcAft>
-            </a:pPr>
-            <a:r>
-              <a:rPr sz="1100">
-                <a:solidFill>
-                  <a:srgbClr val="E2E8F0"/>
-                </a:solidFill>
-                <a:latin typeface="Courier New"/>
-              </a:rPr>
-              <a:t>    else toast.error(result.error ?? 'Failed to create note')</a:t>
-            </a:r>
-          </a:p>
-          <a:p>
-            <a:pPr>
-              <a:spcAft>
-                <a:spcPts val="100"/>
-              </a:spcAft>
-            </a:pPr>
-            <a:r>
-              <a:rPr sz="1100">
+              <a:rPr sz="1100" dirty="0">
+                <a:solidFill>
+                  <a:srgbClr val="E2E8F0"/>
+                </a:solidFill>
+                <a:latin typeface="Courier New"/>
+              </a:rPr>
+              <a:t>  const </a:t>
+            </a:r>
+            <a:r>
+              <a:rPr sz="1100" dirty="0" err="1">
+                <a:solidFill>
+                  <a:srgbClr val="E2E8F0"/>
+                </a:solidFill>
+                <a:latin typeface="Courier New"/>
+              </a:rPr>
+              <a:t>onSubmit</a:t>
+            </a:r>
+            <a:r>
+              <a:rPr sz="1100" dirty="0">
+                <a:solidFill>
+                  <a:srgbClr val="E2E8F0"/>
+                </a:solidFill>
+                <a:latin typeface="Courier New"/>
+              </a:rPr>
+              <a:t> = async (data) =&gt; {</a:t>
+            </a:r>
+          </a:p>
+          <a:p>
+            <a:pPr>
+              <a:spcAft>
+                <a:spcPts val="100"/>
+              </a:spcAft>
+            </a:pPr>
+            <a:r>
+              <a:rPr sz="1100" dirty="0">
+                <a:solidFill>
+                  <a:srgbClr val="E2E8F0"/>
+                </a:solidFill>
+                <a:latin typeface="Courier New"/>
+              </a:rPr>
+              <a:t>    const result = await </a:t>
+            </a:r>
+            <a:r>
+              <a:rPr sz="1100" dirty="0" err="1">
+                <a:solidFill>
+                  <a:srgbClr val="E2E8F0"/>
+                </a:solidFill>
+                <a:latin typeface="Courier New"/>
+              </a:rPr>
+              <a:t>createNote</a:t>
+            </a:r>
+            <a:r>
+              <a:rPr sz="1100" dirty="0">
+                <a:solidFill>
+                  <a:srgbClr val="E2E8F0"/>
+                </a:solidFill>
+                <a:latin typeface="Courier New"/>
+              </a:rPr>
+              <a:t>(data)</a:t>
+            </a:r>
+          </a:p>
+          <a:p>
+            <a:pPr>
+              <a:spcAft>
+                <a:spcPts val="100"/>
+              </a:spcAft>
+            </a:pPr>
+            <a:r>
+              <a:rPr sz="1100" dirty="0">
+                <a:solidFill>
+                  <a:srgbClr val="E2E8F0"/>
+                </a:solidFill>
+                <a:latin typeface="Courier New"/>
+              </a:rPr>
+              <a:t>    if (</a:t>
+            </a:r>
+            <a:r>
+              <a:rPr sz="1100" dirty="0" err="1">
+                <a:solidFill>
+                  <a:srgbClr val="E2E8F0"/>
+                </a:solidFill>
+                <a:latin typeface="Courier New"/>
+              </a:rPr>
+              <a:t>result.success</a:t>
+            </a:r>
+            <a:r>
+              <a:rPr sz="1100" dirty="0">
+                <a:solidFill>
+                  <a:srgbClr val="E2E8F0"/>
+                </a:solidFill>
+                <a:latin typeface="Courier New"/>
+              </a:rPr>
+              <a:t>) { </a:t>
+            </a:r>
+            <a:r>
+              <a:rPr sz="1100" dirty="0" err="1">
+                <a:solidFill>
+                  <a:srgbClr val="E2E8F0"/>
+                </a:solidFill>
+                <a:latin typeface="Courier New"/>
+              </a:rPr>
+              <a:t>toast.success</a:t>
+            </a:r>
+            <a:r>
+              <a:rPr sz="1100" dirty="0">
+                <a:solidFill>
+                  <a:srgbClr val="E2E8F0"/>
+                </a:solidFill>
+                <a:latin typeface="Courier New"/>
+              </a:rPr>
+              <a:t>('Note created'); reset() }</a:t>
+            </a:r>
+          </a:p>
+          <a:p>
+            <a:pPr>
+              <a:spcAft>
+                <a:spcPts val="100"/>
+              </a:spcAft>
+            </a:pPr>
+            <a:r>
+              <a:rPr sz="1100" dirty="0">
+                <a:solidFill>
+                  <a:srgbClr val="E2E8F0"/>
+                </a:solidFill>
+                <a:latin typeface="Courier New"/>
+              </a:rPr>
+              <a:t>    else </a:t>
+            </a:r>
+            <a:r>
+              <a:rPr sz="1100" dirty="0" err="1">
+                <a:solidFill>
+                  <a:srgbClr val="E2E8F0"/>
+                </a:solidFill>
+                <a:latin typeface="Courier New"/>
+              </a:rPr>
+              <a:t>toast.error</a:t>
+            </a:r>
+            <a:r>
+              <a:rPr sz="1100" dirty="0">
+                <a:solidFill>
+                  <a:srgbClr val="E2E8F0"/>
+                </a:solidFill>
+                <a:latin typeface="Courier New"/>
+              </a:rPr>
+              <a:t>(</a:t>
+            </a:r>
+            <a:r>
+              <a:rPr sz="1100" dirty="0" err="1">
+                <a:solidFill>
+                  <a:srgbClr val="E2E8F0"/>
+                </a:solidFill>
+                <a:latin typeface="Courier New"/>
+              </a:rPr>
+              <a:t>result.error</a:t>
+            </a:r>
+            <a:r>
+              <a:rPr sz="1100" dirty="0">
+                <a:solidFill>
+                  <a:srgbClr val="E2E8F0"/>
+                </a:solidFill>
+                <a:latin typeface="Courier New"/>
+              </a:rPr>
+              <a:t> ?? 'Failed to create note')</a:t>
+            </a:r>
+          </a:p>
+          <a:p>
+            <a:pPr>
+              <a:spcAft>
+                <a:spcPts val="100"/>
+              </a:spcAft>
+            </a:pPr>
+            <a:r>
+              <a:rPr sz="1100" dirty="0">
                 <a:solidFill>
                   <a:srgbClr val="E2E8F0"/>
                 </a:solidFill>
@@ -10129,7 +12720,7 @@
               </a:spcAft>
             </a:pPr>
             <a:r>
-              <a:rPr sz="1100">
+              <a:rPr sz="1100" dirty="0">
                 <a:solidFill>
                   <a:srgbClr val="E2E8F0"/>
                 </a:solidFill>
@@ -10175,14 +12766,6 @@
               </a:rPr>
               <a:t>react-hook-form + zod — same pattern as the sign-up form</a:t>
             </a:r>
-            <a:r>
-              <a:rPr sz="1300" b="0">
-                <a:solidFill>
-                  <a:srgbClr val="334155"/>
-                </a:solidFill>
-              </a:rPr>
-              <a:t/>
-            </a:r>
           </a:p>
           <a:p>
             <a:pPr algn="l">
@@ -10198,14 +12781,6 @@
               </a:rPr>
               <a:t>onSubmit calls createNote(data) directly, no fetch needed</a:t>
             </a:r>
-            <a:r>
-              <a:rPr sz="1300" b="0">
-                <a:solidFill>
-                  <a:srgbClr val="334155"/>
-                </a:solidFill>
-              </a:rPr>
-              <a:t/>
-            </a:r>
           </a:p>
           <a:p>
             <a:pPr algn="l">
@@ -10220,14 +12795,6 @@
                 </a:solidFill>
               </a:rPr>
               <a:t>No manual refresh — NotesList's onSnapshot picks up the write</a:t>
-            </a:r>
-            <a:r>
-              <a:rPr sz="1300" b="0">
-                <a:solidFill>
-                  <a:srgbClr val="334155"/>
-                </a:solidFill>
-              </a:rPr>
-              <a:t/>
             </a:r>
           </a:p>
         </p:txBody>
@@ -10241,7 +12808,7 @@
 </file>
 
 <file path=ppt/slides/slide9.xml><?xml version="1.0" encoding="utf-8"?>
-<p:sld xmlns:a="http://schemas.openxmlformats.org/drawingml/2006/main" xmlns:p="http://schemas.openxmlformats.org/presentationml/2006/main" xmlns:r="http://schemas.openxmlformats.org/officeDocument/2006/relationships">
+<p:sld xmlns:a="http://schemas.openxmlformats.org/drawingml/2006/main" xmlns:r="http://schemas.openxmlformats.org/officeDocument/2006/relationships" xmlns:p="http://schemas.openxmlformats.org/presentationml/2006/main">
   <p:cSld>
     <p:bg>
       <p:bgPr>
@@ -10257,7 +12824,14 @@
         <p:cNvGrpSpPr/>
         <p:nvPr/>
       </p:nvGrpSpPr>
-      <p:grpSpPr/>
+      <p:grpSpPr>
+        <a:xfrm>
+          <a:off x="0" y="0"/>
+          <a:ext cx="0" cy="0"/>
+          <a:chOff x="0" y="0"/>
+          <a:chExt cx="0" cy="0"/>
+        </a:xfrm>
+      </p:grpSpPr>
       <p:sp>
         <p:nvSpPr>
           <p:cNvPr id="2" name="Rounded Rectangle 1"/>
@@ -10423,7 +12997,7 @@
           </a:fontRef>
         </p:style>
         <p:txBody>
-          <a:bodyPr rtlCol="0" anchor="t" wrap="none" lIns="228600" rIns="182880" tIns="128016"/>
+          <a:bodyPr wrap="none" lIns="228600" tIns="128016" rIns="182880" rtlCol="0" anchor="t"/>
           <a:lstStyle/>
           <a:p>
             <a:pPr algn="ctr">
@@ -10432,23 +13006,59 @@
               </a:spcAft>
             </a:pPr>
             <a:r>
-              <a:rPr sz="1100" b="1">
+              <a:rPr sz="1100" b="1" dirty="0">
                 <a:solidFill>
                   <a:srgbClr val="F59E0B"/>
                 </a:solidFill>
                 <a:latin typeface="Courier New"/>
               </a:rPr>
-              <a:t>frontend/src/app/(dashboard)/notes/page.tsx  (new)</a:t>
-            </a:r>
-          </a:p>
-          <a:p>
-            <a:pPr>
-              <a:spcAft>
-                <a:spcPts val="100"/>
-              </a:spcAft>
-            </a:pPr>
-            <a:r>
-              <a:rPr sz="1200">
+              <a:t>frontend/</a:t>
+            </a:r>
+            <a:r>
+              <a:rPr sz="1100" b="1" dirty="0" err="1">
+                <a:solidFill>
+                  <a:srgbClr val="F59E0B"/>
+                </a:solidFill>
+                <a:latin typeface="Courier New"/>
+              </a:rPr>
+              <a:t>src</a:t>
+            </a:r>
+            <a:r>
+              <a:rPr sz="1100" b="1" dirty="0">
+                <a:solidFill>
+                  <a:srgbClr val="F59E0B"/>
+                </a:solidFill>
+                <a:latin typeface="Courier New"/>
+              </a:rPr>
+              <a:t>/app/(dashboard)/notes/</a:t>
+            </a:r>
+            <a:r>
+              <a:rPr sz="1100" b="1" dirty="0" err="1">
+                <a:solidFill>
+                  <a:srgbClr val="F59E0B"/>
+                </a:solidFill>
+                <a:latin typeface="Courier New"/>
+              </a:rPr>
+              <a:t>page.tsx</a:t>
+            </a:r>
+            <a:r>
+              <a:rPr sz="1100" b="1" dirty="0">
+                <a:solidFill>
+                  <a:srgbClr val="F59E0B"/>
+                </a:solidFill>
+                <a:latin typeface="Courier New"/>
+              </a:rPr>
+              <a:t>  (new)</a:t>
+            </a:r>
+          </a:p>
+          <a:p>
+            <a:pPr>
+              <a:spcAft>
+                <a:spcPts val="100"/>
+              </a:spcAft>
+            </a:pPr>
+            <a:r>
+              <a:rPr lang="en-AU" sz="1200" dirty="0">
                 <a:solidFill>
                   <a:srgbClr val="E2E8F0"/>
                 </a:solidFill>
@@ -10464,71 +13074,215 @@
               </a:spcAft>
             </a:pPr>
             <a:r>
-              <a:rPr sz="1200">
-                <a:solidFill>
-                  <a:srgbClr val="E2E8F0"/>
-                </a:solidFill>
-                <a:latin typeface="Courier New"/>
-              </a:rPr>
-              <a:t>import { requireAuth } from '@/actions/auth.actions'</a:t>
-            </a:r>
-          </a:p>
-          <a:p>
-            <a:pPr>
-              <a:spcAft>
-                <a:spcPts val="100"/>
-              </a:spcAft>
-            </a:pPr>
-            <a:r>
-              <a:rPr sz="1200">
-                <a:solidFill>
-                  <a:srgbClr val="E2E8F0"/>
-                </a:solidFill>
-                <a:latin typeface="Courier New"/>
-              </a:rPr>
-              <a:t>import { PageHeader } from '@/components/layout/PageHeader'</a:t>
-            </a:r>
-          </a:p>
-          <a:p>
-            <a:pPr>
-              <a:spcAft>
-                <a:spcPts val="100"/>
-              </a:spcAft>
-            </a:pPr>
-            <a:r>
-              <a:rPr sz="1200">
-                <a:solidFill>
-                  <a:srgbClr val="E2E8F0"/>
-                </a:solidFill>
-                <a:latin typeface="Courier New"/>
-              </a:rPr>
-              <a:t>import { CreateNoteForm } from '@/features/notes/components/CreateNoteForm'</a:t>
-            </a:r>
-          </a:p>
-          <a:p>
-            <a:pPr>
-              <a:spcAft>
-                <a:spcPts val="100"/>
-              </a:spcAft>
-            </a:pPr>
-            <a:r>
-              <a:rPr sz="1200">
-                <a:solidFill>
-                  <a:srgbClr val="E2E8F0"/>
-                </a:solidFill>
-                <a:latin typeface="Courier New"/>
-              </a:rPr>
-              <a:t>import { NotesList } from '@/features/notes/components/NotesList'</a:t>
-            </a:r>
-          </a:p>
-          <a:p>
-            <a:pPr>
-              <a:spcAft>
-                <a:spcPts val="100"/>
-              </a:spcAft>
-            </a:pPr>
-            <a:r>
-              <a:rPr sz="1200">
+              <a:rPr lang="en-AU" sz="1200" dirty="0">
+                <a:solidFill>
+                  <a:srgbClr val="E2E8F0"/>
+                </a:solidFill>
+                <a:latin typeface="Courier New"/>
+              </a:rPr>
+              <a:t>import { </a:t>
+            </a:r>
+            <a:r>
+              <a:rPr lang="en-AU" sz="1200" dirty="0" err="1">
+                <a:solidFill>
+                  <a:srgbClr val="E2E8F0"/>
+                </a:solidFill>
+                <a:latin typeface="Courier New"/>
+              </a:rPr>
+              <a:t>requireAuth</a:t>
+            </a:r>
+            <a:r>
+              <a:rPr lang="en-AU" sz="1200" dirty="0">
+                <a:solidFill>
+                  <a:srgbClr val="E2E8F0"/>
+                </a:solidFill>
+                <a:latin typeface="Courier New"/>
+              </a:rPr>
+              <a:t> } from '@/actions/</a:t>
+            </a:r>
+            <a:r>
+              <a:rPr lang="en-AU" sz="1200" dirty="0" err="1">
+                <a:solidFill>
+                  <a:srgbClr val="E2E8F0"/>
+                </a:solidFill>
+                <a:latin typeface="Courier New"/>
+              </a:rPr>
+              <a:t>auth.actions</a:t>
+            </a:r>
+            <a:r>
+              <a:rPr lang="en-AU" sz="1200" dirty="0">
+                <a:solidFill>
+                  <a:srgbClr val="E2E8F0"/>
+                </a:solidFill>
+                <a:latin typeface="Courier New"/>
+              </a:rPr>
+              <a:t>'</a:t>
+            </a:r>
+          </a:p>
+          <a:p>
+            <a:pPr>
+              <a:spcAft>
+                <a:spcPts val="100"/>
+              </a:spcAft>
+            </a:pPr>
+            <a:r>
+              <a:rPr lang="en-AU" sz="1200" dirty="0">
+                <a:solidFill>
+                  <a:srgbClr val="E2E8F0"/>
+                </a:solidFill>
+                <a:latin typeface="Courier New"/>
+              </a:rPr>
+              <a:t>import { </a:t>
+            </a:r>
+            <a:r>
+              <a:rPr lang="en-AU" sz="1200" dirty="0" err="1">
+                <a:solidFill>
+                  <a:srgbClr val="E2E8F0"/>
+                </a:solidFill>
+                <a:latin typeface="Courier New"/>
+              </a:rPr>
+              <a:t>PageHeader</a:t>
+            </a:r>
+            <a:r>
+              <a:rPr lang="en-AU" sz="1200" dirty="0">
+                <a:solidFill>
+                  <a:srgbClr val="E2E8F0"/>
+                </a:solidFill>
+                <a:latin typeface="Courier New"/>
+              </a:rPr>
+              <a:t> } from '@/components/layout/</a:t>
+            </a:r>
+            <a:r>
+              <a:rPr lang="en-AU" sz="1200" dirty="0" err="1">
+                <a:solidFill>
+                  <a:srgbClr val="E2E8F0"/>
+                </a:solidFill>
+                <a:latin typeface="Courier New"/>
+              </a:rPr>
+              <a:t>PageHeader</a:t>
+            </a:r>
+            <a:r>
+              <a:rPr lang="en-AU" sz="1200" dirty="0">
+                <a:solidFill>
+                  <a:srgbClr val="E2E8F0"/>
+                </a:solidFill>
+                <a:latin typeface="Courier New"/>
+              </a:rPr>
+              <a:t>'</a:t>
+            </a:r>
+          </a:p>
+          <a:p>
+            <a:pPr>
+              <a:spcAft>
+                <a:spcPts val="100"/>
+              </a:spcAft>
+            </a:pPr>
+            <a:r>
+              <a:rPr lang="en-AU" sz="1200" dirty="0">
+                <a:solidFill>
+                  <a:srgbClr val="E2E8F0"/>
+                </a:solidFill>
+                <a:latin typeface="Courier New"/>
+              </a:rPr>
+              <a:t>import { </a:t>
+            </a:r>
+            <a:r>
+              <a:rPr lang="en-AU" sz="1200" dirty="0" err="1">
+                <a:solidFill>
+                  <a:srgbClr val="E2E8F0"/>
+                </a:solidFill>
+                <a:latin typeface="Courier New"/>
+              </a:rPr>
+              <a:t>CreateNoteForm</a:t>
+            </a:r>
+            <a:r>
+              <a:rPr lang="en-AU" sz="1200" dirty="0">
+                <a:solidFill>
+                  <a:srgbClr val="E2E8F0"/>
+                </a:solidFill>
+                <a:latin typeface="Courier New"/>
+              </a:rPr>
+              <a:t> } from '@/features/notes/components/</a:t>
+            </a:r>
+            <a:r>
+              <a:rPr lang="en-AU" sz="1200" dirty="0" err="1">
+                <a:solidFill>
+                  <a:srgbClr val="E2E8F0"/>
+                </a:solidFill>
+                <a:latin typeface="Courier New"/>
+              </a:rPr>
+              <a:t>CreateNoteForm</a:t>
+            </a:r>
+            <a:r>
+              <a:rPr lang="en-AU" sz="1200" dirty="0">
+                <a:solidFill>
+                  <a:srgbClr val="E2E8F0"/>
+                </a:solidFill>
+                <a:latin typeface="Courier New"/>
+              </a:rPr>
+              <a:t>'</a:t>
+            </a:r>
+          </a:p>
+          <a:p>
+            <a:pPr>
+              <a:spcAft>
+                <a:spcPts val="100"/>
+              </a:spcAft>
+            </a:pPr>
+            <a:r>
+              <a:rPr lang="en-AU" sz="1200" dirty="0">
+                <a:solidFill>
+                  <a:srgbClr val="E2E8F0"/>
+                </a:solidFill>
+                <a:latin typeface="Courier New"/>
+              </a:rPr>
+              <a:t>import { </a:t>
+            </a:r>
+            <a:r>
+              <a:rPr lang="en-AU" sz="1200" dirty="0" err="1">
+                <a:solidFill>
+                  <a:srgbClr val="E2E8F0"/>
+                </a:solidFill>
+                <a:latin typeface="Courier New"/>
+              </a:rPr>
+              <a:t>NotesList</a:t>
+            </a:r>
+            <a:r>
+              <a:rPr lang="en-AU" sz="1200" dirty="0">
+                <a:solidFill>
+                  <a:srgbClr val="E2E8F0"/>
+                </a:solidFill>
+                <a:latin typeface="Courier New"/>
+              </a:rPr>
+              <a:t> } from '@/features/notes/components/</a:t>
+            </a:r>
+            <a:r>
+              <a:rPr lang="en-AU" sz="1200" dirty="0" err="1">
+                <a:solidFill>
+                  <a:srgbClr val="E2E8F0"/>
+                </a:solidFill>
+                <a:latin typeface="Courier New"/>
+              </a:rPr>
+              <a:t>NotesList</a:t>
+            </a:r>
+            <a:r>
+              <a:rPr lang="en-AU" sz="1200" dirty="0">
+                <a:solidFill>
+                  <a:srgbClr val="E2E8F0"/>
+                </a:solidFill>
+                <a:latin typeface="Courier New"/>
+              </a:rPr>
+              <a:t>'</a:t>
+            </a:r>
+          </a:p>
+          <a:p>
+            <a:pPr>
+              <a:spcAft>
+                <a:spcPts val="100"/>
+              </a:spcAft>
+            </a:pPr>
+            <a:r>
+              <a:rPr lang="en-AU" sz="1200" dirty="0">
                 <a:solidFill>
                   <a:srgbClr val="E2E8F0"/>
                 </a:solidFill>
@@ -10544,7 +13298,7 @@
               </a:spcAft>
             </a:pPr>
             <a:r>
-              <a:rPr sz="1200">
+              <a:rPr lang="en-AU" sz="1200" dirty="0">
                 <a:solidFill>
                   <a:srgbClr val="E2E8F0"/>
                 </a:solidFill>
@@ -10560,7 +13314,7 @@
               </a:spcAft>
             </a:pPr>
             <a:r>
-              <a:rPr sz="1200">
+              <a:rPr lang="en-AU" sz="1200" dirty="0">
                 <a:solidFill>
                   <a:srgbClr val="E2E8F0"/>
                 </a:solidFill>
@@ -10576,39 +13330,75 @@
               </a:spcAft>
             </a:pPr>
             <a:r>
-              <a:rPr sz="1200">
-                <a:solidFill>
-                  <a:srgbClr val="E2E8F0"/>
-                </a:solidFill>
-                <a:latin typeface="Courier New"/>
-              </a:rPr>
-              <a:t>export default async function NotesPage() {</a:t>
-            </a:r>
-          </a:p>
-          <a:p>
-            <a:pPr>
-              <a:spcAft>
-                <a:spcPts val="100"/>
-              </a:spcAft>
-            </a:pPr>
-            <a:r>
-              <a:rPr sz="1200">
-                <a:solidFill>
-                  <a:srgbClr val="E2E8F0"/>
-                </a:solidFill>
-                <a:latin typeface="Courier New"/>
-              </a:rPr>
-              <a:t>  await requireAuth()</a:t>
-            </a:r>
-          </a:p>
-          <a:p>
-            <a:pPr>
-              <a:spcAft>
-                <a:spcPts val="100"/>
-              </a:spcAft>
-            </a:pPr>
-            <a:r>
-              <a:rPr sz="1200">
+              <a:rPr lang="en-AU" sz="1200" dirty="0">
+                <a:solidFill>
+                  <a:srgbClr val="E2E8F0"/>
+                </a:solidFill>
+                <a:latin typeface="Courier New"/>
+              </a:rPr>
+              <a:t>export default async function </a:t>
+            </a:r>
+            <a:r>
+              <a:rPr lang="en-AU" sz="1200" dirty="0" err="1">
+                <a:solidFill>
+                  <a:srgbClr val="E2E8F0"/>
+                </a:solidFill>
+                <a:latin typeface="Courier New"/>
+              </a:rPr>
+              <a:t>NotesPage</a:t>
+            </a:r>
+            <a:r>
+              <a:rPr lang="en-AU" sz="1200" dirty="0">
+                <a:solidFill>
+                  <a:srgbClr val="E2E8F0"/>
+                </a:solidFill>
+                <a:latin typeface="Courier New"/>
+              </a:rPr>
+              <a:t>() {</a:t>
+            </a:r>
+          </a:p>
+          <a:p>
+            <a:pPr>
+              <a:spcAft>
+                <a:spcPts val="100"/>
+              </a:spcAft>
+            </a:pPr>
+            <a:r>
+              <a:rPr lang="en-AU" sz="1200" dirty="0">
+                <a:solidFill>
+                  <a:srgbClr val="E2E8F0"/>
+                </a:solidFill>
+                <a:latin typeface="Courier New"/>
+              </a:rPr>
+              <a:t>  await </a:t>
+            </a:r>
+            <a:r>
+              <a:rPr lang="en-AU" sz="1200" dirty="0" err="1">
+                <a:solidFill>
+                  <a:srgbClr val="E2E8F0"/>
+                </a:solidFill>
+                <a:latin typeface="Courier New"/>
+              </a:rPr>
+              <a:t>requireAuth</a:t>
+            </a:r>
+            <a:r>
+              <a:rPr lang="en-AU" sz="1200" dirty="0">
+                <a:solidFill>
+                  <a:srgbClr val="E2E8F0"/>
+                </a:solidFill>
+                <a:latin typeface="Courier New"/>
+              </a:rPr>
+              <a:t>()</a:t>
+            </a:r>
+          </a:p>
+          <a:p>
+            <a:pPr>
+              <a:spcAft>
+                <a:spcPts val="100"/>
+              </a:spcAft>
+            </a:pPr>
+            <a:r>
+              <a:rPr lang="en-AU" sz="1200" dirty="0">
                 <a:solidFill>
                   <a:srgbClr val="E2E8F0"/>
                 </a:solidFill>
@@ -10624,71 +13414,143 @@
               </a:spcAft>
             </a:pPr>
             <a:r>
-              <a:rPr sz="1200">
-                <a:solidFill>
-                  <a:srgbClr val="E2E8F0"/>
-                </a:solidFill>
-                <a:latin typeface="Courier New"/>
-              </a:rPr>
-              <a:t>    &lt;div className="space-y-6"&gt;</a:t>
-            </a:r>
-          </a:p>
-          <a:p>
-            <a:pPr>
-              <a:spcAft>
-                <a:spcPts val="100"/>
-              </a:spcAft>
-            </a:pPr>
-            <a:r>
-              <a:rPr sz="1200">
-                <a:solidFill>
-                  <a:srgbClr val="E2E8F0"/>
-                </a:solidFill>
-                <a:latin typeface="Courier New"/>
-              </a:rPr>
-              <a:t>      &lt;PageHeader title="Notes" description="Your personal notes" /&gt;</a:t>
-            </a:r>
-          </a:p>
-          <a:p>
-            <a:pPr>
-              <a:spcAft>
-                <a:spcPts val="100"/>
-              </a:spcAft>
-            </a:pPr>
-            <a:r>
-              <a:rPr sz="1200">
-                <a:solidFill>
-                  <a:srgbClr val="E2E8F0"/>
-                </a:solidFill>
-                <a:latin typeface="Courier New"/>
-              </a:rPr>
-              <a:t>      &lt;CreateNoteForm /&gt;</a:t>
-            </a:r>
-          </a:p>
-          <a:p>
-            <a:pPr>
-              <a:spcAft>
-                <a:spcPts val="100"/>
-              </a:spcAft>
-            </a:pPr>
-            <a:r>
-              <a:rPr sz="1200">
-                <a:solidFill>
-                  <a:srgbClr val="E2E8F0"/>
-                </a:solidFill>
-                <a:latin typeface="Courier New"/>
-              </a:rPr>
-              <a:t>      &lt;NotesList /&gt;</a:t>
-            </a:r>
-          </a:p>
-          <a:p>
-            <a:pPr>
-              <a:spcAft>
-                <a:spcPts val="100"/>
-              </a:spcAft>
-            </a:pPr>
-            <a:r>
-              <a:rPr sz="1200">
+              <a:rPr lang="en-AU" sz="1200" dirty="0">
+                <a:solidFill>
+                  <a:srgbClr val="E2E8F0"/>
+                </a:solidFill>
+                <a:latin typeface="Courier New"/>
+              </a:rPr>
+              <a:t>    &lt;div </a:t>
+            </a:r>
+            <a:r>
+              <a:rPr lang="en-AU" sz="1200" dirty="0" err="1">
+                <a:solidFill>
+                  <a:srgbClr val="E2E8F0"/>
+                </a:solidFill>
+                <a:latin typeface="Courier New"/>
+              </a:rPr>
+              <a:t>className</a:t>
+            </a:r>
+            <a:r>
+              <a:rPr lang="en-AU" sz="1200" dirty="0">
+                <a:solidFill>
+                  <a:srgbClr val="E2E8F0"/>
+                </a:solidFill>
+                <a:latin typeface="Courier New"/>
+              </a:rPr>
+              <a:t>="space-y-6"&gt;</a:t>
+            </a:r>
+          </a:p>
+          <a:p>
+            <a:pPr>
+              <a:spcAft>
+                <a:spcPts val="100"/>
+              </a:spcAft>
+            </a:pPr>
+            <a:r>
+              <a:rPr lang="en-AU" sz="1200" dirty="0">
+                <a:solidFill>
+                  <a:srgbClr val="E2E8F0"/>
+                </a:solidFill>
+                <a:latin typeface="Courier New"/>
+              </a:rPr>
+              <a:t>      &lt;</a:t>
+            </a:r>
+            <a:r>
+              <a:rPr lang="en-AU" sz="1200" dirty="0" err="1">
+                <a:solidFill>
+                  <a:srgbClr val="E2E8F0"/>
+                </a:solidFill>
+                <a:latin typeface="Courier New"/>
+              </a:rPr>
+              <a:t>PageHeader</a:t>
+            </a:r>
+            <a:r>
+              <a:rPr lang="en-AU" sz="1200" dirty="0">
+                <a:solidFill>
+                  <a:srgbClr val="E2E8F0"/>
+                </a:solidFill>
+                <a:latin typeface="Courier New"/>
+              </a:rPr>
+              <a:t> title="Notes" description="Your personal notes" /&gt;</a:t>
+            </a:r>
+          </a:p>
+          <a:p>
+            <a:pPr>
+              <a:spcAft>
+                <a:spcPts val="100"/>
+              </a:spcAft>
+            </a:pPr>
+            <a:r>
+              <a:rPr lang="en-AU" sz="1200" dirty="0">
+                <a:solidFill>
+                  <a:srgbClr val="E2E8F0"/>
+                </a:solidFill>
+                <a:latin typeface="Courier New"/>
+              </a:rPr>
+              <a:t>      &lt;</a:t>
+            </a:r>
+            <a:r>
+              <a:rPr lang="en-AU" sz="1200" dirty="0" err="1">
+                <a:solidFill>
+                  <a:srgbClr val="E2E8F0"/>
+                </a:solidFill>
+                <a:latin typeface="Courier New"/>
+              </a:rPr>
+              <a:t>CreateNoteForm</a:t>
+            </a:r>
+            <a:r>
+              <a:rPr lang="en-AU" sz="1200" dirty="0">
+                <a:solidFill>
+                  <a:srgbClr val="E2E8F0"/>
+                </a:solidFill>
+                <a:latin typeface="Courier New"/>
+              </a:rPr>
+              <a:t> /&gt;</a:t>
+            </a:r>
+          </a:p>
+          <a:p>
+            <a:pPr>
+              <a:spcAft>
+                <a:spcPts val="100"/>
+              </a:spcAft>
+            </a:pPr>
+            <a:r>
+              <a:rPr lang="en-AU" sz="1200" dirty="0">
+                <a:solidFill>
+                  <a:srgbClr val="E2E8F0"/>
+                </a:solidFill>
+                <a:latin typeface="Courier New"/>
+              </a:rPr>
+              <a:t>      &lt;</a:t>
+            </a:r>
+            <a:r>
+              <a:rPr lang="en-AU" sz="1200" dirty="0" err="1">
+                <a:solidFill>
+                  <a:srgbClr val="E2E8F0"/>
+                </a:solidFill>
+                <a:latin typeface="Courier New"/>
+              </a:rPr>
+              <a:t>NotesList</a:t>
+            </a:r>
+            <a:r>
+              <a:rPr lang="en-AU" sz="1200" dirty="0">
+                <a:solidFill>
+                  <a:srgbClr val="E2E8F0"/>
+                </a:solidFill>
+                <a:latin typeface="Courier New"/>
+              </a:rPr>
+              <a:t> /&gt;</a:t>
+            </a:r>
+          </a:p>
+          <a:p>
+            <a:pPr>
+              <a:spcAft>
+                <a:spcPts val="100"/>
+              </a:spcAft>
+            </a:pPr>
+            <a:r>
+              <a:rPr lang="en-AU" sz="1200" dirty="0">
                 <a:solidFill>
                   <a:srgbClr val="E2E8F0"/>
                 </a:solidFill>
@@ -10704,7 +13566,7 @@
               </a:spcAft>
             </a:pPr>
             <a:r>
-              <a:rPr sz="1200">
+              <a:rPr lang="en-AU" sz="1200" dirty="0">
                 <a:solidFill>
                   <a:srgbClr val="E2E8F0"/>
                 </a:solidFill>
@@ -10720,7 +13582,7 @@
               </a:spcAft>
             </a:pPr>
             <a:r>
-              <a:rPr sz="1200">
+              <a:rPr lang="en-AU" sz="1200" dirty="0">
                 <a:solidFill>
                   <a:srgbClr val="E2E8F0"/>
                 </a:solidFill>
@@ -11149,4 +14011,10 @@
   </a:objectDefaults>
   <a:extraClrSchemeLst/>
 </a:theme>
+</file>
+
+<file path=docMetadata/LabelInfo.xml><?xml version="1.0" encoding="utf-8"?>
+<clbl:labelList xmlns:clbl="http://schemas.microsoft.com/office/2020/mipLabelMetadata">
+  <clbl:label id="{ddaa77bc-0157-46a4-82a6-8fc765694bc9}" enabled="1" method="Standard" siteId="{d1323671-cdbe-4417-b4d4-bdb24b51316b}" contentBits="0" removed="0"/>
+</clbl:labelList>
 </file>